--- a/docs/presentazione/PomodorIA_Presentazione.pptx
+++ b/docs/presentazione/PomodorIA_Presentazione.pptx
@@ -4,6 +4,9 @@
   <p:sldMasterIdLst>
     <p:sldMasterId id="2147483648" r:id="rId1"/>
   </p:sldMasterIdLst>
+  <p:notesMasterIdLst>
+    <p:notesMasterId r:id="rId12"/>
+  </p:notesMasterIdLst>
   <p:sldIdLst>
     <p:sldId id="256" r:id="rId2"/>
     <p:sldId id="257" r:id="rId3"/>
@@ -16,9 +19,6 @@
     <p:sldId id="264" r:id="rId10"/>
     <p:sldId id="265" r:id="rId11"/>
   </p:sldIdLst>
-  <p:notesMasterIdLst>
-    <p:notesMasterId r:id="rId12"/>
-  </p:notesMasterIdLst>
   <p:sldSz cx="12192000" cy="6858000"/>
   <p:notesSz cx="6858000" cy="12192000"/>
   <p:defaultTextStyle>
@@ -113,13 +113,20 @@
       </a:defRPr>
     </a:lvl9pPr>
   </p:defaultTextStyle>
+  <p:extLst>
+    <p:ext uri="{EFAFB233-063F-42B5-8137-9DF3F51BA10A}">
+      <p15:sldGuideLst xmlns:p15="http://schemas.microsoft.com/office/powerpoint/2012/main"/>
+    </p:ext>
+  </p:extLst>
 </p:presentation>
 </file>
 
 <file path=ppt/charts/chart1.xml><?xml version="1.0" encoding="utf-8"?>
-<c:chartSpace xmlns:c="http://schemas.openxmlformats.org/drawingml/2006/chart" xmlns:a="http://schemas.openxmlformats.org/drawingml/2006/main" xmlns:r="http://schemas.openxmlformats.org/officeDocument/2006/relationships">
+<c:chartSpace xmlns:c="http://schemas.openxmlformats.org/drawingml/2006/chart" xmlns:a="http://schemas.openxmlformats.org/drawingml/2006/main" xmlns:r="http://schemas.openxmlformats.org/officeDocument/2006/relationships" xmlns:c16r2="http://schemas.microsoft.com/office/drawing/2015/06/chart">
   <c:date1904 val="0"/>
+  <c:lang val="it-IT"/>
   <c:roundedCorners val="1"/>
+  <c:style val="2"/>
   <c:chart>
     <c:title>
       <c:tx>
@@ -136,7 +143,7 @@
               </a:defRPr>
             </a:pPr>
             <a:r>
-              <a:rPr sz="1200" b="1" i="0" u="none" strike="noStrike">
+              <a:rPr lang="it-IT" sz="1200" b="1" i="0" u="none" strike="noStrike">
                 <a:solidFill>
                   <a:srgbClr val="2C5F2D"/>
                 </a:solidFill>
@@ -147,7 +154,6 @@
           </a:p>
         </c:rich>
       </c:tx>
-      <c:layout/>
       <c:overlay val="0"/>
     </c:title>
     <c:autoTitleDeleted val="0"/>
@@ -180,18 +186,26 @@
           <c:invertIfNegative val="0"/>
           <c:dLbls>
             <c:numFmt formatCode="0.0" sourceLinked="0"/>
+            <c:spPr>
+              <a:noFill/>
+              <a:ln>
+                <a:noFill/>
+              </a:ln>
+              <a:effectLst/>
+            </c:spPr>
             <c:txPr>
               <a:bodyPr/>
               <a:lstStyle/>
               <a:p>
                 <a:pPr>
-                  <a:defRPr b="0" i="0" strike="noStrike" sz="1000" u="none">
+                  <a:defRPr sz="1000" b="0" i="0" u="none" strike="noStrike">
                     <a:solidFill>
                       <a:srgbClr val="2C5F2D"/>
                     </a:solidFill>
                     <a:latin typeface="Arial"/>
                   </a:defRPr>
                 </a:pPr>
+                <a:endParaRPr lang="it-IT"/>
               </a:p>
             </c:txPr>
             <c:showLegendKey val="0"/>
@@ -201,28 +215,31 @@
             <c:showPercent val="0"/>
             <c:showBubbleSize val="0"/>
             <c:showLeaderLines val="0"/>
+            <c:extLst>
+              <c:ext xmlns:c15="http://schemas.microsoft.com/office/drawing/2012/chart" uri="{CE6537A1-D6FC-4f65-9D91-7224C49458BB}">
+                <c15:showLeaderLines val="0"/>
+              </c:ext>
+            </c:extLst>
           </c:dLbls>
           <c:cat>
-            <c:multiLvlStrRef>
+            <c:strRef>
               <c:f>Sheet1!$A$2:$A$5</c:f>
-              <c:multiLvlStrCache>
+              <c:strCache>
                 <c:ptCount val="4"/>
-                <c:lvl>
-                  <c:pt idx="0">
-                    <c:v>Baseline</c:v>
-                  </c:pt>
-                  <c:pt idx="1">
-                    <c:v>Pruned 30%</c:v>
-                  </c:pt>
-                  <c:pt idx="2">
-                    <c:v>Pruned+Quant</c:v>
-                  </c:pt>
-                  <c:pt idx="3">
-                    <c:v>ONNX Quant</c:v>
-                  </c:pt>
-                </c:lvl>
-              </c:multiLvlStrCache>
-            </c:multiLvlStrRef>
+                <c:pt idx="0">
+                  <c:v>Baseline</c:v>
+                </c:pt>
+                <c:pt idx="1">
+                  <c:v>Pruned 30%</c:v>
+                </c:pt>
+                <c:pt idx="2">
+                  <c:v>Pruned+Quant</c:v>
+                </c:pt>
+                <c:pt idx="3">
+                  <c:v>ONNX Quant</c:v>
+                </c:pt>
+              </c:strCache>
+            </c:strRef>
           </c:cat>
           <c:val>
             <c:numRef>
@@ -245,36 +262,23 @@
               </c:numCache>
             </c:numRef>
           </c:val>
+          <c:extLst>
+            <c:ext xmlns:c16="http://schemas.microsoft.com/office/drawing/2014/chart" uri="{C3380CC4-5D6E-409C-BE32-E72D297353CC}">
+              <c16:uniqueId val="{00000000-6138-D044-BD47-29AC8035541F}"/>
+            </c:ext>
+          </c:extLst>
         </c:ser>
         <c:dLbls>
-          <c:numFmt formatCode="0.0" sourceLinked="0"/>
-          <c:txPr>
-            <a:bodyPr/>
-            <a:lstStyle/>
-            <a:p>
-              <a:pPr>
-                <a:defRPr b="0" i="0" strike="noStrike" sz="1000" u="none">
-                  <a:solidFill>
-                    <a:srgbClr val="2C5F2D"/>
-                  </a:solidFill>
-                  <a:latin typeface="Arial"/>
-                </a:defRPr>
-              </a:pPr>
-            </a:p>
-          </c:txPr>
           <c:showLegendKey val="0"/>
           <c:showVal val="1"/>
           <c:showCatName val="0"/>
           <c:showSerName val="0"/>
           <c:showPercent val="0"/>
           <c:showBubbleSize val="0"/>
-          <c:showLeaderLines val="0"/>
         </c:dLbls>
         <c:gapWidth val="45"/>
-        <c:overlap val="0"/>
         <c:axId val="2094734554"/>
         <c:axId val="2094734552"/>
-        <c:axId val="2094734556"/>
       </c:barChart>
       <c:catAx>
         <c:axId val="2094734554"/>
@@ -315,6 +319,7 @@
         <c:crosses val="autoZero"/>
         <c:auto val="1"/>
         <c:lblAlgn val="ctr"/>
+        <c:lblOffset val="100"/>
         <c:noMultiLvlLbl val="1"/>
       </c:catAx>
       <c:valAx>
@@ -381,6 +386,7 @@
     </c:plotArea>
     <c:plotVisOnly val="1"/>
     <c:dispBlanksAs val="span"/>
+    <c:showDLblsOverMax val="1"/>
   </c:chart>
   <c:spPr>
     <a:solidFill>
@@ -419,234 +425,10 @@
           <a:chExt cx="0" cy="0"/>
         </a:xfrm>
       </p:grpSpPr>
-      <p:sp>
-        <p:nvSpPr>
-          <p:cNvPr id="2" name="Header Placeholder 1"/>
-          <p:cNvSpPr>
-            <a:spLocks noGrp="1"/>
-          </p:cNvSpPr>
-          <p:nvPr>
-            <p:ph type="hdr" sz="quarter"/>
-          </p:nvPr>
-        </p:nvSpPr>
-        <p:spPr>
-          <a:xfrm>
-            <a:off x="0" y="0"/>
-            <a:ext cx="2971800" cy="458788"/>
-          </a:xfrm>
-          <a:prstGeom prst="rect">
-            <a:avLst/>
-          </a:prstGeom>
-        </p:spPr>
-        <p:txBody>
-          <a:bodyPr vert="horz" lIns="91440" tIns="45720" rIns="91440" bIns="45720" rtlCol="0"/>
-          <a:lstStyle>
-            <a:lvl1pPr algn="l">
-              <a:defRPr sz="1200"/>
-            </a:lvl1pPr>
-          </a:lstStyle>
-          <a:p>
-            <a:endParaRPr lang="en-US"/>
-          </a:p>
-        </p:txBody>
-      </p:sp>
-      <p:sp>
-        <p:nvSpPr>
-          <p:cNvPr id="3" name="Date Placeholder 2"/>
-          <p:cNvSpPr>
-            <a:spLocks noGrp="1"/>
-          </p:cNvSpPr>
-          <p:nvPr>
-            <p:ph type="dt" idx="1"/>
-          </p:nvPr>
-        </p:nvSpPr>
-        <p:spPr>
-          <a:xfrm>
-            <a:off x="3884613" y="0"/>
-            <a:ext cx="2971800" cy="458788"/>
-          </a:xfrm>
-          <a:prstGeom prst="rect">
-            <a:avLst/>
-          </a:prstGeom>
-        </p:spPr>
-        <p:txBody>
-          <a:bodyPr vert="horz" lIns="91440" tIns="45720" rIns="91440" bIns="45720" rtlCol="0"/>
-          <a:lstStyle>
-            <a:lvl1pPr algn="r">
-              <a:defRPr sz="1200"/>
-            </a:lvl1pPr>
-          </a:lstStyle>
-          <a:p>
-            <a:fld id="{5282F153-3F37-0F45-9E97-73ACFA13230C}" type="datetimeFigureOut">
-              <a:rPr lang="en-US"/>
-              <a:t>7/23/19</a:t>
-            </a:fld>
-            <a:endParaRPr lang="en-US"/>
-          </a:p>
-        </p:txBody>
-      </p:sp>
-      <p:sp>
-        <p:nvSpPr>
-          <p:cNvPr id="4" name="Slide Image Placeholder 3"/>
-          <p:cNvSpPr>
-            <a:spLocks noGrp="1" noRot="1" noChangeAspect="1"/>
-          </p:cNvSpPr>
-          <p:nvPr>
-            <p:ph type="sldImg" idx="2"/>
-          </p:nvPr>
-        </p:nvSpPr>
-        <p:spPr>
-          <a:xfrm>
-            <a:off x="685800" y="1143000"/>
-            <a:ext cx="5486400" cy="3086100"/>
-          </a:xfrm>
-          <a:prstGeom prst="rect">
-            <a:avLst/>
-          </a:prstGeom>
-          <a:noFill/>
-          <a:ln w="12700">
-            <a:solidFill>
-              <a:prstClr val="black"/>
-            </a:solidFill>
-          </a:ln>
-        </p:spPr>
-        <p:txBody>
-          <a:bodyPr vert="horz" lIns="91440" tIns="45720" rIns="91440" bIns="45720" rtlCol="0" anchor="ctr"/>
-          <a:lstStyle/>
-          <a:p>
-            <a:endParaRPr lang="en-US"/>
-          </a:p>
-        </p:txBody>
-      </p:sp>
-      <p:sp>
-        <p:nvSpPr>
-          <p:cNvPr id="5" name="Notes Placeholder 4"/>
-          <p:cNvSpPr>
-            <a:spLocks noGrp="1"/>
-          </p:cNvSpPr>
-          <p:nvPr>
-            <p:ph type="body" sz="quarter" idx="3"/>
-          </p:nvPr>
-        </p:nvSpPr>
-        <p:spPr>
-          <a:xfrm>
-            <a:off x="685800" y="4400550"/>
-            <a:ext cx="5486400" cy="3600450"/>
-          </a:xfrm>
-          <a:prstGeom prst="rect">
-            <a:avLst/>
-          </a:prstGeom>
-        </p:spPr>
-        <p:txBody>
-          <a:bodyPr vert="horz" lIns="91440" tIns="45720" rIns="91440" bIns="45720" rtlCol="0"/>
-          <a:lstStyle/>
-          <a:p>
-            <a:pPr lvl="0"/>
-            <a:r>
-              <a:rPr lang="en-US"/>
-              <a:t>Click to edit Master text styles</a:t>
-            </a:r>
-          </a:p>
-          <a:p>
-            <a:pPr lvl="1"/>
-            <a:r>
-              <a:rPr lang="en-US"/>
-              <a:t>Second level</a:t>
-            </a:r>
-          </a:p>
-          <a:p>
-            <a:pPr lvl="2"/>
-            <a:r>
-              <a:rPr lang="en-US"/>
-              <a:t>Third level</a:t>
-            </a:r>
-          </a:p>
-          <a:p>
-            <a:pPr lvl="3"/>
-            <a:r>
-              <a:rPr lang="en-US"/>
-              <a:t>Fourth level</a:t>
-            </a:r>
-          </a:p>
-          <a:p>
-            <a:pPr lvl="4"/>
-            <a:r>
-              <a:rPr lang="en-US"/>
-              <a:t>Fifth level</a:t>
-            </a:r>
-          </a:p>
-        </p:txBody>
-      </p:sp>
-      <p:sp>
-        <p:nvSpPr>
-          <p:cNvPr id="6" name="Footer Placeholder 5"/>
-          <p:cNvSpPr>
-            <a:spLocks noGrp="1"/>
-          </p:cNvSpPr>
-          <p:nvPr>
-            <p:ph type="ftr" sz="quarter" idx="4"/>
-          </p:nvPr>
-        </p:nvSpPr>
-        <p:spPr>
-          <a:xfrm>
-            <a:off x="0" y="8685213"/>
-            <a:ext cx="2971800" cy="458787"/>
-          </a:xfrm>
-          <a:prstGeom prst="rect">
-            <a:avLst/>
-          </a:prstGeom>
-        </p:spPr>
-        <p:txBody>
-          <a:bodyPr vert="horz" lIns="91440" tIns="45720" rIns="91440" bIns="45720" rtlCol="0" anchor="b"/>
-          <a:lstStyle>
-            <a:lvl1pPr algn="l">
-              <a:defRPr sz="1200"/>
-            </a:lvl1pPr>
-          </a:lstStyle>
-          <a:p>
-            <a:endParaRPr lang="en-US"/>
-          </a:p>
-        </p:txBody>
-      </p:sp>
-      <p:sp>
-        <p:nvSpPr>
-          <p:cNvPr id="7" name="Slide Number Placeholder 6"/>
-          <p:cNvSpPr>
-            <a:spLocks noGrp="1"/>
-          </p:cNvSpPr>
-          <p:nvPr>
-            <p:ph type="sldNum" sz="quarter" idx="5"/>
-          </p:nvPr>
-        </p:nvSpPr>
-        <p:spPr>
-          <a:xfrm>
-            <a:off x="3884613" y="8685213"/>
-            <a:ext cx="2971800" cy="458787"/>
-          </a:xfrm>
-          <a:prstGeom prst="rect">
-            <a:avLst/>
-          </a:prstGeom>
-        </p:spPr>
-        <p:txBody>
-          <a:bodyPr vert="horz" lIns="91440" tIns="45720" rIns="91440" bIns="45720" rtlCol="0" anchor="b"/>
-          <a:lstStyle>
-            <a:lvl1pPr algn="r">
-              <a:defRPr sz="1200"/>
-            </a:lvl1pPr>
-          </a:lstStyle>
-          <a:p>
-            <a:fld id="{CE5E9CC1-C706-0F49-92D6-E571CC5EEA8F}" type="slidenum">
-              <a:rPr lang="en-US"/>
-              <a:t>‹#›</a:t>
-            </a:fld>
-            <a:endParaRPr lang="en-US"/>
-          </a:p>
-        </p:txBody>
-      </p:sp>
     </p:spTree>
     <p:extLst>
       <p:ext uri="{BB962C8B-B14F-4D97-AF65-F5344CB8AC3E}">
-        <p14:creationId xmlns:p14="http://schemas.microsoft.com/office/powerpoint/2010/main" val="1024086991"/>
+        <p14:creationId xmlns:p14="http://schemas.microsoft.com/office/powerpoint/2010/main" val="2418838669"/>
       </p:ext>
     </p:extLst>
   </p:cSld>
@@ -790,10 +572,6 @@
           <a:bodyPr/>
           <a:lstStyle/>
           <a:p>
-            <a:r>
-              <a:rPr lang="en-US" dirty="0"/>
-              <a:t/>
-            </a:r>
             <a:endParaRPr lang="en-US" dirty="0"/>
           </a:p>
         </p:txBody>
@@ -878,10 +656,6 @@
           <a:bodyPr/>
           <a:lstStyle/>
           <a:p>
-            <a:r>
-              <a:rPr lang="en-US" dirty="0"/>
-              <a:t/>
-            </a:r>
             <a:endParaRPr lang="en-US" dirty="0"/>
           </a:p>
         </p:txBody>
@@ -966,10 +740,6 @@
           <a:bodyPr/>
           <a:lstStyle/>
           <a:p>
-            <a:r>
-              <a:rPr lang="en-US" dirty="0"/>
-              <a:t/>
-            </a:r>
             <a:endParaRPr lang="en-US" dirty="0"/>
           </a:p>
         </p:txBody>
@@ -1054,10 +824,6 @@
           <a:bodyPr/>
           <a:lstStyle/>
           <a:p>
-            <a:r>
-              <a:rPr lang="en-US" dirty="0"/>
-              <a:t/>
-            </a:r>
             <a:endParaRPr lang="en-US" dirty="0"/>
           </a:p>
         </p:txBody>
@@ -1142,10 +908,6 @@
           <a:bodyPr/>
           <a:lstStyle/>
           <a:p>
-            <a:r>
-              <a:rPr lang="en-US" dirty="0"/>
-              <a:t/>
-            </a:r>
             <a:endParaRPr lang="en-US" dirty="0"/>
           </a:p>
         </p:txBody>
@@ -1230,10 +992,6 @@
           <a:bodyPr/>
           <a:lstStyle/>
           <a:p>
-            <a:r>
-              <a:rPr lang="en-US" dirty="0"/>
-              <a:t/>
-            </a:r>
             <a:endParaRPr lang="en-US" dirty="0"/>
           </a:p>
         </p:txBody>
@@ -1318,10 +1076,6 @@
           <a:bodyPr/>
           <a:lstStyle/>
           <a:p>
-            <a:r>
-              <a:rPr lang="en-US" dirty="0"/>
-              <a:t/>
-            </a:r>
             <a:endParaRPr lang="en-US" dirty="0"/>
           </a:p>
         </p:txBody>
@@ -1406,10 +1160,6 @@
           <a:bodyPr/>
           <a:lstStyle/>
           <a:p>
-            <a:r>
-              <a:rPr lang="en-US" dirty="0"/>
-              <a:t/>
-            </a:r>
             <a:endParaRPr lang="en-US" dirty="0"/>
           </a:p>
         </p:txBody>
@@ -1494,10 +1244,6 @@
           <a:bodyPr/>
           <a:lstStyle/>
           <a:p>
-            <a:r>
-              <a:rPr lang="en-US" dirty="0"/>
-              <a:t/>
-            </a:r>
             <a:endParaRPr lang="en-US" dirty="0"/>
           </a:p>
         </p:txBody>
@@ -1582,10 +1328,6 @@
           <a:bodyPr/>
           <a:lstStyle/>
           <a:p>
-            <a:r>
-              <a:rPr lang="en-US" dirty="0"/>
-              <a:t/>
-            </a:r>
             <a:endParaRPr lang="en-US" dirty="0"/>
           </a:p>
         </p:txBody>
@@ -1659,6 +1401,11 @@
 <file path=ppt/slideMasters/slideMaster1.xml><?xml version="1.0" encoding="utf-8"?>
 <p:sldMaster xmlns:a="http://schemas.openxmlformats.org/drawingml/2006/main" xmlns:r="http://schemas.openxmlformats.org/officeDocument/2006/relationships" xmlns:p="http://schemas.openxmlformats.org/presentationml/2006/main">
   <p:cSld>
+    <p:bg>
+      <p:bgRef idx="1001">
+        <a:schemeClr val="bg1"/>
+      </p:bgRef>
+    </p:bg>
     <p:spTree>
       <p:nvGrpSpPr>
         <p:cNvPr id="1" name=""/>
@@ -1941,6 +1688,7 @@
         <a:solidFill>
           <a:srgbClr val="2C5F2D"/>
         </a:solidFill>
+        <a:effectLst/>
       </p:bgPr>
     </p:bg>
     <p:spTree>
@@ -1978,6 +1726,13 @@
           </a:solidFill>
           <a:ln/>
         </p:spPr>
+        <p:txBody>
+          <a:bodyPr/>
+          <a:lstStyle/>
+          <a:p>
+            <a:endParaRPr lang="it-IT"/>
+          </a:p>
+        </p:txBody>
       </p:sp>
       <p:sp>
         <p:nvSpPr>
@@ -2000,6 +1755,13 @@
           </a:solidFill>
           <a:ln/>
         </p:spPr>
+        <p:txBody>
+          <a:bodyPr/>
+          <a:lstStyle/>
+          <a:p>
+            <a:endParaRPr lang="it-IT"/>
+          </a:p>
+        </p:txBody>
       </p:sp>
       <p:sp>
         <p:nvSpPr>
@@ -2020,17 +1782,24 @@
           </a:solidFill>
           <a:ln/>
         </p:spPr>
+        <p:txBody>
+          <a:bodyPr/>
+          <a:lstStyle/>
+          <a:p>
+            <a:endParaRPr lang="it-IT"/>
+          </a:p>
+        </p:txBody>
       </p:sp>
       <p:pic>
         <p:nvPicPr>
-          <p:cNvPr id="5" name="Image 0" descr="/private/tmp/claude-501/-Users-gianmarcovellotti-Desktop-LM-1-anno-IoT-PomodorIA/d58fc5f1-3fb5-4f2f-a56b-ba8bb07e0c51/scratchpad/pptx/icons/leaf_white.png">    </p:cNvPr>
+          <p:cNvPr id="5" name="Image 0" descr="/private/tmp/claude-501/-Users-gianmarcovellotti-Desktop-LM-1-anno-IoT-PomodorIA/d58fc5f1-3fb5-4f2f-a56b-ba8bb07e0c51/scratchpad/pptx/icons/leaf_white.png"/>
           <p:cNvPicPr>
             <a:picLocks noChangeAspect="1"/>
           </p:cNvPicPr>
           <p:nvPr/>
         </p:nvPicPr>
         <p:blipFill>
-          <a:blip r:embed="rId1"/>
+          <a:blip r:embed="rId3"/>
           <a:stretch>
             <a:fillRect/>
           </a:stretch>
@@ -2066,7 +1835,7 @@
           <a:bodyPr wrap="square" lIns="0" tIns="0" rIns="0" bIns="0" rtlCol="0" anchor="ctr"/>
           <a:lstStyle/>
           <a:p>
-            <a:pPr indent="0" marL="0">
+            <a:pPr marL="0" indent="0">
               <a:buNone/>
             </a:pPr>
             <a:r>
@@ -2105,7 +1874,7 @@
           <a:bodyPr wrap="square" lIns="0" tIns="0" rIns="0" bIns="0" rtlCol="0" anchor="ctr"/>
           <a:lstStyle/>
           <a:p>
-            <a:pPr indent="0" marL="0">
+            <a:pPr marL="0" indent="0">
               <a:buNone/>
             </a:pPr>
             <a:r>
@@ -2144,7 +1913,7 @@
           <a:bodyPr wrap="square" lIns="0" tIns="0" rIns="0" bIns="0" rtlCol="0" anchor="ctr"/>
           <a:lstStyle/>
           <a:p>
-            <a:pPr indent="0" marL="0">
+            <a:pPr marL="0" indent="0">
               <a:lnSpc>
                 <a:spcPct val="130000"/>
               </a:lnSpc>
@@ -2164,7 +1933,7 @@
             <a:endParaRPr lang="en-US" sz="1400" dirty="0"/>
           </a:p>
           <a:p>
-            <a:pPr indent="0" marL="0">
+            <a:pPr marL="0" indent="0">
               <a:lnSpc>
                 <a:spcPct val="130000"/>
               </a:lnSpc>
@@ -2201,6 +1970,7 @@
         <a:solidFill>
           <a:srgbClr val="2C5F2D"/>
         </a:solidFill>
+        <a:effectLst/>
       </p:bgPr>
     </p:bg>
     <p:spTree>
@@ -2225,7 +1995,7 @@
         </p:nvSpPr>
         <p:spPr>
           <a:xfrm>
-            <a:off x="-1828800" y="4114800"/>
+            <a:off x="-1874520" y="4114800"/>
             <a:ext cx="5486400" cy="5486400"/>
           </a:xfrm>
           <a:prstGeom prst="ellipse">
@@ -2238,6 +2008,13 @@
           </a:solidFill>
           <a:ln/>
         </p:spPr>
+        <p:txBody>
+          <a:bodyPr/>
+          <a:lstStyle/>
+          <a:p>
+            <a:endParaRPr lang="it-IT"/>
+          </a:p>
+        </p:txBody>
       </p:sp>
       <p:sp>
         <p:nvSpPr>
@@ -2258,17 +2035,24 @@
           </a:solidFill>
           <a:ln/>
         </p:spPr>
+        <p:txBody>
+          <a:bodyPr/>
+          <a:lstStyle/>
+          <a:p>
+            <a:endParaRPr lang="it-IT"/>
+          </a:p>
+        </p:txBody>
       </p:sp>
       <p:pic>
         <p:nvPicPr>
-          <p:cNvPr id="4" name="Image 0" descr="/private/tmp/claude-501/-Users-gianmarcovellotti-Desktop-LM-1-anno-IoT-PomodorIA/d58fc5f1-3fb5-4f2f-a56b-ba8bb07e0c51/scratchpad/pptx/icons/check_white.png">    </p:cNvPr>
+          <p:cNvPr id="4" name="Image 0" descr="/private/tmp/claude-501/-Users-gianmarcovellotti-Desktop-LM-1-anno-IoT-PomodorIA/d58fc5f1-3fb5-4f2f-a56b-ba8bb07e0c51/scratchpad/pptx/icons/check_white.png"/>
           <p:cNvPicPr>
             <a:picLocks noChangeAspect="1"/>
           </p:cNvPicPr>
           <p:nvPr/>
         </p:nvPicPr>
         <p:blipFill>
-          <a:blip r:embed="rId1"/>
+          <a:blip r:embed="rId3"/>
           <a:stretch>
             <a:fillRect/>
           </a:stretch>
@@ -2304,7 +2088,7 @@
           <a:bodyPr wrap="square" lIns="0" tIns="0" rIns="0" bIns="0" rtlCol="0" anchor="ctr"/>
           <a:lstStyle/>
           <a:p>
-            <a:pPr indent="0" marL="0">
+            <a:pPr marL="0" indent="0">
               <a:buNone/>
             </a:pPr>
             <a:r>
@@ -2343,7 +2127,7 @@
           <a:bodyPr wrap="square" lIns="0" tIns="0" rIns="0" bIns="0" rtlCol="0" anchor="ctr"/>
           <a:lstStyle/>
           <a:p>
-            <a:pPr indent="0" marL="0">
+            <a:pPr marL="0" indent="0">
               <a:lnSpc>
                 <a:spcPct val="130000"/>
               </a:lnSpc>
@@ -2383,6 +2167,13 @@
           </a:solidFill>
           <a:ln/>
         </p:spPr>
+        <p:txBody>
+          <a:bodyPr/>
+          <a:lstStyle/>
+          <a:p>
+            <a:endParaRPr lang="it-IT"/>
+          </a:p>
+        </p:txBody>
       </p:sp>
       <p:sp>
         <p:nvSpPr>
@@ -2405,7 +2196,7 @@
           <a:bodyPr wrap="square" lIns="0" tIns="0" rIns="0" bIns="0" rtlCol="0" anchor="ctr"/>
           <a:lstStyle/>
           <a:p>
-            <a:pPr indent="0" marL="0">
+            <a:pPr marL="0" indent="0">
               <a:buNone/>
             </a:pPr>
             <a:r>
@@ -2442,6 +2233,13 @@
           </a:solidFill>
           <a:ln/>
         </p:spPr>
+        <p:txBody>
+          <a:bodyPr/>
+          <a:lstStyle/>
+          <a:p>
+            <a:endParaRPr lang="it-IT"/>
+          </a:p>
+        </p:txBody>
       </p:sp>
       <p:sp>
         <p:nvSpPr>
@@ -2464,7 +2262,7 @@
           <a:bodyPr wrap="square" lIns="0" tIns="0" rIns="0" bIns="0" rtlCol="0" anchor="ctr"/>
           <a:lstStyle/>
           <a:p>
-            <a:pPr indent="0" marL="0">
+            <a:pPr marL="0" indent="0">
               <a:buNone/>
             </a:pPr>
             <a:r>
@@ -2501,6 +2299,13 @@
           </a:solidFill>
           <a:ln/>
         </p:spPr>
+        <p:txBody>
+          <a:bodyPr/>
+          <a:lstStyle/>
+          <a:p>
+            <a:endParaRPr lang="it-IT"/>
+          </a:p>
+        </p:txBody>
       </p:sp>
       <p:sp>
         <p:nvSpPr>
@@ -2523,7 +2328,7 @@
           <a:bodyPr wrap="square" lIns="0" tIns="0" rIns="0" bIns="0" rtlCol="0" anchor="ctr"/>
           <a:lstStyle/>
           <a:p>
-            <a:pPr indent="0" marL="0">
+            <a:pPr marL="0" indent="0">
               <a:buNone/>
             </a:pPr>
             <a:r>
@@ -2560,6 +2365,13 @@
           </a:solidFill>
           <a:ln/>
         </p:spPr>
+        <p:txBody>
+          <a:bodyPr/>
+          <a:lstStyle/>
+          <a:p>
+            <a:endParaRPr lang="it-IT"/>
+          </a:p>
+        </p:txBody>
       </p:sp>
       <p:sp>
         <p:nvSpPr>
@@ -2582,7 +2394,7 @@
           <a:bodyPr wrap="square" lIns="0" tIns="0" rIns="0" bIns="0" rtlCol="0" anchor="ctr"/>
           <a:lstStyle/>
           <a:p>
-            <a:pPr indent="0" marL="0">
+            <a:pPr marL="0" indent="0">
               <a:buNone/>
             </a:pPr>
             <a:r>
@@ -2621,6 +2433,13 @@
           </a:solidFill>
           <a:ln/>
         </p:spPr>
+        <p:txBody>
+          <a:bodyPr/>
+          <a:lstStyle/>
+          <a:p>
+            <a:endParaRPr lang="it-IT" dirty="0"/>
+          </a:p>
+        </p:txBody>
       </p:sp>
       <p:sp>
         <p:nvSpPr>
@@ -2643,7 +2462,7 @@
           <a:bodyPr wrap="square" lIns="0" tIns="0" rIns="0" bIns="0" rtlCol="0" anchor="ctr"/>
           <a:lstStyle/>
           <a:p>
-            <a:pPr algn="ctr" indent="0" marL="0">
+            <a:pPr marL="0" indent="0" algn="ctr">
               <a:buNone/>
             </a:pPr>
             <a:r>
@@ -2682,7 +2501,7 @@
           <a:bodyPr wrap="square" lIns="0" tIns="0" rIns="0" bIns="0" rtlCol="0" anchor="ctr"/>
           <a:lstStyle/>
           <a:p>
-            <a:pPr algn="ctr" indent="0" marL="0">
+            <a:pPr marL="0" indent="0" algn="ctr">
               <a:lnSpc>
                 <a:spcPct val="125000"/>
               </a:lnSpc>
@@ -2702,7 +2521,7 @@
             <a:endParaRPr lang="en-US" sz="1200" dirty="0"/>
           </a:p>
           <a:p>
-            <a:pPr algn="ctr" indent="0" marL="0">
+            <a:pPr marL="0" indent="0" algn="ctr">
               <a:lnSpc>
                 <a:spcPct val="125000"/>
               </a:lnSpc>
@@ -2745,6 +2564,13 @@
             <a:prstDash val="solid"/>
           </a:ln>
         </p:spPr>
+        <p:txBody>
+          <a:bodyPr/>
+          <a:lstStyle/>
+          <a:p>
+            <a:endParaRPr lang="it-IT"/>
+          </a:p>
+        </p:txBody>
       </p:sp>
       <p:sp>
         <p:nvSpPr>
@@ -2767,7 +2593,7 @@
           <a:bodyPr wrap="square" lIns="0" tIns="0" rIns="0" bIns="0" rtlCol="0" anchor="ctr"/>
           <a:lstStyle/>
           <a:p>
-            <a:pPr algn="ctr" indent="0" marL="0">
+            <a:pPr marL="0" indent="0" algn="ctr">
               <a:buNone/>
             </a:pPr>
             <a:r>
@@ -2806,7 +2632,7 @@
           <a:bodyPr wrap="square" lIns="0" tIns="0" rIns="0" bIns="0" rtlCol="0" anchor="ctr"/>
           <a:lstStyle/>
           <a:p>
-            <a:pPr algn="ctr" indent="0" marL="0">
+            <a:pPr marL="0" indent="0" algn="ctr">
               <a:lnSpc>
                 <a:spcPct val="120000"/>
               </a:lnSpc>
@@ -2848,7 +2674,7 @@
           <a:bodyPr wrap="square" lIns="0" tIns="0" rIns="0" bIns="0" rtlCol="0" anchor="ctr"/>
           <a:lstStyle/>
           <a:p>
-            <a:pPr indent="0" marL="0">
+            <a:pPr marL="0" indent="0">
               <a:buNone/>
             </a:pPr>
             <a:r>
@@ -2887,7 +2713,7 @@
           <a:bodyPr wrap="square" lIns="0" tIns="0" rIns="0" bIns="0" rtlCol="0" anchor="ctr"/>
           <a:lstStyle/>
           <a:p>
-            <a:pPr algn="r" indent="0" marL="0">
+            <a:pPr marL="0" indent="0" algn="r">
               <a:buNone/>
             </a:pPr>
             <a:r>
@@ -2921,6 +2747,7 @@
         <a:solidFill>
           <a:srgbClr val="FFFFFF"/>
         </a:solidFill>
+        <a:effectLst/>
       </p:bgPr>
     </p:bg>
     <p:spTree>
@@ -2958,11 +2785,11 @@
           <a:bodyPr wrap="square" lIns="0" tIns="0" rIns="0" bIns="0" rtlCol="0" anchor="ctr"/>
           <a:lstStyle/>
           <a:p>
-            <a:pPr indent="0" marL="0">
-              <a:buNone/>
-            </a:pPr>
-            <a:r>
-              <a:rPr lang="en-US" sz="1300" b="1" spc="200" kern="0" dirty="0">
+            <a:pPr marL="0" indent="0">
+              <a:buNone/>
+            </a:pPr>
+            <a:r>
+              <a:rPr lang="en-US" sz="1300" b="1" kern="0" spc="200" dirty="0">
                 <a:solidFill>
                   <a:srgbClr val="C0392B"/>
                 </a:solidFill>
@@ -2997,7 +2824,7 @@
           <a:bodyPr wrap="square" lIns="0" tIns="0" rIns="0" bIns="0" rtlCol="0" anchor="ctr"/>
           <a:lstStyle/>
           <a:p>
-            <a:pPr indent="0" marL="0">
+            <a:pPr marL="0" indent="0">
               <a:buNone/>
             </a:pPr>
             <a:r>
@@ -3036,7 +2863,7 @@
           <a:bodyPr wrap="square" lIns="0" tIns="0" rIns="0" bIns="0" rtlCol="0" anchor="ctr"/>
           <a:lstStyle/>
           <a:p>
-            <a:pPr indent="0" marL="0">
+            <a:pPr marL="0" indent="0">
               <a:lnSpc>
                 <a:spcPct val="125000"/>
               </a:lnSpc>
@@ -3083,6 +2910,13 @@
             <a:prstDash val="solid"/>
           </a:ln>
         </p:spPr>
+        <p:txBody>
+          <a:bodyPr/>
+          <a:lstStyle/>
+          <a:p>
+            <a:endParaRPr lang="it-IT"/>
+          </a:p>
+        </p:txBody>
       </p:sp>
       <p:sp>
         <p:nvSpPr>
@@ -3105,11 +2939,11 @@
           <a:bodyPr wrap="square" lIns="0" tIns="0" rIns="0" bIns="0" rtlCol="0" anchor="ctr"/>
           <a:lstStyle/>
           <a:p>
-            <a:pPr indent="0" marL="0">
-              <a:buNone/>
-            </a:pPr>
-            <a:r>
-              <a:rPr lang="en-US" sz="1050" b="1" spc="100" kern="0" dirty="0">
+            <a:pPr marL="0" indent="0">
+              <a:buNone/>
+            </a:pPr>
+            <a:r>
+              <a:rPr lang="en-US" sz="1050" b="1" kern="0" spc="100" dirty="0">
                 <a:solidFill>
                   <a:srgbClr val="6E9B57"/>
                 </a:solidFill>
@@ -3144,6 +2978,13 @@
           </a:solidFill>
           <a:ln/>
         </p:spPr>
+        <p:txBody>
+          <a:bodyPr/>
+          <a:lstStyle/>
+          <a:p>
+            <a:endParaRPr lang="it-IT"/>
+          </a:p>
+        </p:txBody>
       </p:sp>
       <p:sp>
         <p:nvSpPr>
@@ -3164,382 +3005,17 @@
           </a:solidFill>
           <a:ln/>
         </p:spPr>
+        <p:txBody>
+          <a:bodyPr/>
+          <a:lstStyle/>
+          <a:p>
+            <a:endParaRPr lang="it-IT"/>
+          </a:p>
+        </p:txBody>
       </p:sp>
       <p:pic>
         <p:nvPicPr>
-          <p:cNvPr id="9" name="Image 0" descr="/private/tmp/claude-501/-Users-gianmarcovellotti-Desktop-LM-1-anno-IoT-PomodorIA/d58fc5f1-3fb5-4f2f-a56b-ba8bb07e0c51/scratchpad/pptx/icons/camera_white.png">    </p:cNvPr>
-          <p:cNvPicPr>
-            <a:picLocks noChangeAspect="1"/>
-          </p:cNvPicPr>
-          <p:nvPr/>
-        </p:nvPicPr>
-        <p:blipFill>
-          <a:blip r:embed="rId1"/>
-          <a:stretch>
-            <a:fillRect/>
-          </a:stretch>
-        </p:blipFill>
-        <p:spPr>
-          <a:xfrm>
-            <a:off x="1578712" y="3319272"/>
-            <a:ext cx="347472" cy="347472"/>
-          </a:xfrm>
-          <a:prstGeom prst="rect">
-            <a:avLst/>
-          </a:prstGeom>
-        </p:spPr>
-      </p:pic>
-      <p:sp>
-        <p:nvSpPr>
-          <p:cNvPr id="10" name="Text 7"/>
-          <p:cNvSpPr/>
-          <p:nvPr/>
-        </p:nvSpPr>
-        <p:spPr>
-          <a:xfrm>
-            <a:off x="2118208" y="3227832"/>
-            <a:ext cx="1920240" cy="365760"/>
-          </a:xfrm>
-          <a:prstGeom prst="rect">
-            <a:avLst/>
-          </a:prstGeom>
-          <a:noFill/>
-          <a:ln/>
-        </p:spPr>
-        <p:txBody>
-          <a:bodyPr wrap="square" lIns="0" tIns="0" rIns="0" bIns="0" rtlCol="0" anchor="ctr"/>
-          <a:lstStyle/>
-          <a:p>
-            <a:pPr indent="0" marL="0">
-              <a:buNone/>
-            </a:pPr>
-            <a:r>
-              <a:rPr lang="en-US" sz="1300" b="1" dirty="0">
-                <a:solidFill>
-                  <a:srgbClr val="FFFFFF"/>
-                </a:solidFill>
-                <a:latin typeface="Calibri" pitchFamily="34" charset="0"/>
-                <a:ea typeface="Calibri" pitchFamily="34" charset="-122"/>
-                <a:cs typeface="Calibri" pitchFamily="34" charset="-120"/>
-              </a:rPr>
-              <a:t>Sensor Layer</a:t>
-            </a:r>
-            <a:endParaRPr lang="en-US" sz="1300" dirty="0"/>
-          </a:p>
-        </p:txBody>
-      </p:sp>
-      <p:sp>
-        <p:nvSpPr>
-          <p:cNvPr id="11" name="Text 8"/>
-          <p:cNvSpPr/>
-          <p:nvPr/>
-        </p:nvSpPr>
-        <p:spPr>
-          <a:xfrm>
-            <a:off x="2118208" y="3593592"/>
-            <a:ext cx="1920240" cy="502920"/>
-          </a:xfrm>
-          <a:prstGeom prst="rect">
-            <a:avLst/>
-          </a:prstGeom>
-          <a:noFill/>
-          <a:ln/>
-        </p:spPr>
-        <p:txBody>
-          <a:bodyPr wrap="square" lIns="0" tIns="0" rIns="0" bIns="0" rtlCol="0" anchor="t"/>
-          <a:lstStyle/>
-          <a:p>
-            <a:pPr indent="0" marL="0">
-              <a:lnSpc>
-                <a:spcPct val="110000"/>
-              </a:lnSpc>
-              <a:buNone/>
-            </a:pPr>
-            <a:r>
-              <a:rPr lang="en-US" sz="1000" dirty="0">
-                <a:solidFill>
-                  <a:srgbClr val="D7E4CF"/>
-                </a:solidFill>
-                <a:latin typeface="Calibri" pitchFamily="34" charset="0"/>
-                <a:ea typeface="Calibri" pitchFamily="34" charset="-122"/>
-                <a:cs typeface="Calibri" pitchFamily="34" charset="-120"/>
-              </a:rPr>
-              <a:t>fotocamera + sensori</a:t>
-            </a:r>
-            <a:endParaRPr lang="en-US" sz="1000" dirty="0"/>
-          </a:p>
-        </p:txBody>
-      </p:sp>
-      <p:sp>
-        <p:nvSpPr>
-          <p:cNvPr id="12" name="Text 9"/>
-          <p:cNvSpPr/>
-          <p:nvPr/>
-        </p:nvSpPr>
-        <p:spPr>
-          <a:xfrm>
-            <a:off x="4175608" y="3447288"/>
-            <a:ext cx="502920" cy="457200"/>
-          </a:xfrm>
-          <a:prstGeom prst="rect">
-            <a:avLst/>
-          </a:prstGeom>
-          <a:noFill/>
-          <a:ln/>
-        </p:spPr>
-        <p:txBody>
-          <a:bodyPr wrap="square" lIns="0" tIns="0" rIns="0" bIns="0" rtlCol="0" anchor="ctr"/>
-          <a:lstStyle/>
-          <a:p>
-            <a:pPr algn="ctr" indent="0" marL="0">
-              <a:buNone/>
-            </a:pPr>
-            <a:r>
-              <a:rPr lang="en-US" sz="2000" b="1" dirty="0">
-                <a:solidFill>
-                  <a:srgbClr val="6E9B57"/>
-                </a:solidFill>
-                <a:latin typeface="Arial" pitchFamily="34" charset="0"/>
-                <a:ea typeface="Arial" pitchFamily="34" charset="-122"/>
-                <a:cs typeface="Arial" pitchFamily="34" charset="-120"/>
-              </a:rPr>
-              <a:t>→</a:t>
-            </a:r>
-            <a:endParaRPr lang="en-US" sz="2000" dirty="0"/>
-          </a:p>
-        </p:txBody>
-      </p:sp>
-      <p:sp>
-        <p:nvSpPr>
-          <p:cNvPr id="13" name="Shape 10"/>
-          <p:cNvSpPr/>
-          <p:nvPr/>
-        </p:nvSpPr>
-        <p:spPr>
-          <a:xfrm>
-            <a:off x="4678528" y="3063240"/>
-            <a:ext cx="2834640" cy="1234440"/>
-          </a:xfrm>
-          <a:prstGeom prst="roundRect">
-            <a:avLst>
-              <a:gd name="adj" fmla="val 7407"/>
-            </a:avLst>
-          </a:prstGeom>
-          <a:solidFill>
-            <a:srgbClr val="2C5F2D"/>
-          </a:solidFill>
-          <a:ln/>
-        </p:spPr>
-      </p:sp>
-      <p:sp>
-        <p:nvSpPr>
-          <p:cNvPr id="14" name="Shape 11"/>
-          <p:cNvSpPr/>
-          <p:nvPr/>
-        </p:nvSpPr>
-        <p:spPr>
-          <a:xfrm>
-            <a:off x="4861408" y="3264408"/>
-            <a:ext cx="457200" cy="457200"/>
-          </a:xfrm>
-          <a:prstGeom prst="ellipse">
-            <a:avLst/>
-          </a:prstGeom>
-          <a:solidFill>
-            <a:srgbClr val="C0392B"/>
-          </a:solidFill>
-          <a:ln/>
-        </p:spPr>
-      </p:sp>
-      <p:pic>
-        <p:nvPicPr>
-          <p:cNvPr id="15" name="Image 1" descr="/private/tmp/claude-501/-Users-gianmarcovellotti-Desktop-LM-1-anno-IoT-PomodorIA/d58fc5f1-3fb5-4f2f-a56b-ba8bb07e0c51/scratchpad/pptx/icons/cpu_white.png">    </p:cNvPr>
-          <p:cNvPicPr>
-            <a:picLocks noChangeAspect="1"/>
-          </p:cNvPicPr>
-          <p:nvPr/>
-        </p:nvPicPr>
-        <p:blipFill>
-          <a:blip r:embed="rId2"/>
-          <a:stretch>
-            <a:fillRect/>
-          </a:stretch>
-        </p:blipFill>
-        <p:spPr>
-          <a:xfrm>
-            <a:off x="4916272" y="3319272"/>
-            <a:ext cx="347472" cy="347472"/>
-          </a:xfrm>
-          <a:prstGeom prst="rect">
-            <a:avLst/>
-          </a:prstGeom>
-        </p:spPr>
-      </p:pic>
-      <p:sp>
-        <p:nvSpPr>
-          <p:cNvPr id="16" name="Text 12"/>
-          <p:cNvSpPr/>
-          <p:nvPr/>
-        </p:nvSpPr>
-        <p:spPr>
-          <a:xfrm>
-            <a:off x="5455768" y="3227832"/>
-            <a:ext cx="1920240" cy="365760"/>
-          </a:xfrm>
-          <a:prstGeom prst="rect">
-            <a:avLst/>
-          </a:prstGeom>
-          <a:noFill/>
-          <a:ln/>
-        </p:spPr>
-        <p:txBody>
-          <a:bodyPr wrap="square" lIns="0" tIns="0" rIns="0" bIns="0" rtlCol="0" anchor="ctr"/>
-          <a:lstStyle/>
-          <a:p>
-            <a:pPr indent="0" marL="0">
-              <a:buNone/>
-            </a:pPr>
-            <a:r>
-              <a:rPr lang="en-US" sz="1300" b="1" dirty="0">
-                <a:solidFill>
-                  <a:srgbClr val="FFFFFF"/>
-                </a:solidFill>
-                <a:latin typeface="Calibri" pitchFamily="34" charset="0"/>
-                <a:ea typeface="Calibri" pitchFamily="34" charset="-122"/>
-                <a:cs typeface="Calibri" pitchFamily="34" charset="-120"/>
-              </a:rPr>
-              <a:t>Edge AI Layer</a:t>
-            </a:r>
-            <a:endParaRPr lang="en-US" sz="1300" dirty="0"/>
-          </a:p>
-        </p:txBody>
-      </p:sp>
-      <p:sp>
-        <p:nvSpPr>
-          <p:cNvPr id="17" name="Text 13"/>
-          <p:cNvSpPr/>
-          <p:nvPr/>
-        </p:nvSpPr>
-        <p:spPr>
-          <a:xfrm>
-            <a:off x="5455768" y="3593592"/>
-            <a:ext cx="1920240" cy="502920"/>
-          </a:xfrm>
-          <a:prstGeom prst="rect">
-            <a:avLst/>
-          </a:prstGeom>
-          <a:noFill/>
-          <a:ln/>
-        </p:spPr>
-        <p:txBody>
-          <a:bodyPr wrap="square" lIns="0" tIns="0" rIns="0" bIns="0" rtlCol="0" anchor="t"/>
-          <a:lstStyle/>
-          <a:p>
-            <a:pPr indent="0" marL="0">
-              <a:lnSpc>
-                <a:spcPct val="110000"/>
-              </a:lnSpc>
-              <a:buNone/>
-            </a:pPr>
-            <a:r>
-              <a:rPr lang="en-US" sz="1000" dirty="0">
-                <a:solidFill>
-                  <a:srgbClr val="D7E4CF"/>
-                </a:solidFill>
-                <a:latin typeface="Calibri" pitchFamily="34" charset="0"/>
-                <a:ea typeface="Calibri" pitchFamily="34" charset="-122"/>
-                <a:cs typeface="Calibri" pitchFamily="34" charset="-120"/>
-              </a:rPr>
-              <a:t>CNN compressa</a:t>
-            </a:r>
-            <a:endParaRPr lang="en-US" sz="1000" dirty="0"/>
-          </a:p>
-        </p:txBody>
-      </p:sp>
-      <p:sp>
-        <p:nvSpPr>
-          <p:cNvPr id="18" name="Text 14"/>
-          <p:cNvSpPr/>
-          <p:nvPr/>
-        </p:nvSpPr>
-        <p:spPr>
-          <a:xfrm>
-            <a:off x="7513168" y="3447288"/>
-            <a:ext cx="502920" cy="457200"/>
-          </a:xfrm>
-          <a:prstGeom prst="rect">
-            <a:avLst/>
-          </a:prstGeom>
-          <a:noFill/>
-          <a:ln/>
-        </p:spPr>
-        <p:txBody>
-          <a:bodyPr wrap="square" lIns="0" tIns="0" rIns="0" bIns="0" rtlCol="0" anchor="ctr"/>
-          <a:lstStyle/>
-          <a:p>
-            <a:pPr algn="ctr" indent="0" marL="0">
-              <a:buNone/>
-            </a:pPr>
-            <a:r>
-              <a:rPr lang="en-US" sz="2000" b="1" dirty="0">
-                <a:solidFill>
-                  <a:srgbClr val="6E9B57"/>
-                </a:solidFill>
-                <a:latin typeface="Arial" pitchFamily="34" charset="0"/>
-                <a:ea typeface="Arial" pitchFamily="34" charset="-122"/>
-                <a:cs typeface="Arial" pitchFamily="34" charset="-120"/>
-              </a:rPr>
-              <a:t>→</a:t>
-            </a:r>
-            <a:endParaRPr lang="en-US" sz="2000" dirty="0"/>
-          </a:p>
-        </p:txBody>
-      </p:sp>
-      <p:sp>
-        <p:nvSpPr>
-          <p:cNvPr id="19" name="Shape 15"/>
-          <p:cNvSpPr/>
-          <p:nvPr/>
-        </p:nvSpPr>
-        <p:spPr>
-          <a:xfrm>
-            <a:off x="8016088" y="3063240"/>
-            <a:ext cx="2834640" cy="1234440"/>
-          </a:xfrm>
-          <a:prstGeom prst="roundRect">
-            <a:avLst>
-              <a:gd name="adj" fmla="val 7407"/>
-            </a:avLst>
-          </a:prstGeom>
-          <a:solidFill>
-            <a:srgbClr val="2C5F2D"/>
-          </a:solidFill>
-          <a:ln/>
-        </p:spPr>
-      </p:sp>
-      <p:sp>
-        <p:nvSpPr>
-          <p:cNvPr id="20" name="Shape 16"/>
-          <p:cNvSpPr/>
-          <p:nvPr/>
-        </p:nvSpPr>
-        <p:spPr>
-          <a:xfrm>
-            <a:off x="8198968" y="3264408"/>
-            <a:ext cx="457200" cy="457200"/>
-          </a:xfrm>
-          <a:prstGeom prst="ellipse">
-            <a:avLst/>
-          </a:prstGeom>
-          <a:solidFill>
-            <a:srgbClr val="C0392B"/>
-          </a:solidFill>
-          <a:ln/>
-        </p:spPr>
-      </p:sp>
-      <p:pic>
-        <p:nvPicPr>
-          <p:cNvPr id="21" name="Image 2" descr="/private/tmp/claude-501/-Users-gianmarcovellotti-Desktop-LM-1-anno-IoT-PomodorIA/d58fc5f1-3fb5-4f2f-a56b-ba8bb07e0c51/scratchpad/pptx/icons/bell_white.png">    </p:cNvPr>
+          <p:cNvPr id="9" name="Image 0" descr="/private/tmp/claude-501/-Users-gianmarcovellotti-Desktop-LM-1-anno-IoT-PomodorIA/d58fc5f1-3fb5-4f2f-a56b-ba8bb07e0c51/scratchpad/pptx/icons/camera_white.png"/>
           <p:cNvPicPr>
             <a:picLocks noChangeAspect="1"/>
           </p:cNvPicPr>
@@ -3553,7 +3029,7 @@
         </p:blipFill>
         <p:spPr>
           <a:xfrm>
-            <a:off x="8253832" y="3319272"/>
+            <a:off x="1578712" y="3319272"/>
             <a:ext cx="347472" cy="347472"/>
           </a:xfrm>
           <a:prstGeom prst="rect">
@@ -3563,13 +3039,13 @@
       </p:pic>
       <p:sp>
         <p:nvSpPr>
-          <p:cNvPr id="22" name="Text 17"/>
-          <p:cNvSpPr/>
-          <p:nvPr/>
-        </p:nvSpPr>
-        <p:spPr>
-          <a:xfrm>
-            <a:off x="8793328" y="3227832"/>
+          <p:cNvPr id="10" name="Text 7"/>
+          <p:cNvSpPr/>
+          <p:nvPr/>
+        </p:nvSpPr>
+        <p:spPr>
+          <a:xfrm>
+            <a:off x="2118208" y="3227832"/>
             <a:ext cx="1920240" cy="365760"/>
           </a:xfrm>
           <a:prstGeom prst="rect">
@@ -3582,7 +3058,7 @@
           <a:bodyPr wrap="square" lIns="0" tIns="0" rIns="0" bIns="0" rtlCol="0" anchor="ctr"/>
           <a:lstStyle/>
           <a:p>
-            <a:pPr indent="0" marL="0">
+            <a:pPr marL="0" indent="0">
               <a:buNone/>
             </a:pPr>
             <a:r>
@@ -3594,7 +3070,7 @@
                 <a:ea typeface="Calibri" pitchFamily="34" charset="-122"/>
                 <a:cs typeface="Calibri" pitchFamily="34" charset="-120"/>
               </a:rPr>
-              <a:t>Actuator Layer</a:t>
+              <a:t>Sensor Layer</a:t>
             </a:r>
             <a:endParaRPr lang="en-US" sz="1300" dirty="0"/>
           </a:p>
@@ -3602,13 +3078,13 @@
       </p:sp>
       <p:sp>
         <p:nvSpPr>
-          <p:cNvPr id="23" name="Text 18"/>
-          <p:cNvSpPr/>
-          <p:nvPr/>
-        </p:nvSpPr>
-        <p:spPr>
-          <a:xfrm>
-            <a:off x="8793328" y="3593592"/>
+          <p:cNvPr id="11" name="Text 8"/>
+          <p:cNvSpPr/>
+          <p:nvPr/>
+        </p:nvSpPr>
+        <p:spPr>
+          <a:xfrm>
+            <a:off x="2118208" y="3593592"/>
             <a:ext cx="1920240" cy="502920"/>
           </a:xfrm>
           <a:prstGeom prst="rect">
@@ -3621,7 +3097,7 @@
           <a:bodyPr wrap="square" lIns="0" tIns="0" rIns="0" bIns="0" rtlCol="0" anchor="t"/>
           <a:lstStyle/>
           <a:p>
-            <a:pPr indent="0" marL="0">
+            <a:pPr marL="0" indent="0">
               <a:lnSpc>
                 <a:spcPct val="110000"/>
               </a:lnSpc>
@@ -3636,6 +3112,406 @@
                 <a:ea typeface="Calibri" pitchFamily="34" charset="-122"/>
                 <a:cs typeface="Calibri" pitchFamily="34" charset="-120"/>
               </a:rPr>
+              <a:t>fotocamera + sensori</a:t>
+            </a:r>
+            <a:endParaRPr lang="en-US" sz="1000" dirty="0"/>
+          </a:p>
+        </p:txBody>
+      </p:sp>
+      <p:sp>
+        <p:nvSpPr>
+          <p:cNvPr id="12" name="Text 9"/>
+          <p:cNvSpPr/>
+          <p:nvPr/>
+        </p:nvSpPr>
+        <p:spPr>
+          <a:xfrm>
+            <a:off x="4175608" y="3447288"/>
+            <a:ext cx="502920" cy="457200"/>
+          </a:xfrm>
+          <a:prstGeom prst="rect">
+            <a:avLst/>
+          </a:prstGeom>
+          <a:noFill/>
+          <a:ln/>
+        </p:spPr>
+        <p:txBody>
+          <a:bodyPr wrap="square" lIns="0" tIns="0" rIns="0" bIns="0" rtlCol="0" anchor="ctr"/>
+          <a:lstStyle/>
+          <a:p>
+            <a:pPr marL="0" indent="0" algn="ctr">
+              <a:buNone/>
+            </a:pPr>
+            <a:r>
+              <a:rPr lang="en-US" sz="2000" b="1" dirty="0">
+                <a:solidFill>
+                  <a:srgbClr val="6E9B57"/>
+                </a:solidFill>
+                <a:latin typeface="Arial" pitchFamily="34" charset="0"/>
+                <a:ea typeface="Arial" pitchFamily="34" charset="-122"/>
+                <a:cs typeface="Arial" pitchFamily="34" charset="-120"/>
+              </a:rPr>
+              <a:t>→</a:t>
+            </a:r>
+            <a:endParaRPr lang="en-US" sz="2000" dirty="0"/>
+          </a:p>
+        </p:txBody>
+      </p:sp>
+      <p:sp>
+        <p:nvSpPr>
+          <p:cNvPr id="13" name="Shape 10"/>
+          <p:cNvSpPr/>
+          <p:nvPr/>
+        </p:nvSpPr>
+        <p:spPr>
+          <a:xfrm>
+            <a:off x="4678528" y="3063240"/>
+            <a:ext cx="2834640" cy="1234440"/>
+          </a:xfrm>
+          <a:prstGeom prst="roundRect">
+            <a:avLst>
+              <a:gd name="adj" fmla="val 7407"/>
+            </a:avLst>
+          </a:prstGeom>
+          <a:solidFill>
+            <a:srgbClr val="2C5F2D"/>
+          </a:solidFill>
+          <a:ln/>
+        </p:spPr>
+        <p:txBody>
+          <a:bodyPr/>
+          <a:lstStyle/>
+          <a:p>
+            <a:endParaRPr lang="it-IT"/>
+          </a:p>
+        </p:txBody>
+      </p:sp>
+      <p:sp>
+        <p:nvSpPr>
+          <p:cNvPr id="14" name="Shape 11"/>
+          <p:cNvSpPr/>
+          <p:nvPr/>
+        </p:nvSpPr>
+        <p:spPr>
+          <a:xfrm>
+            <a:off x="4861408" y="3264408"/>
+            <a:ext cx="457200" cy="457200"/>
+          </a:xfrm>
+          <a:prstGeom prst="ellipse">
+            <a:avLst/>
+          </a:prstGeom>
+          <a:solidFill>
+            <a:srgbClr val="C0392B"/>
+          </a:solidFill>
+          <a:ln/>
+        </p:spPr>
+        <p:txBody>
+          <a:bodyPr/>
+          <a:lstStyle/>
+          <a:p>
+            <a:endParaRPr lang="it-IT"/>
+          </a:p>
+        </p:txBody>
+      </p:sp>
+      <p:pic>
+        <p:nvPicPr>
+          <p:cNvPr id="15" name="Image 1" descr="/private/tmp/claude-501/-Users-gianmarcovellotti-Desktop-LM-1-anno-IoT-PomodorIA/d58fc5f1-3fb5-4f2f-a56b-ba8bb07e0c51/scratchpad/pptx/icons/cpu_white.png"/>
+          <p:cNvPicPr>
+            <a:picLocks noChangeAspect="1"/>
+          </p:cNvPicPr>
+          <p:nvPr/>
+        </p:nvPicPr>
+        <p:blipFill>
+          <a:blip r:embed="rId4"/>
+          <a:stretch>
+            <a:fillRect/>
+          </a:stretch>
+        </p:blipFill>
+        <p:spPr>
+          <a:xfrm>
+            <a:off x="4916272" y="3319272"/>
+            <a:ext cx="347472" cy="347472"/>
+          </a:xfrm>
+          <a:prstGeom prst="rect">
+            <a:avLst/>
+          </a:prstGeom>
+        </p:spPr>
+      </p:pic>
+      <p:sp>
+        <p:nvSpPr>
+          <p:cNvPr id="16" name="Text 12"/>
+          <p:cNvSpPr/>
+          <p:nvPr/>
+        </p:nvSpPr>
+        <p:spPr>
+          <a:xfrm>
+            <a:off x="5455768" y="3227832"/>
+            <a:ext cx="1920240" cy="365760"/>
+          </a:xfrm>
+          <a:prstGeom prst="rect">
+            <a:avLst/>
+          </a:prstGeom>
+          <a:noFill/>
+          <a:ln/>
+        </p:spPr>
+        <p:txBody>
+          <a:bodyPr wrap="square" lIns="0" tIns="0" rIns="0" bIns="0" rtlCol="0" anchor="ctr"/>
+          <a:lstStyle/>
+          <a:p>
+            <a:pPr marL="0" indent="0">
+              <a:buNone/>
+            </a:pPr>
+            <a:r>
+              <a:rPr lang="en-US" sz="1300" b="1" dirty="0">
+                <a:solidFill>
+                  <a:srgbClr val="FFFFFF"/>
+                </a:solidFill>
+                <a:latin typeface="Calibri" pitchFamily="34" charset="0"/>
+                <a:ea typeface="Calibri" pitchFamily="34" charset="-122"/>
+                <a:cs typeface="Calibri" pitchFamily="34" charset="-120"/>
+              </a:rPr>
+              <a:t>Edge AI Layer</a:t>
+            </a:r>
+            <a:endParaRPr lang="en-US" sz="1300" dirty="0"/>
+          </a:p>
+        </p:txBody>
+      </p:sp>
+      <p:sp>
+        <p:nvSpPr>
+          <p:cNvPr id="17" name="Text 13"/>
+          <p:cNvSpPr/>
+          <p:nvPr/>
+        </p:nvSpPr>
+        <p:spPr>
+          <a:xfrm>
+            <a:off x="5455768" y="3593592"/>
+            <a:ext cx="1920240" cy="502920"/>
+          </a:xfrm>
+          <a:prstGeom prst="rect">
+            <a:avLst/>
+          </a:prstGeom>
+          <a:noFill/>
+          <a:ln/>
+        </p:spPr>
+        <p:txBody>
+          <a:bodyPr wrap="square" lIns="0" tIns="0" rIns="0" bIns="0" rtlCol="0" anchor="t"/>
+          <a:lstStyle/>
+          <a:p>
+            <a:pPr marL="0" indent="0">
+              <a:lnSpc>
+                <a:spcPct val="110000"/>
+              </a:lnSpc>
+              <a:buNone/>
+            </a:pPr>
+            <a:r>
+              <a:rPr lang="en-US" sz="1000" dirty="0">
+                <a:solidFill>
+                  <a:srgbClr val="D7E4CF"/>
+                </a:solidFill>
+                <a:latin typeface="Calibri" pitchFamily="34" charset="0"/>
+                <a:ea typeface="Calibri" pitchFamily="34" charset="-122"/>
+                <a:cs typeface="Calibri" pitchFamily="34" charset="-120"/>
+              </a:rPr>
+              <a:t>CNN compressa</a:t>
+            </a:r>
+            <a:endParaRPr lang="en-US" sz="1000" dirty="0"/>
+          </a:p>
+        </p:txBody>
+      </p:sp>
+      <p:sp>
+        <p:nvSpPr>
+          <p:cNvPr id="18" name="Text 14"/>
+          <p:cNvSpPr/>
+          <p:nvPr/>
+        </p:nvSpPr>
+        <p:spPr>
+          <a:xfrm>
+            <a:off x="7513168" y="3447288"/>
+            <a:ext cx="502920" cy="457200"/>
+          </a:xfrm>
+          <a:prstGeom prst="rect">
+            <a:avLst/>
+          </a:prstGeom>
+          <a:noFill/>
+          <a:ln/>
+        </p:spPr>
+        <p:txBody>
+          <a:bodyPr wrap="square" lIns="0" tIns="0" rIns="0" bIns="0" rtlCol="0" anchor="ctr"/>
+          <a:lstStyle/>
+          <a:p>
+            <a:pPr marL="0" indent="0" algn="ctr">
+              <a:buNone/>
+            </a:pPr>
+            <a:r>
+              <a:rPr lang="en-US" sz="2000" b="1" dirty="0">
+                <a:solidFill>
+                  <a:srgbClr val="6E9B57"/>
+                </a:solidFill>
+                <a:latin typeface="Arial" pitchFamily="34" charset="0"/>
+                <a:ea typeface="Arial" pitchFamily="34" charset="-122"/>
+                <a:cs typeface="Arial" pitchFamily="34" charset="-120"/>
+              </a:rPr>
+              <a:t>→</a:t>
+            </a:r>
+            <a:endParaRPr lang="en-US" sz="2000" dirty="0"/>
+          </a:p>
+        </p:txBody>
+      </p:sp>
+      <p:sp>
+        <p:nvSpPr>
+          <p:cNvPr id="19" name="Shape 15"/>
+          <p:cNvSpPr/>
+          <p:nvPr/>
+        </p:nvSpPr>
+        <p:spPr>
+          <a:xfrm>
+            <a:off x="8016088" y="3063240"/>
+            <a:ext cx="2834640" cy="1234440"/>
+          </a:xfrm>
+          <a:prstGeom prst="roundRect">
+            <a:avLst>
+              <a:gd name="adj" fmla="val 7407"/>
+            </a:avLst>
+          </a:prstGeom>
+          <a:solidFill>
+            <a:srgbClr val="2C5F2D"/>
+          </a:solidFill>
+          <a:ln/>
+        </p:spPr>
+        <p:txBody>
+          <a:bodyPr/>
+          <a:lstStyle/>
+          <a:p>
+            <a:endParaRPr lang="it-IT"/>
+          </a:p>
+        </p:txBody>
+      </p:sp>
+      <p:sp>
+        <p:nvSpPr>
+          <p:cNvPr id="20" name="Shape 16"/>
+          <p:cNvSpPr/>
+          <p:nvPr/>
+        </p:nvSpPr>
+        <p:spPr>
+          <a:xfrm>
+            <a:off x="8198968" y="3264408"/>
+            <a:ext cx="457200" cy="457200"/>
+          </a:xfrm>
+          <a:prstGeom prst="ellipse">
+            <a:avLst/>
+          </a:prstGeom>
+          <a:solidFill>
+            <a:srgbClr val="C0392B"/>
+          </a:solidFill>
+          <a:ln/>
+        </p:spPr>
+        <p:txBody>
+          <a:bodyPr/>
+          <a:lstStyle/>
+          <a:p>
+            <a:endParaRPr lang="it-IT"/>
+          </a:p>
+        </p:txBody>
+      </p:sp>
+      <p:pic>
+        <p:nvPicPr>
+          <p:cNvPr id="21" name="Image 2" descr="/private/tmp/claude-501/-Users-gianmarcovellotti-Desktop-LM-1-anno-IoT-PomodorIA/d58fc5f1-3fb5-4f2f-a56b-ba8bb07e0c51/scratchpad/pptx/icons/bell_white.png"/>
+          <p:cNvPicPr>
+            <a:picLocks noChangeAspect="1"/>
+          </p:cNvPicPr>
+          <p:nvPr/>
+        </p:nvPicPr>
+        <p:blipFill>
+          <a:blip r:embed="rId5"/>
+          <a:stretch>
+            <a:fillRect/>
+          </a:stretch>
+        </p:blipFill>
+        <p:spPr>
+          <a:xfrm>
+            <a:off x="8253832" y="3319272"/>
+            <a:ext cx="347472" cy="347472"/>
+          </a:xfrm>
+          <a:prstGeom prst="rect">
+            <a:avLst/>
+          </a:prstGeom>
+        </p:spPr>
+      </p:pic>
+      <p:sp>
+        <p:nvSpPr>
+          <p:cNvPr id="22" name="Text 17"/>
+          <p:cNvSpPr/>
+          <p:nvPr/>
+        </p:nvSpPr>
+        <p:spPr>
+          <a:xfrm>
+            <a:off x="8793328" y="3227832"/>
+            <a:ext cx="1920240" cy="365760"/>
+          </a:xfrm>
+          <a:prstGeom prst="rect">
+            <a:avLst/>
+          </a:prstGeom>
+          <a:noFill/>
+          <a:ln/>
+        </p:spPr>
+        <p:txBody>
+          <a:bodyPr wrap="square" lIns="0" tIns="0" rIns="0" bIns="0" rtlCol="0" anchor="ctr"/>
+          <a:lstStyle/>
+          <a:p>
+            <a:pPr marL="0" indent="0">
+              <a:buNone/>
+            </a:pPr>
+            <a:r>
+              <a:rPr lang="en-US" sz="1300" b="1" dirty="0">
+                <a:solidFill>
+                  <a:srgbClr val="FFFFFF"/>
+                </a:solidFill>
+                <a:latin typeface="Calibri" pitchFamily="34" charset="0"/>
+                <a:ea typeface="Calibri" pitchFamily="34" charset="-122"/>
+                <a:cs typeface="Calibri" pitchFamily="34" charset="-120"/>
+              </a:rPr>
+              <a:t>Actuator Layer</a:t>
+            </a:r>
+            <a:endParaRPr lang="en-US" sz="1300" dirty="0"/>
+          </a:p>
+        </p:txBody>
+      </p:sp>
+      <p:sp>
+        <p:nvSpPr>
+          <p:cNvPr id="23" name="Text 18"/>
+          <p:cNvSpPr/>
+          <p:nvPr/>
+        </p:nvSpPr>
+        <p:spPr>
+          <a:xfrm>
+            <a:off x="8793328" y="3593592"/>
+            <a:ext cx="1920240" cy="502920"/>
+          </a:xfrm>
+          <a:prstGeom prst="rect">
+            <a:avLst/>
+          </a:prstGeom>
+          <a:noFill/>
+          <a:ln/>
+        </p:spPr>
+        <p:txBody>
+          <a:bodyPr wrap="square" lIns="0" tIns="0" rIns="0" bIns="0" rtlCol="0" anchor="t"/>
+          <a:lstStyle/>
+          <a:p>
+            <a:pPr marL="0" indent="0">
+              <a:lnSpc>
+                <a:spcPct val="110000"/>
+              </a:lnSpc>
+              <a:buNone/>
+            </a:pPr>
+            <a:r>
+              <a:rPr lang="en-US" sz="1000" dirty="0">
+                <a:solidFill>
+                  <a:srgbClr val="D7E4CF"/>
+                </a:solidFill>
+                <a:latin typeface="Calibri" pitchFamily="34" charset="0"/>
+                <a:ea typeface="Calibri" pitchFamily="34" charset="-122"/>
+                <a:cs typeface="Calibri" pitchFamily="34" charset="-120"/>
+              </a:rPr>
               <a:t>irrigazione, ventole...</a:t>
             </a:r>
             <a:endParaRPr lang="en-US" sz="1000" dirty="0"/>
@@ -3663,7 +3539,7 @@
           <a:bodyPr wrap="square" lIns="0" tIns="0" rIns="0" bIns="0" rtlCol="0" anchor="ctr"/>
           <a:lstStyle/>
           <a:p>
-            <a:pPr algn="ctr" indent="0" marL="0">
+            <a:pPr marL="0" indent="0" algn="ctr">
               <a:buNone/>
             </a:pPr>
             <a:r>
@@ -3702,6 +3578,13 @@
           </a:solidFill>
           <a:ln/>
         </p:spPr>
+        <p:txBody>
+          <a:bodyPr/>
+          <a:lstStyle/>
+          <a:p>
+            <a:endParaRPr lang="it-IT"/>
+          </a:p>
+        </p:txBody>
       </p:sp>
       <p:sp>
         <p:nvSpPr>
@@ -3724,7 +3607,7 @@
           <a:bodyPr wrap="square" lIns="0" tIns="0" rIns="0" bIns="0" rtlCol="0" anchor="ctr"/>
           <a:lstStyle/>
           <a:p>
-            <a:pPr algn="ctr" indent="0" marL="0">
+            <a:pPr marL="0" indent="0" algn="ctr">
               <a:buNone/>
             </a:pPr>
             <a:r>
@@ -3763,7 +3646,7 @@
           <a:bodyPr wrap="square" lIns="0" tIns="0" rIns="0" bIns="0" rtlCol="0" anchor="ctr"/>
           <a:lstStyle/>
           <a:p>
-            <a:pPr algn="ctr" indent="0" marL="0">
+            <a:pPr marL="0" indent="0" algn="ctr">
               <a:buNone/>
             </a:pPr>
             <a:r>
@@ -3807,6 +3690,13 @@
             <a:prstDash val="solid"/>
           </a:ln>
         </p:spPr>
+        <p:txBody>
+          <a:bodyPr/>
+          <a:lstStyle/>
+          <a:p>
+            <a:endParaRPr lang="it-IT"/>
+          </a:p>
+        </p:txBody>
       </p:sp>
       <p:sp>
         <p:nvSpPr>
@@ -3829,7 +3719,7 @@
           <a:bodyPr wrap="square" lIns="0" tIns="0" rIns="0" bIns="0" rtlCol="0" anchor="ctr"/>
           <a:lstStyle/>
           <a:p>
-            <a:pPr algn="ctr" indent="0" marL="0">
+            <a:pPr marL="0" indent="0" algn="ctr">
               <a:buNone/>
             </a:pPr>
             <a:r>
@@ -3868,7 +3758,7 @@
           <a:bodyPr wrap="square" lIns="0" tIns="0" rIns="0" bIns="0" rtlCol="0" anchor="ctr"/>
           <a:lstStyle/>
           <a:p>
-            <a:pPr algn="r" indent="0" marL="0">
+            <a:pPr marL="0" indent="0" algn="r">
               <a:buNone/>
             </a:pPr>
             <a:r>
@@ -3902,6 +3792,7 @@
         <a:solidFill>
           <a:srgbClr val="FFFFFF"/>
         </a:solidFill>
+        <a:effectLst/>
       </p:bgPr>
     </p:bg>
     <p:spTree>
@@ -3939,11 +3830,11 @@
           <a:bodyPr wrap="square" lIns="0" tIns="0" rIns="0" bIns="0" rtlCol="0" anchor="ctr"/>
           <a:lstStyle/>
           <a:p>
-            <a:pPr indent="0" marL="0">
-              <a:buNone/>
-            </a:pPr>
-            <a:r>
-              <a:rPr lang="en-US" sz="1300" b="1" spc="200" kern="0" dirty="0">
+            <a:pPr marL="0" indent="0">
+              <a:buNone/>
+            </a:pPr>
+            <a:r>
+              <a:rPr lang="en-US" sz="1300" b="1" kern="0" spc="200" dirty="0">
                 <a:solidFill>
                   <a:srgbClr val="C0392B"/>
                 </a:solidFill>
@@ -3978,7 +3869,7 @@
           <a:bodyPr wrap="square" lIns="0" tIns="0" rIns="0" bIns="0" rtlCol="0" anchor="ctr"/>
           <a:lstStyle/>
           <a:p>
-            <a:pPr indent="0" marL="0">
+            <a:pPr marL="0" indent="0">
               <a:buNone/>
             </a:pPr>
             <a:r>
@@ -4022,6 +3913,13 @@
             <a:prstDash val="solid"/>
           </a:ln>
         </p:spPr>
+        <p:txBody>
+          <a:bodyPr/>
+          <a:lstStyle/>
+          <a:p>
+            <a:endParaRPr lang="it-IT"/>
+          </a:p>
+        </p:txBody>
       </p:sp>
       <p:sp>
         <p:nvSpPr>
@@ -4044,7 +3942,7 @@
           <a:bodyPr wrap="square" lIns="0" tIns="0" rIns="0" bIns="0" rtlCol="0" anchor="ctr"/>
           <a:lstStyle/>
           <a:p>
-            <a:pPr algn="ctr" indent="0" marL="0">
+            <a:pPr marL="0" indent="0" algn="ctr">
               <a:buNone/>
             </a:pPr>
             <a:r>
@@ -4083,7 +3981,7 @@
           <a:bodyPr wrap="square" lIns="0" tIns="0" rIns="0" bIns="0" rtlCol="0" anchor="ctr"/>
           <a:lstStyle/>
           <a:p>
-            <a:pPr indent="0" marL="0">
+            <a:pPr marL="0" indent="0">
               <a:buNone/>
             </a:pPr>
             <a:r>
@@ -4122,7 +4020,7 @@
           <a:bodyPr wrap="square" lIns="0" tIns="0" rIns="0" bIns="0" rtlCol="0" anchor="ctr"/>
           <a:lstStyle/>
           <a:p>
-            <a:pPr indent="0" marL="0">
+            <a:pPr marL="0" indent="0">
               <a:buNone/>
             </a:pPr>
             <a:r>
@@ -4166,6 +4064,13 @@
             <a:prstDash val="solid"/>
           </a:ln>
         </p:spPr>
+        <p:txBody>
+          <a:bodyPr/>
+          <a:lstStyle/>
+          <a:p>
+            <a:endParaRPr lang="it-IT"/>
+          </a:p>
+        </p:txBody>
       </p:sp>
       <p:sp>
         <p:nvSpPr>
@@ -4188,7 +4093,7 @@
           <a:bodyPr wrap="square" lIns="0" tIns="0" rIns="0" bIns="0" rtlCol="0" anchor="ctr"/>
           <a:lstStyle/>
           <a:p>
-            <a:pPr algn="ctr" indent="0" marL="0">
+            <a:pPr marL="0" indent="0" algn="ctr">
               <a:buNone/>
             </a:pPr>
             <a:r>
@@ -4227,7 +4132,7 @@
           <a:bodyPr wrap="square" lIns="0" tIns="0" rIns="0" bIns="0" rtlCol="0" anchor="ctr"/>
           <a:lstStyle/>
           <a:p>
-            <a:pPr indent="0" marL="0">
+            <a:pPr marL="0" indent="0">
               <a:buNone/>
             </a:pPr>
             <a:r>
@@ -4266,7 +4171,7 @@
           <a:bodyPr wrap="square" lIns="0" tIns="0" rIns="0" bIns="0" rtlCol="0" anchor="ctr"/>
           <a:lstStyle/>
           <a:p>
-            <a:pPr indent="0" marL="0">
+            <a:pPr marL="0" indent="0">
               <a:buNone/>
             </a:pPr>
             <a:r>
@@ -4310,6 +4215,13 @@
             <a:prstDash val="solid"/>
           </a:ln>
         </p:spPr>
+        <p:txBody>
+          <a:bodyPr/>
+          <a:lstStyle/>
+          <a:p>
+            <a:endParaRPr lang="it-IT"/>
+          </a:p>
+        </p:txBody>
       </p:sp>
       <p:sp>
         <p:nvSpPr>
@@ -4332,7 +4244,7 @@
           <a:bodyPr wrap="square" lIns="0" tIns="0" rIns="0" bIns="0" rtlCol="0" anchor="ctr"/>
           <a:lstStyle/>
           <a:p>
-            <a:pPr algn="ctr" indent="0" marL="0">
+            <a:pPr marL="0" indent="0" algn="ctr">
               <a:buNone/>
             </a:pPr>
             <a:r>
@@ -4371,7 +4283,7 @@
           <a:bodyPr wrap="square" lIns="0" tIns="0" rIns="0" bIns="0" rtlCol="0" anchor="ctr"/>
           <a:lstStyle/>
           <a:p>
-            <a:pPr indent="0" marL="0">
+            <a:pPr marL="0" indent="0">
               <a:buNone/>
             </a:pPr>
             <a:r>
@@ -4410,7 +4322,7 @@
           <a:bodyPr wrap="square" lIns="0" tIns="0" rIns="0" bIns="0" rtlCol="0" anchor="ctr"/>
           <a:lstStyle/>
           <a:p>
-            <a:pPr indent="0" marL="0">
+            <a:pPr marL="0" indent="0">
               <a:buNone/>
             </a:pPr>
             <a:r>
@@ -4454,6 +4366,13 @@
             <a:prstDash val="solid"/>
           </a:ln>
         </p:spPr>
+        <p:txBody>
+          <a:bodyPr/>
+          <a:lstStyle/>
+          <a:p>
+            <a:endParaRPr lang="it-IT"/>
+          </a:p>
+        </p:txBody>
       </p:sp>
       <p:sp>
         <p:nvSpPr>
@@ -4476,7 +4395,7 @@
           <a:bodyPr wrap="square" lIns="0" tIns="0" rIns="0" bIns="0" rtlCol="0" anchor="ctr"/>
           <a:lstStyle/>
           <a:p>
-            <a:pPr algn="ctr" indent="0" marL="0">
+            <a:pPr marL="0" indent="0" algn="ctr">
               <a:buNone/>
             </a:pPr>
             <a:r>
@@ -4515,7 +4434,7 @@
           <a:bodyPr wrap="square" lIns="0" tIns="0" rIns="0" bIns="0" rtlCol="0" anchor="ctr"/>
           <a:lstStyle/>
           <a:p>
-            <a:pPr indent="0" marL="0">
+            <a:pPr marL="0" indent="0">
               <a:buNone/>
             </a:pPr>
             <a:r>
@@ -4554,7 +4473,7 @@
           <a:bodyPr wrap="square" lIns="0" tIns="0" rIns="0" bIns="0" rtlCol="0" anchor="ctr"/>
           <a:lstStyle/>
           <a:p>
-            <a:pPr indent="0" marL="0">
+            <a:pPr marL="0" indent="0">
               <a:buNone/>
             </a:pPr>
             <a:r>
@@ -4593,6 +4512,13 @@
           </a:solidFill>
           <a:ln/>
         </p:spPr>
+        <p:txBody>
+          <a:bodyPr/>
+          <a:lstStyle/>
+          <a:p>
+            <a:endParaRPr lang="it-IT"/>
+          </a:p>
+        </p:txBody>
       </p:sp>
       <p:sp>
         <p:nvSpPr>
@@ -4615,7 +4541,7 @@
           <a:bodyPr wrap="square" lIns="0" tIns="0" rIns="0" bIns="0" rtlCol="0" anchor="ctr"/>
           <a:lstStyle/>
           <a:p>
-            <a:pPr algn="ctr" indent="0" marL="0">
+            <a:pPr marL="0" indent="0" algn="ctr">
               <a:buNone/>
             </a:pPr>
             <a:r>
@@ -4654,7 +4580,7 @@
           <a:bodyPr wrap="square" lIns="0" tIns="0" rIns="0" bIns="0" rtlCol="0" anchor="ctr"/>
           <a:lstStyle/>
           <a:p>
-            <a:pPr indent="0" marL="0">
+            <a:pPr marL="0" indent="0">
               <a:buNone/>
             </a:pPr>
             <a:r>
@@ -4693,7 +4619,7 @@
           <a:bodyPr wrap="square" lIns="0" tIns="0" rIns="0" bIns="0" rtlCol="0" anchor="ctr"/>
           <a:lstStyle/>
           <a:p>
-            <a:pPr indent="0" marL="0">
+            <a:pPr marL="0" indent="0">
               <a:buNone/>
             </a:pPr>
             <a:r>
@@ -4737,6 +4663,13 @@
             <a:prstDash val="solid"/>
           </a:ln>
         </p:spPr>
+        <p:txBody>
+          <a:bodyPr/>
+          <a:lstStyle/>
+          <a:p>
+            <a:endParaRPr lang="it-IT"/>
+          </a:p>
+        </p:txBody>
       </p:sp>
       <p:sp>
         <p:nvSpPr>
@@ -4759,7 +4692,7 @@
           <a:bodyPr wrap="square" lIns="0" tIns="0" rIns="0" bIns="0" rtlCol="0" anchor="ctr"/>
           <a:lstStyle/>
           <a:p>
-            <a:pPr algn="ctr" indent="0" marL="0">
+            <a:pPr marL="0" indent="0" algn="ctr">
               <a:buNone/>
             </a:pPr>
             <a:r>
@@ -4798,7 +4731,7 @@
           <a:bodyPr wrap="square" lIns="0" tIns="0" rIns="0" bIns="0" rtlCol="0" anchor="ctr"/>
           <a:lstStyle/>
           <a:p>
-            <a:pPr indent="0" marL="0">
+            <a:pPr marL="0" indent="0">
               <a:buNone/>
             </a:pPr>
             <a:r>
@@ -4837,7 +4770,7 @@
           <a:bodyPr wrap="square" lIns="0" tIns="0" rIns="0" bIns="0" rtlCol="0" anchor="ctr"/>
           <a:lstStyle/>
           <a:p>
-            <a:pPr indent="0" marL="0">
+            <a:pPr marL="0" indent="0">
               <a:buNone/>
             </a:pPr>
             <a:r>
@@ -4881,6 +4814,13 @@
             <a:prstDash val="solid"/>
           </a:ln>
         </p:spPr>
+        <p:txBody>
+          <a:bodyPr/>
+          <a:lstStyle/>
+          <a:p>
+            <a:endParaRPr lang="it-IT"/>
+          </a:p>
+        </p:txBody>
       </p:sp>
       <p:sp>
         <p:nvSpPr>
@@ -4903,7 +4843,7 @@
           <a:bodyPr wrap="square" lIns="0" tIns="0" rIns="0" bIns="0" rtlCol="0" anchor="ctr"/>
           <a:lstStyle/>
           <a:p>
-            <a:pPr algn="ctr" indent="0" marL="0">
+            <a:pPr marL="0" indent="0" algn="ctr">
               <a:buNone/>
             </a:pPr>
             <a:r>
@@ -4942,7 +4882,7 @@
           <a:bodyPr wrap="square" lIns="0" tIns="0" rIns="0" bIns="0" rtlCol="0" anchor="ctr"/>
           <a:lstStyle/>
           <a:p>
-            <a:pPr indent="0" marL="0">
+            <a:pPr marL="0" indent="0">
               <a:buNone/>
             </a:pPr>
             <a:r>
@@ -4981,7 +4921,7 @@
           <a:bodyPr wrap="square" lIns="0" tIns="0" rIns="0" bIns="0" rtlCol="0" anchor="ctr"/>
           <a:lstStyle/>
           <a:p>
-            <a:pPr indent="0" marL="0">
+            <a:pPr marL="0" indent="0">
               <a:buNone/>
             </a:pPr>
             <a:r>
@@ -5020,7 +4960,7 @@
           <a:bodyPr wrap="square" lIns="0" tIns="0" rIns="0" bIns="0" rtlCol="0" anchor="ctr"/>
           <a:lstStyle/>
           <a:p>
-            <a:pPr indent="0" marL="0">
+            <a:pPr marL="0" indent="0">
               <a:buNone/>
             </a:pPr>
             <a:r>
@@ -5059,7 +4999,7 @@
           <a:bodyPr wrap="square" lIns="0" tIns="0" rIns="0" bIns="0" rtlCol="0" anchor="ctr"/>
           <a:lstStyle/>
           <a:p>
-            <a:pPr algn="r" indent="0" marL="0">
+            <a:pPr marL="0" indent="0" algn="r">
               <a:buNone/>
             </a:pPr>
             <a:r>
@@ -5093,6 +5033,7 @@
         <a:solidFill>
           <a:srgbClr val="2C5F2D"/>
         </a:solidFill>
+        <a:effectLst/>
       </p:bgPr>
     </p:bg>
     <p:spTree>
@@ -5130,11 +5071,11 @@
           <a:bodyPr wrap="square" lIns="0" tIns="0" rIns="0" bIns="0" rtlCol="0" anchor="ctr"/>
           <a:lstStyle/>
           <a:p>
-            <a:pPr indent="0" marL="0">
-              <a:buNone/>
-            </a:pPr>
-            <a:r>
-              <a:rPr lang="en-US" sz="1300" b="1" spc="200" kern="0" dirty="0">
+            <a:pPr marL="0" indent="0">
+              <a:buNone/>
+            </a:pPr>
+            <a:r>
+              <a:rPr lang="en-US" sz="1300" b="1" kern="0" spc="200" dirty="0">
                 <a:solidFill>
                   <a:srgbClr val="9FC98A"/>
                 </a:solidFill>
@@ -5169,7 +5110,7 @@
           <a:bodyPr wrap="square" lIns="0" tIns="0" rIns="0" bIns="0" rtlCol="0" anchor="ctr"/>
           <a:lstStyle/>
           <a:p>
-            <a:pPr indent="0" marL="0">
+            <a:pPr marL="0" indent="0">
               <a:buNone/>
             </a:pPr>
             <a:r>
@@ -5208,6 +5149,13 @@
           </a:solidFill>
           <a:ln/>
         </p:spPr>
+        <p:txBody>
+          <a:bodyPr/>
+          <a:lstStyle/>
+          <a:p>
+            <a:endParaRPr lang="it-IT"/>
+          </a:p>
+        </p:txBody>
       </p:sp>
       <p:sp>
         <p:nvSpPr>
@@ -5228,382 +5176,17 @@
           </a:solidFill>
           <a:ln/>
         </p:spPr>
+        <p:txBody>
+          <a:bodyPr/>
+          <a:lstStyle/>
+          <a:p>
+            <a:endParaRPr lang="it-IT"/>
+          </a:p>
+        </p:txBody>
       </p:sp>
       <p:pic>
         <p:nvPicPr>
-          <p:cNvPr id="6" name="Image 0" descr="/private/tmp/claude-501/-Users-gianmarcovellotti-Desktop-LM-1-anno-IoT-PomodorIA/d58fc5f1-3fb5-4f2f-a56b-ba8bb07e0c51/scratchpad/pptx/icons/camera_white.png">    </p:cNvPr>
-          <p:cNvPicPr>
-            <a:picLocks noChangeAspect="1"/>
-          </p:cNvPicPr>
-          <p:nvPr/>
-        </p:nvPicPr>
-        <p:blipFill>
-          <a:blip r:embed="rId1"/>
-          <a:stretch>
-            <a:fillRect/>
-          </a:stretch>
-        </p:blipFill>
-        <p:spPr>
-          <a:xfrm>
-            <a:off x="1661922" y="2739542"/>
-            <a:ext cx="555955" cy="555955"/>
-          </a:xfrm>
-          <a:prstGeom prst="rect">
-            <a:avLst/>
-          </a:prstGeom>
-        </p:spPr>
-      </p:pic>
-      <p:sp>
-        <p:nvSpPr>
-          <p:cNvPr id="7" name="Text 4"/>
-          <p:cNvSpPr/>
-          <p:nvPr/>
-        </p:nvSpPr>
-        <p:spPr>
-          <a:xfrm>
-            <a:off x="819760" y="3611880"/>
-            <a:ext cx="2240280" cy="365760"/>
-          </a:xfrm>
-          <a:prstGeom prst="rect">
-            <a:avLst/>
-          </a:prstGeom>
-          <a:noFill/>
-          <a:ln/>
-        </p:spPr>
-        <p:txBody>
-          <a:bodyPr wrap="square" lIns="0" tIns="0" rIns="0" bIns="0" rtlCol="0" anchor="ctr"/>
-          <a:lstStyle/>
-          <a:p>
-            <a:pPr algn="ctr" indent="0" marL="0">
-              <a:buNone/>
-            </a:pPr>
-            <a:r>
-              <a:rPr lang="en-US" sz="1700" b="1" spc="100" kern="0" dirty="0">
-                <a:solidFill>
-                  <a:srgbClr val="FFFFFF"/>
-                </a:solidFill>
-                <a:latin typeface="Cambria" pitchFamily="34" charset="0"/>
-                <a:ea typeface="Cambria" pitchFamily="34" charset="-122"/>
-                <a:cs typeface="Cambria" pitchFamily="34" charset="-120"/>
-              </a:rPr>
-              <a:t>SENSE</a:t>
-            </a:r>
-            <a:endParaRPr lang="en-US" sz="1700" dirty="0"/>
-          </a:p>
-        </p:txBody>
-      </p:sp>
-      <p:sp>
-        <p:nvSpPr>
-          <p:cNvPr id="8" name="Text 5"/>
-          <p:cNvSpPr/>
-          <p:nvPr/>
-        </p:nvSpPr>
-        <p:spPr>
-          <a:xfrm>
-            <a:off x="883768" y="4023360"/>
-            <a:ext cx="2112264" cy="1463040"/>
-          </a:xfrm>
-          <a:prstGeom prst="rect">
-            <a:avLst/>
-          </a:prstGeom>
-          <a:noFill/>
-          <a:ln/>
-        </p:spPr>
-        <p:txBody>
-          <a:bodyPr wrap="square" lIns="0" tIns="0" rIns="0" bIns="0" rtlCol="0" anchor="ctr"/>
-          <a:lstStyle/>
-          <a:p>
-            <a:pPr algn="ctr" indent="0" marL="0">
-              <a:lnSpc>
-                <a:spcPct val="125000"/>
-              </a:lnSpc>
-              <a:buNone/>
-            </a:pPr>
-            <a:r>
-              <a:rPr lang="en-US" sz="1150" dirty="0">
-                <a:solidFill>
-                  <a:srgbClr val="D7E4CF"/>
-                </a:solidFill>
-                <a:latin typeface="Calibri" pitchFamily="34" charset="0"/>
-                <a:ea typeface="Calibri" pitchFamily="34" charset="-122"/>
-                <a:cs typeface="Calibri" pitchFamily="34" charset="-120"/>
-              </a:rPr>
-              <a:t>La fotocamera virtuale e i sensori ambientali raccolgono un nuovo stato della serra</a:t>
-            </a:r>
-            <a:endParaRPr lang="en-US" sz="1150" dirty="0"/>
-          </a:p>
-        </p:txBody>
-      </p:sp>
-      <p:sp>
-        <p:nvSpPr>
-          <p:cNvPr id="9" name="Text 6"/>
-          <p:cNvSpPr/>
-          <p:nvPr/>
-        </p:nvSpPr>
-        <p:spPr>
-          <a:xfrm>
-            <a:off x="3197200" y="3703320"/>
-            <a:ext cx="256032" cy="457200"/>
-          </a:xfrm>
-          <a:prstGeom prst="rect">
-            <a:avLst/>
-          </a:prstGeom>
-          <a:noFill/>
-          <a:ln/>
-        </p:spPr>
-        <p:txBody>
-          <a:bodyPr wrap="square" lIns="0" tIns="0" rIns="0" bIns="0" rtlCol="0" anchor="ctr"/>
-          <a:lstStyle/>
-          <a:p>
-            <a:pPr algn="ctr" indent="0" marL="0">
-              <a:buNone/>
-            </a:pPr>
-            <a:r>
-              <a:rPr lang="en-US" sz="2200" b="1" dirty="0">
-                <a:solidFill>
-                  <a:srgbClr val="9FC98A"/>
-                </a:solidFill>
-                <a:latin typeface="Arial" pitchFamily="34" charset="0"/>
-                <a:ea typeface="Arial" pitchFamily="34" charset="-122"/>
-                <a:cs typeface="Arial" pitchFamily="34" charset="-120"/>
-              </a:rPr>
-              <a:t>→</a:t>
-            </a:r>
-            <a:endParaRPr lang="en-US" sz="2200" dirty="0"/>
-          </a:p>
-        </p:txBody>
-      </p:sp>
-      <p:sp>
-        <p:nvSpPr>
-          <p:cNvPr id="10" name="Shape 7"/>
-          <p:cNvSpPr/>
-          <p:nvPr/>
-        </p:nvSpPr>
-        <p:spPr>
-          <a:xfrm>
-            <a:off x="3453232" y="2286000"/>
-            <a:ext cx="2514600" cy="3337560"/>
-          </a:xfrm>
-          <a:prstGeom prst="roundRect">
-            <a:avLst>
-              <a:gd name="adj" fmla="val 4364"/>
-            </a:avLst>
-          </a:prstGeom>
-          <a:solidFill>
-            <a:srgbClr val="24512A"/>
-          </a:solidFill>
-          <a:ln/>
-        </p:spPr>
-      </p:sp>
-      <p:sp>
-        <p:nvSpPr>
-          <p:cNvPr id="11" name="Shape 8"/>
-          <p:cNvSpPr/>
-          <p:nvPr/>
-        </p:nvSpPr>
-        <p:spPr>
-          <a:xfrm>
-            <a:off x="4344772" y="2651760"/>
-            <a:ext cx="731520" cy="731520"/>
-          </a:xfrm>
-          <a:prstGeom prst="ellipse">
-            <a:avLst/>
-          </a:prstGeom>
-          <a:solidFill>
-            <a:srgbClr val="C0392B"/>
-          </a:solidFill>
-          <a:ln/>
-        </p:spPr>
-      </p:sp>
-      <p:pic>
-        <p:nvPicPr>
-          <p:cNvPr id="12" name="Image 1" descr="/private/tmp/claude-501/-Users-gianmarcovellotti-Desktop-LM-1-anno-IoT-PomodorIA/d58fc5f1-3fb5-4f2f-a56b-ba8bb07e0c51/scratchpad/pptx/icons/brain_white.png">    </p:cNvPr>
-          <p:cNvPicPr>
-            <a:picLocks noChangeAspect="1"/>
-          </p:cNvPicPr>
-          <p:nvPr/>
-        </p:nvPicPr>
-        <p:blipFill>
-          <a:blip r:embed="rId2"/>
-          <a:stretch>
-            <a:fillRect/>
-          </a:stretch>
-        </p:blipFill>
-        <p:spPr>
-          <a:xfrm>
-            <a:off x="4432554" y="2739542"/>
-            <a:ext cx="555955" cy="555955"/>
-          </a:xfrm>
-          <a:prstGeom prst="rect">
-            <a:avLst/>
-          </a:prstGeom>
-        </p:spPr>
-      </p:pic>
-      <p:sp>
-        <p:nvSpPr>
-          <p:cNvPr id="13" name="Text 9"/>
-          <p:cNvSpPr/>
-          <p:nvPr/>
-        </p:nvSpPr>
-        <p:spPr>
-          <a:xfrm>
-            <a:off x="3590392" y="3611880"/>
-            <a:ext cx="2240280" cy="365760"/>
-          </a:xfrm>
-          <a:prstGeom prst="rect">
-            <a:avLst/>
-          </a:prstGeom>
-          <a:noFill/>
-          <a:ln/>
-        </p:spPr>
-        <p:txBody>
-          <a:bodyPr wrap="square" lIns="0" tIns="0" rIns="0" bIns="0" rtlCol="0" anchor="ctr"/>
-          <a:lstStyle/>
-          <a:p>
-            <a:pPr algn="ctr" indent="0" marL="0">
-              <a:buNone/>
-            </a:pPr>
-            <a:r>
-              <a:rPr lang="en-US" sz="1700" b="1" spc="100" kern="0" dirty="0">
-                <a:solidFill>
-                  <a:srgbClr val="FFFFFF"/>
-                </a:solidFill>
-                <a:latin typeface="Cambria" pitchFamily="34" charset="0"/>
-                <a:ea typeface="Cambria" pitchFamily="34" charset="-122"/>
-                <a:cs typeface="Cambria" pitchFamily="34" charset="-120"/>
-              </a:rPr>
-              <a:t>THINK</a:t>
-            </a:r>
-            <a:endParaRPr lang="en-US" sz="1700" dirty="0"/>
-          </a:p>
-        </p:txBody>
-      </p:sp>
-      <p:sp>
-        <p:nvSpPr>
-          <p:cNvPr id="14" name="Text 10"/>
-          <p:cNvSpPr/>
-          <p:nvPr/>
-        </p:nvSpPr>
-        <p:spPr>
-          <a:xfrm>
-            <a:off x="3654400" y="4023360"/>
-            <a:ext cx="2112264" cy="1463040"/>
-          </a:xfrm>
-          <a:prstGeom prst="rect">
-            <a:avLst/>
-          </a:prstGeom>
-          <a:noFill/>
-          <a:ln/>
-        </p:spPr>
-        <p:txBody>
-          <a:bodyPr wrap="square" lIns="0" tIns="0" rIns="0" bIns="0" rtlCol="0" anchor="ctr"/>
-          <a:lstStyle/>
-          <a:p>
-            <a:pPr algn="ctr" indent="0" marL="0">
-              <a:lnSpc>
-                <a:spcPct val="125000"/>
-              </a:lnSpc>
-              <a:buNone/>
-            </a:pPr>
-            <a:r>
-              <a:rPr lang="en-US" sz="1150" dirty="0">
-                <a:solidFill>
-                  <a:srgbClr val="D7E4CF"/>
-                </a:solidFill>
-                <a:latin typeface="Calibri" pitchFamily="34" charset="0"/>
-                <a:ea typeface="Calibri" pitchFamily="34" charset="-122"/>
-                <a:cs typeface="Calibri" pitchFamily="34" charset="-120"/>
-              </a:rPr>
-              <a:t>La CNN classifica la foglia, l'agente decide combinando diagnosi + ambiente</a:t>
-            </a:r>
-            <a:endParaRPr lang="en-US" sz="1150" dirty="0"/>
-          </a:p>
-        </p:txBody>
-      </p:sp>
-      <p:sp>
-        <p:nvSpPr>
-          <p:cNvPr id="15" name="Text 11"/>
-          <p:cNvSpPr/>
-          <p:nvPr/>
-        </p:nvSpPr>
-        <p:spPr>
-          <a:xfrm>
-            <a:off x="5967832" y="3703320"/>
-            <a:ext cx="256032" cy="457200"/>
-          </a:xfrm>
-          <a:prstGeom prst="rect">
-            <a:avLst/>
-          </a:prstGeom>
-          <a:noFill/>
-          <a:ln/>
-        </p:spPr>
-        <p:txBody>
-          <a:bodyPr wrap="square" lIns="0" tIns="0" rIns="0" bIns="0" rtlCol="0" anchor="ctr"/>
-          <a:lstStyle/>
-          <a:p>
-            <a:pPr algn="ctr" indent="0" marL="0">
-              <a:buNone/>
-            </a:pPr>
-            <a:r>
-              <a:rPr lang="en-US" sz="2200" b="1" dirty="0">
-                <a:solidFill>
-                  <a:srgbClr val="9FC98A"/>
-                </a:solidFill>
-                <a:latin typeface="Arial" pitchFamily="34" charset="0"/>
-                <a:ea typeface="Arial" pitchFamily="34" charset="-122"/>
-                <a:cs typeface="Arial" pitchFamily="34" charset="-120"/>
-              </a:rPr>
-              <a:t>→</a:t>
-            </a:r>
-            <a:endParaRPr lang="en-US" sz="2200" dirty="0"/>
-          </a:p>
-        </p:txBody>
-      </p:sp>
-      <p:sp>
-        <p:nvSpPr>
-          <p:cNvPr id="16" name="Shape 12"/>
-          <p:cNvSpPr/>
-          <p:nvPr/>
-        </p:nvSpPr>
-        <p:spPr>
-          <a:xfrm>
-            <a:off x="6223864" y="2286000"/>
-            <a:ext cx="2514600" cy="3337560"/>
-          </a:xfrm>
-          <a:prstGeom prst="roundRect">
-            <a:avLst>
-              <a:gd name="adj" fmla="val 4364"/>
-            </a:avLst>
-          </a:prstGeom>
-          <a:solidFill>
-            <a:srgbClr val="24512A"/>
-          </a:solidFill>
-          <a:ln/>
-        </p:spPr>
-      </p:sp>
-      <p:sp>
-        <p:nvSpPr>
-          <p:cNvPr id="17" name="Shape 13"/>
-          <p:cNvSpPr/>
-          <p:nvPr/>
-        </p:nvSpPr>
-        <p:spPr>
-          <a:xfrm>
-            <a:off x="7115404" y="2651760"/>
-            <a:ext cx="731520" cy="731520"/>
-          </a:xfrm>
-          <a:prstGeom prst="ellipse">
-            <a:avLst/>
-          </a:prstGeom>
-          <a:solidFill>
-            <a:srgbClr val="C0392B"/>
-          </a:solidFill>
-          <a:ln/>
-        </p:spPr>
-      </p:sp>
-      <p:pic>
-        <p:nvPicPr>
-          <p:cNvPr id="18" name="Image 2" descr="/private/tmp/claude-501/-Users-gianmarcovellotti-Desktop-LM-1-anno-IoT-PomodorIA/d58fc5f1-3fb5-4f2f-a56b-ba8bb07e0c51/scratchpad/pptx/icons/bell_white.png">    </p:cNvPr>
+          <p:cNvPr id="6" name="Image 0" descr="/private/tmp/claude-501/-Users-gianmarcovellotti-Desktop-LM-1-anno-IoT-PomodorIA/d58fc5f1-3fb5-4f2f-a56b-ba8bb07e0c51/scratchpad/pptx/icons/camera_white.png"/>
           <p:cNvPicPr>
             <a:picLocks noChangeAspect="1"/>
           </p:cNvPicPr>
@@ -5617,7 +5200,7 @@
         </p:blipFill>
         <p:spPr>
           <a:xfrm>
-            <a:off x="7203186" y="2739542"/>
+            <a:off x="1661922" y="2739542"/>
             <a:ext cx="555955" cy="555955"/>
           </a:xfrm>
           <a:prstGeom prst="rect">
@@ -5627,13 +5210,13 @@
       </p:pic>
       <p:sp>
         <p:nvSpPr>
-          <p:cNvPr id="19" name="Text 14"/>
-          <p:cNvSpPr/>
-          <p:nvPr/>
-        </p:nvSpPr>
-        <p:spPr>
-          <a:xfrm>
-            <a:off x="6361024" y="3611880"/>
+          <p:cNvPr id="7" name="Text 4"/>
+          <p:cNvSpPr/>
+          <p:nvPr/>
+        </p:nvSpPr>
+        <p:spPr>
+          <a:xfrm>
+            <a:off x="819760" y="3611880"/>
             <a:ext cx="2240280" cy="365760"/>
           </a:xfrm>
           <a:prstGeom prst="rect">
@@ -5646,11 +5229,11 @@
           <a:bodyPr wrap="square" lIns="0" tIns="0" rIns="0" bIns="0" rtlCol="0" anchor="ctr"/>
           <a:lstStyle/>
           <a:p>
-            <a:pPr algn="ctr" indent="0" marL="0">
-              <a:buNone/>
-            </a:pPr>
-            <a:r>
-              <a:rPr lang="en-US" sz="1700" b="1" spc="100" kern="0" dirty="0">
+            <a:pPr marL="0" indent="0" algn="ctr">
+              <a:buNone/>
+            </a:pPr>
+            <a:r>
+              <a:rPr lang="en-US" sz="1700" b="1" kern="0" spc="100" dirty="0">
                 <a:solidFill>
                   <a:srgbClr val="FFFFFF"/>
                 </a:solidFill>
@@ -5658,7 +5241,7 @@
                 <a:ea typeface="Cambria" pitchFamily="34" charset="-122"/>
                 <a:cs typeface="Cambria" pitchFamily="34" charset="-120"/>
               </a:rPr>
-              <a:t>ACT</a:t>
+              <a:t>SENSE</a:t>
             </a:r>
             <a:endParaRPr lang="en-US" sz="1700" dirty="0"/>
           </a:p>
@@ -5666,13 +5249,13 @@
       </p:sp>
       <p:sp>
         <p:nvSpPr>
-          <p:cNvPr id="20" name="Text 15"/>
-          <p:cNvSpPr/>
-          <p:nvPr/>
-        </p:nvSpPr>
-        <p:spPr>
-          <a:xfrm>
-            <a:off x="6425032" y="4023360"/>
+          <p:cNvPr id="8" name="Text 5"/>
+          <p:cNvSpPr/>
+          <p:nvPr/>
+        </p:nvSpPr>
+        <p:spPr>
+          <a:xfrm>
+            <a:off x="883768" y="4023360"/>
             <a:ext cx="2112264" cy="1463040"/>
           </a:xfrm>
           <a:prstGeom prst="rect">
@@ -5685,7 +5268,7 @@
           <a:bodyPr wrap="square" lIns="0" tIns="0" rIns="0" bIns="0" rtlCol="0" anchor="ctr"/>
           <a:lstStyle/>
           <a:p>
-            <a:pPr algn="ctr" indent="0" marL="0">
+            <a:pPr marL="0" indent="0" algn="ctr">
               <a:lnSpc>
                 <a:spcPct val="125000"/>
               </a:lnSpc>
@@ -5700,7 +5283,7 @@
                 <a:ea typeface="Calibri" pitchFamily="34" charset="-122"/>
                 <a:cs typeface="Calibri" pitchFamily="34" charset="-120"/>
               </a:rPr>
-              <a:t>Gli attuatori simulati (irrigazione, ventole, allarme) eseguono la decisione</a:t>
+              <a:t>La fotocamera virtuale e i sensori ambientali raccolgono un nuovo stato della serra</a:t>
             </a:r>
             <a:endParaRPr lang="en-US" sz="1150" dirty="0"/>
           </a:p>
@@ -5708,13 +5291,13 @@
       </p:sp>
       <p:sp>
         <p:nvSpPr>
-          <p:cNvPr id="21" name="Text 16"/>
-          <p:cNvSpPr/>
-          <p:nvPr/>
-        </p:nvSpPr>
-        <p:spPr>
-          <a:xfrm>
-            <a:off x="8738464" y="3703320"/>
+          <p:cNvPr id="9" name="Text 6"/>
+          <p:cNvSpPr/>
+          <p:nvPr/>
+        </p:nvSpPr>
+        <p:spPr>
+          <a:xfrm>
+            <a:off x="3197200" y="3703320"/>
             <a:ext cx="256032" cy="457200"/>
           </a:xfrm>
           <a:prstGeom prst="rect">
@@ -5727,7 +5310,7 @@
           <a:bodyPr wrap="square" lIns="0" tIns="0" rIns="0" bIns="0" rtlCol="0" anchor="ctr"/>
           <a:lstStyle/>
           <a:p>
-            <a:pPr algn="ctr" indent="0" marL="0">
+            <a:pPr marL="0" indent="0" algn="ctr">
               <a:buNone/>
             </a:pPr>
             <a:r>
@@ -5747,13 +5330,13 @@
       </p:sp>
       <p:sp>
         <p:nvSpPr>
-          <p:cNvPr id="22" name="Shape 17"/>
-          <p:cNvSpPr/>
-          <p:nvPr/>
-        </p:nvSpPr>
-        <p:spPr>
-          <a:xfrm>
-            <a:off x="8994496" y="2286000"/>
+          <p:cNvPr id="10" name="Shape 7"/>
+          <p:cNvSpPr/>
+          <p:nvPr/>
+        </p:nvSpPr>
+        <p:spPr>
+          <a:xfrm>
+            <a:off x="3453232" y="2286000"/>
             <a:ext cx="2514600" cy="3337560"/>
           </a:xfrm>
           <a:prstGeom prst="roundRect">
@@ -5766,16 +5349,23 @@
           </a:solidFill>
           <a:ln/>
         </p:spPr>
-      </p:sp>
-      <p:sp>
-        <p:nvSpPr>
-          <p:cNvPr id="23" name="Shape 18"/>
-          <p:cNvSpPr/>
-          <p:nvPr/>
-        </p:nvSpPr>
-        <p:spPr>
-          <a:xfrm>
-            <a:off x="9886036" y="2651760"/>
+        <p:txBody>
+          <a:bodyPr/>
+          <a:lstStyle/>
+          <a:p>
+            <a:endParaRPr lang="it-IT"/>
+          </a:p>
+        </p:txBody>
+      </p:sp>
+      <p:sp>
+        <p:nvSpPr>
+          <p:cNvPr id="11" name="Shape 8"/>
+          <p:cNvSpPr/>
+          <p:nvPr/>
+        </p:nvSpPr>
+        <p:spPr>
+          <a:xfrm>
+            <a:off x="4344772" y="2651760"/>
             <a:ext cx="731520" cy="731520"/>
           </a:xfrm>
           <a:prstGeom prst="ellipse">
@@ -5786,10 +5376,17 @@
           </a:solidFill>
           <a:ln/>
         </p:spPr>
+        <p:txBody>
+          <a:bodyPr/>
+          <a:lstStyle/>
+          <a:p>
+            <a:endParaRPr lang="it-IT"/>
+          </a:p>
+        </p:txBody>
       </p:sp>
       <p:pic>
         <p:nvPicPr>
-          <p:cNvPr id="24" name="Image 3" descr="/private/tmp/claude-501/-Users-gianmarcovellotti-Desktop-LM-1-anno-IoT-PomodorIA/d58fc5f1-3fb5-4f2f-a56b-ba8bb07e0c51/scratchpad/pptx/icons/layers_white.png">    </p:cNvPr>
+          <p:cNvPr id="12" name="Image 1" descr="/private/tmp/claude-501/-Users-gianmarcovellotti-Desktop-LM-1-anno-IoT-PomodorIA/d58fc5f1-3fb5-4f2f-a56b-ba8bb07e0c51/scratchpad/pptx/icons/brain_white.png"/>
           <p:cNvPicPr>
             <a:picLocks noChangeAspect="1"/>
           </p:cNvPicPr>
@@ -5803,7 +5400,7 @@
         </p:blipFill>
         <p:spPr>
           <a:xfrm>
-            <a:off x="9973818" y="2739542"/>
+            <a:off x="4432554" y="2739542"/>
             <a:ext cx="555955" cy="555955"/>
           </a:xfrm>
           <a:prstGeom prst="rect">
@@ -5813,13 +5410,13 @@
       </p:pic>
       <p:sp>
         <p:nvSpPr>
-          <p:cNvPr id="25" name="Text 19"/>
-          <p:cNvSpPr/>
-          <p:nvPr/>
-        </p:nvSpPr>
-        <p:spPr>
-          <a:xfrm>
-            <a:off x="9131656" y="3611880"/>
+          <p:cNvPr id="13" name="Text 9"/>
+          <p:cNvSpPr/>
+          <p:nvPr/>
+        </p:nvSpPr>
+        <p:spPr>
+          <a:xfrm>
+            <a:off x="3590392" y="3611880"/>
             <a:ext cx="2240280" cy="365760"/>
           </a:xfrm>
           <a:prstGeom prst="rect">
@@ -5832,11 +5429,11 @@
           <a:bodyPr wrap="square" lIns="0" tIns="0" rIns="0" bIns="0" rtlCol="0" anchor="ctr"/>
           <a:lstStyle/>
           <a:p>
-            <a:pPr algn="ctr" indent="0" marL="0">
-              <a:buNone/>
-            </a:pPr>
-            <a:r>
-              <a:rPr lang="en-US" sz="1700" b="1" spc="100" kern="0" dirty="0">
+            <a:pPr marL="0" indent="0" algn="ctr">
+              <a:buNone/>
+            </a:pPr>
+            <a:r>
+              <a:rPr lang="en-US" sz="1700" b="1" kern="0" spc="100" dirty="0">
                 <a:solidFill>
                   <a:srgbClr val="FFFFFF"/>
                 </a:solidFill>
@@ -5844,7 +5441,7 @@
                 <a:ea typeface="Cambria" pitchFamily="34" charset="-122"/>
                 <a:cs typeface="Cambria" pitchFamily="34" charset="-120"/>
               </a:rPr>
-              <a:t>LOG</a:t>
+              <a:t>THINK</a:t>
             </a:r>
             <a:endParaRPr lang="en-US" sz="1700" dirty="0"/>
           </a:p>
@@ -5852,13 +5449,13 @@
       </p:sp>
       <p:sp>
         <p:nvSpPr>
-          <p:cNvPr id="26" name="Text 20"/>
-          <p:cNvSpPr/>
-          <p:nvPr/>
-        </p:nvSpPr>
-        <p:spPr>
-          <a:xfrm>
-            <a:off x="9195664" y="4023360"/>
+          <p:cNvPr id="14" name="Text 10"/>
+          <p:cNvSpPr/>
+          <p:nvPr/>
+        </p:nvSpPr>
+        <p:spPr>
+          <a:xfrm>
+            <a:off x="3654400" y="4023360"/>
             <a:ext cx="2112264" cy="1463040"/>
           </a:xfrm>
           <a:prstGeom prst="rect">
@@ -5871,7 +5468,7 @@
           <a:bodyPr wrap="square" lIns="0" tIns="0" rIns="0" bIns="0" rtlCol="0" anchor="ctr"/>
           <a:lstStyle/>
           <a:p>
-            <a:pPr algn="ctr" indent="0" marL="0">
+            <a:pPr marL="0" indent="0" algn="ctr">
               <a:lnSpc>
                 <a:spcPct val="125000"/>
               </a:lnSpc>
@@ -5886,6 +5483,406 @@
                 <a:ea typeface="Calibri" pitchFamily="34" charset="-122"/>
                 <a:cs typeface="Calibri" pitchFamily="34" charset="-120"/>
               </a:rPr>
+              <a:t>La CNN classifica la foglia, l'agente decide combinando diagnosi + ambiente</a:t>
+            </a:r>
+            <a:endParaRPr lang="en-US" sz="1150" dirty="0"/>
+          </a:p>
+        </p:txBody>
+      </p:sp>
+      <p:sp>
+        <p:nvSpPr>
+          <p:cNvPr id="15" name="Text 11"/>
+          <p:cNvSpPr/>
+          <p:nvPr/>
+        </p:nvSpPr>
+        <p:spPr>
+          <a:xfrm>
+            <a:off x="5967832" y="3703320"/>
+            <a:ext cx="256032" cy="457200"/>
+          </a:xfrm>
+          <a:prstGeom prst="rect">
+            <a:avLst/>
+          </a:prstGeom>
+          <a:noFill/>
+          <a:ln/>
+        </p:spPr>
+        <p:txBody>
+          <a:bodyPr wrap="square" lIns="0" tIns="0" rIns="0" bIns="0" rtlCol="0" anchor="ctr"/>
+          <a:lstStyle/>
+          <a:p>
+            <a:pPr marL="0" indent="0" algn="ctr">
+              <a:buNone/>
+            </a:pPr>
+            <a:r>
+              <a:rPr lang="en-US" sz="2200" b="1" dirty="0">
+                <a:solidFill>
+                  <a:srgbClr val="9FC98A"/>
+                </a:solidFill>
+                <a:latin typeface="Arial" pitchFamily="34" charset="0"/>
+                <a:ea typeface="Arial" pitchFamily="34" charset="-122"/>
+                <a:cs typeface="Arial" pitchFamily="34" charset="-120"/>
+              </a:rPr>
+              <a:t>→</a:t>
+            </a:r>
+            <a:endParaRPr lang="en-US" sz="2200" dirty="0"/>
+          </a:p>
+        </p:txBody>
+      </p:sp>
+      <p:sp>
+        <p:nvSpPr>
+          <p:cNvPr id="16" name="Shape 12"/>
+          <p:cNvSpPr/>
+          <p:nvPr/>
+        </p:nvSpPr>
+        <p:spPr>
+          <a:xfrm>
+            <a:off x="6223864" y="2286000"/>
+            <a:ext cx="2514600" cy="3337560"/>
+          </a:xfrm>
+          <a:prstGeom prst="roundRect">
+            <a:avLst>
+              <a:gd name="adj" fmla="val 4364"/>
+            </a:avLst>
+          </a:prstGeom>
+          <a:solidFill>
+            <a:srgbClr val="24512A"/>
+          </a:solidFill>
+          <a:ln/>
+        </p:spPr>
+        <p:txBody>
+          <a:bodyPr/>
+          <a:lstStyle/>
+          <a:p>
+            <a:endParaRPr lang="it-IT"/>
+          </a:p>
+        </p:txBody>
+      </p:sp>
+      <p:sp>
+        <p:nvSpPr>
+          <p:cNvPr id="17" name="Shape 13"/>
+          <p:cNvSpPr/>
+          <p:nvPr/>
+        </p:nvSpPr>
+        <p:spPr>
+          <a:xfrm>
+            <a:off x="7115404" y="2651760"/>
+            <a:ext cx="731520" cy="731520"/>
+          </a:xfrm>
+          <a:prstGeom prst="ellipse">
+            <a:avLst/>
+          </a:prstGeom>
+          <a:solidFill>
+            <a:srgbClr val="C0392B"/>
+          </a:solidFill>
+          <a:ln/>
+        </p:spPr>
+        <p:txBody>
+          <a:bodyPr/>
+          <a:lstStyle/>
+          <a:p>
+            <a:endParaRPr lang="it-IT"/>
+          </a:p>
+        </p:txBody>
+      </p:sp>
+      <p:pic>
+        <p:nvPicPr>
+          <p:cNvPr id="18" name="Image 2" descr="/private/tmp/claude-501/-Users-gianmarcovellotti-Desktop-LM-1-anno-IoT-PomodorIA/d58fc5f1-3fb5-4f2f-a56b-ba8bb07e0c51/scratchpad/pptx/icons/bell_white.png"/>
+          <p:cNvPicPr>
+            <a:picLocks noChangeAspect="1"/>
+          </p:cNvPicPr>
+          <p:nvPr/>
+        </p:nvPicPr>
+        <p:blipFill>
+          <a:blip r:embed="rId5"/>
+          <a:stretch>
+            <a:fillRect/>
+          </a:stretch>
+        </p:blipFill>
+        <p:spPr>
+          <a:xfrm>
+            <a:off x="7203186" y="2739542"/>
+            <a:ext cx="555955" cy="555955"/>
+          </a:xfrm>
+          <a:prstGeom prst="rect">
+            <a:avLst/>
+          </a:prstGeom>
+        </p:spPr>
+      </p:pic>
+      <p:sp>
+        <p:nvSpPr>
+          <p:cNvPr id="19" name="Text 14"/>
+          <p:cNvSpPr/>
+          <p:nvPr/>
+        </p:nvSpPr>
+        <p:spPr>
+          <a:xfrm>
+            <a:off x="6361024" y="3611880"/>
+            <a:ext cx="2240280" cy="365760"/>
+          </a:xfrm>
+          <a:prstGeom prst="rect">
+            <a:avLst/>
+          </a:prstGeom>
+          <a:noFill/>
+          <a:ln/>
+        </p:spPr>
+        <p:txBody>
+          <a:bodyPr wrap="square" lIns="0" tIns="0" rIns="0" bIns="0" rtlCol="0" anchor="ctr"/>
+          <a:lstStyle/>
+          <a:p>
+            <a:pPr marL="0" indent="0" algn="ctr">
+              <a:buNone/>
+            </a:pPr>
+            <a:r>
+              <a:rPr lang="en-US" sz="1700" b="1" kern="0" spc="100" dirty="0">
+                <a:solidFill>
+                  <a:srgbClr val="FFFFFF"/>
+                </a:solidFill>
+                <a:latin typeface="Cambria" pitchFamily="34" charset="0"/>
+                <a:ea typeface="Cambria" pitchFamily="34" charset="-122"/>
+                <a:cs typeface="Cambria" pitchFamily="34" charset="-120"/>
+              </a:rPr>
+              <a:t>ACT</a:t>
+            </a:r>
+            <a:endParaRPr lang="en-US" sz="1700" dirty="0"/>
+          </a:p>
+        </p:txBody>
+      </p:sp>
+      <p:sp>
+        <p:nvSpPr>
+          <p:cNvPr id="20" name="Text 15"/>
+          <p:cNvSpPr/>
+          <p:nvPr/>
+        </p:nvSpPr>
+        <p:spPr>
+          <a:xfrm>
+            <a:off x="6425032" y="4023360"/>
+            <a:ext cx="2112264" cy="1463040"/>
+          </a:xfrm>
+          <a:prstGeom prst="rect">
+            <a:avLst/>
+          </a:prstGeom>
+          <a:noFill/>
+          <a:ln/>
+        </p:spPr>
+        <p:txBody>
+          <a:bodyPr wrap="square" lIns="0" tIns="0" rIns="0" bIns="0" rtlCol="0" anchor="ctr"/>
+          <a:lstStyle/>
+          <a:p>
+            <a:pPr marL="0" indent="0" algn="ctr">
+              <a:lnSpc>
+                <a:spcPct val="125000"/>
+              </a:lnSpc>
+              <a:buNone/>
+            </a:pPr>
+            <a:r>
+              <a:rPr lang="en-US" sz="1150" dirty="0">
+                <a:solidFill>
+                  <a:srgbClr val="D7E4CF"/>
+                </a:solidFill>
+                <a:latin typeface="Calibri" pitchFamily="34" charset="0"/>
+                <a:ea typeface="Calibri" pitchFamily="34" charset="-122"/>
+                <a:cs typeface="Calibri" pitchFamily="34" charset="-120"/>
+              </a:rPr>
+              <a:t>Gli attuatori simulati (irrigazione, ventole, allarme) eseguono la decisione</a:t>
+            </a:r>
+            <a:endParaRPr lang="en-US" sz="1150" dirty="0"/>
+          </a:p>
+        </p:txBody>
+      </p:sp>
+      <p:sp>
+        <p:nvSpPr>
+          <p:cNvPr id="21" name="Text 16"/>
+          <p:cNvSpPr/>
+          <p:nvPr/>
+        </p:nvSpPr>
+        <p:spPr>
+          <a:xfrm>
+            <a:off x="8738464" y="3703320"/>
+            <a:ext cx="256032" cy="457200"/>
+          </a:xfrm>
+          <a:prstGeom prst="rect">
+            <a:avLst/>
+          </a:prstGeom>
+          <a:noFill/>
+          <a:ln/>
+        </p:spPr>
+        <p:txBody>
+          <a:bodyPr wrap="square" lIns="0" tIns="0" rIns="0" bIns="0" rtlCol="0" anchor="ctr"/>
+          <a:lstStyle/>
+          <a:p>
+            <a:pPr marL="0" indent="0" algn="ctr">
+              <a:buNone/>
+            </a:pPr>
+            <a:r>
+              <a:rPr lang="en-US" sz="2200" b="1" dirty="0">
+                <a:solidFill>
+                  <a:srgbClr val="9FC98A"/>
+                </a:solidFill>
+                <a:latin typeface="Arial" pitchFamily="34" charset="0"/>
+                <a:ea typeface="Arial" pitchFamily="34" charset="-122"/>
+                <a:cs typeface="Arial" pitchFamily="34" charset="-120"/>
+              </a:rPr>
+              <a:t>→</a:t>
+            </a:r>
+            <a:endParaRPr lang="en-US" sz="2200" dirty="0"/>
+          </a:p>
+        </p:txBody>
+      </p:sp>
+      <p:sp>
+        <p:nvSpPr>
+          <p:cNvPr id="22" name="Shape 17"/>
+          <p:cNvSpPr/>
+          <p:nvPr/>
+        </p:nvSpPr>
+        <p:spPr>
+          <a:xfrm>
+            <a:off x="8994496" y="2286000"/>
+            <a:ext cx="2514600" cy="3337560"/>
+          </a:xfrm>
+          <a:prstGeom prst="roundRect">
+            <a:avLst>
+              <a:gd name="adj" fmla="val 4364"/>
+            </a:avLst>
+          </a:prstGeom>
+          <a:solidFill>
+            <a:srgbClr val="24512A"/>
+          </a:solidFill>
+          <a:ln/>
+        </p:spPr>
+        <p:txBody>
+          <a:bodyPr/>
+          <a:lstStyle/>
+          <a:p>
+            <a:endParaRPr lang="it-IT"/>
+          </a:p>
+        </p:txBody>
+      </p:sp>
+      <p:sp>
+        <p:nvSpPr>
+          <p:cNvPr id="23" name="Shape 18"/>
+          <p:cNvSpPr/>
+          <p:nvPr/>
+        </p:nvSpPr>
+        <p:spPr>
+          <a:xfrm>
+            <a:off x="9886036" y="2651760"/>
+            <a:ext cx="731520" cy="731520"/>
+          </a:xfrm>
+          <a:prstGeom prst="ellipse">
+            <a:avLst/>
+          </a:prstGeom>
+          <a:solidFill>
+            <a:srgbClr val="C0392B"/>
+          </a:solidFill>
+          <a:ln/>
+        </p:spPr>
+        <p:txBody>
+          <a:bodyPr/>
+          <a:lstStyle/>
+          <a:p>
+            <a:endParaRPr lang="it-IT"/>
+          </a:p>
+        </p:txBody>
+      </p:sp>
+      <p:pic>
+        <p:nvPicPr>
+          <p:cNvPr id="24" name="Image 3" descr="/private/tmp/claude-501/-Users-gianmarcovellotti-Desktop-LM-1-anno-IoT-PomodorIA/d58fc5f1-3fb5-4f2f-a56b-ba8bb07e0c51/scratchpad/pptx/icons/layers_white.png"/>
+          <p:cNvPicPr>
+            <a:picLocks noChangeAspect="1"/>
+          </p:cNvPicPr>
+          <p:nvPr/>
+        </p:nvPicPr>
+        <p:blipFill>
+          <a:blip r:embed="rId6"/>
+          <a:stretch>
+            <a:fillRect/>
+          </a:stretch>
+        </p:blipFill>
+        <p:spPr>
+          <a:xfrm>
+            <a:off x="9973818" y="2739542"/>
+            <a:ext cx="555955" cy="555955"/>
+          </a:xfrm>
+          <a:prstGeom prst="rect">
+            <a:avLst/>
+          </a:prstGeom>
+        </p:spPr>
+      </p:pic>
+      <p:sp>
+        <p:nvSpPr>
+          <p:cNvPr id="25" name="Text 19"/>
+          <p:cNvSpPr/>
+          <p:nvPr/>
+        </p:nvSpPr>
+        <p:spPr>
+          <a:xfrm>
+            <a:off x="9131656" y="3611880"/>
+            <a:ext cx="2240280" cy="365760"/>
+          </a:xfrm>
+          <a:prstGeom prst="rect">
+            <a:avLst/>
+          </a:prstGeom>
+          <a:noFill/>
+          <a:ln/>
+        </p:spPr>
+        <p:txBody>
+          <a:bodyPr wrap="square" lIns="0" tIns="0" rIns="0" bIns="0" rtlCol="0" anchor="ctr"/>
+          <a:lstStyle/>
+          <a:p>
+            <a:pPr marL="0" indent="0" algn="ctr">
+              <a:buNone/>
+            </a:pPr>
+            <a:r>
+              <a:rPr lang="en-US" sz="1700" b="1" kern="0" spc="100" dirty="0">
+                <a:solidFill>
+                  <a:srgbClr val="FFFFFF"/>
+                </a:solidFill>
+                <a:latin typeface="Cambria" pitchFamily="34" charset="0"/>
+                <a:ea typeface="Cambria" pitchFamily="34" charset="-122"/>
+                <a:cs typeface="Cambria" pitchFamily="34" charset="-120"/>
+              </a:rPr>
+              <a:t>LOG</a:t>
+            </a:r>
+            <a:endParaRPr lang="en-US" sz="1700" dirty="0"/>
+          </a:p>
+        </p:txBody>
+      </p:sp>
+      <p:sp>
+        <p:nvSpPr>
+          <p:cNvPr id="26" name="Text 20"/>
+          <p:cNvSpPr/>
+          <p:nvPr/>
+        </p:nvSpPr>
+        <p:spPr>
+          <a:xfrm>
+            <a:off x="9195664" y="4023360"/>
+            <a:ext cx="2112264" cy="1463040"/>
+          </a:xfrm>
+          <a:prstGeom prst="rect">
+            <a:avLst/>
+          </a:prstGeom>
+          <a:noFill/>
+          <a:ln/>
+        </p:spPr>
+        <p:txBody>
+          <a:bodyPr wrap="square" lIns="0" tIns="0" rIns="0" bIns="0" rtlCol="0" anchor="ctr"/>
+          <a:lstStyle/>
+          <a:p>
+            <a:pPr marL="0" indent="0" algn="ctr">
+              <a:lnSpc>
+                <a:spcPct val="125000"/>
+              </a:lnSpc>
+              <a:buNone/>
+            </a:pPr>
+            <a:r>
+              <a:rPr lang="en-US" sz="1150" dirty="0">
+                <a:solidFill>
+                  <a:srgbClr val="D7E4CF"/>
+                </a:solidFill>
+                <a:latin typeface="Calibri" pitchFamily="34" charset="0"/>
+                <a:ea typeface="Calibri" pitchFamily="34" charset="-122"/>
+                <a:cs typeface="Calibri" pitchFamily="34" charset="-120"/>
+              </a:rPr>
               <a:t>Ogni ciclo viene registrato su CSV e mostrato nella dashboard live</a:t>
             </a:r>
             <a:endParaRPr lang="en-US" sz="1150" dirty="0"/>
@@ -5913,7 +5910,7 @@
           <a:bodyPr wrap="square" lIns="0" tIns="0" rIns="0" bIns="0" rtlCol="0" anchor="ctr"/>
           <a:lstStyle/>
           <a:p>
-            <a:pPr algn="ctr" indent="0" marL="0">
+            <a:pPr marL="0" indent="0" algn="ctr">
               <a:buNone/>
             </a:pPr>
             <a:r>
@@ -5952,7 +5949,7 @@
           <a:bodyPr wrap="square" lIns="0" tIns="0" rIns="0" bIns="0" rtlCol="0" anchor="ctr"/>
           <a:lstStyle/>
           <a:p>
-            <a:pPr algn="r" indent="0" marL="0">
+            <a:pPr marL="0" indent="0" algn="r">
               <a:buNone/>
             </a:pPr>
             <a:r>
@@ -5986,6 +5983,7 @@
         <a:solidFill>
           <a:srgbClr val="FFFFFF"/>
         </a:solidFill>
+        <a:effectLst/>
       </p:bgPr>
     </p:bg>
     <p:spTree>
@@ -6023,11 +6021,11 @@
           <a:bodyPr wrap="square" lIns="0" tIns="0" rIns="0" bIns="0" rtlCol="0" anchor="ctr"/>
           <a:lstStyle/>
           <a:p>
-            <a:pPr indent="0" marL="0">
-              <a:buNone/>
-            </a:pPr>
-            <a:r>
-              <a:rPr lang="en-US" sz="1300" b="1" spc="200" kern="0" dirty="0">
+            <a:pPr marL="0" indent="0">
+              <a:buNone/>
+            </a:pPr>
+            <a:r>
+              <a:rPr lang="en-US" sz="1300" b="1" kern="0" spc="200" dirty="0">
                 <a:solidFill>
                   <a:srgbClr val="C0392B"/>
                 </a:solidFill>
@@ -6062,7 +6060,7 @@
           <a:bodyPr wrap="square" lIns="0" tIns="0" rIns="0" bIns="0" rtlCol="0" anchor="ctr"/>
           <a:lstStyle/>
           <a:p>
-            <a:pPr indent="0" marL="0">
+            <a:pPr marL="0" indent="0">
               <a:buNone/>
             </a:pPr>
             <a:r>
@@ -6101,6 +6099,13 @@
           </a:solidFill>
           <a:ln/>
         </p:spPr>
+        <p:txBody>
+          <a:bodyPr/>
+          <a:lstStyle/>
+          <a:p>
+            <a:endParaRPr lang="it-IT"/>
+          </a:p>
+        </p:txBody>
       </p:sp>
       <p:sp>
         <p:nvSpPr>
@@ -6121,17 +6126,24 @@
           </a:solidFill>
           <a:ln/>
         </p:spPr>
+        <p:txBody>
+          <a:bodyPr/>
+          <a:lstStyle/>
+          <a:p>
+            <a:endParaRPr lang="it-IT"/>
+          </a:p>
+        </p:txBody>
       </p:sp>
       <p:pic>
         <p:nvPicPr>
-          <p:cNvPr id="6" name="Image 0" descr="/private/tmp/claude-501/-Users-gianmarcovellotti-Desktop-LM-1-anno-IoT-PomodorIA/d58fc5f1-3fb5-4f2f-a56b-ba8bb07e0c51/scratchpad/pptx/icons/camera_white.png">    </p:cNvPr>
+          <p:cNvPr id="6" name="Image 0" descr="/private/tmp/claude-501/-Users-gianmarcovellotti-Desktop-LM-1-anno-IoT-PomodorIA/d58fc5f1-3fb5-4f2f-a56b-ba8bb07e0c51/scratchpad/pptx/icons/camera_white.png"/>
           <p:cNvPicPr>
             <a:picLocks noChangeAspect="1"/>
           </p:cNvPicPr>
           <p:nvPr/>
         </p:nvPicPr>
         <p:blipFill>
-          <a:blip r:embed="rId1"/>
+          <a:blip r:embed="rId3"/>
           <a:stretch>
             <a:fillRect/>
           </a:stretch>
@@ -6167,7 +6179,7 @@
           <a:bodyPr wrap="square" lIns="0" tIns="0" rIns="0" bIns="0" rtlCol="0" anchor="ctr"/>
           <a:lstStyle/>
           <a:p>
-            <a:pPr indent="0" marL="0">
+            <a:pPr marL="0" indent="0">
               <a:buNone/>
             </a:pPr>
             <a:r>
@@ -6300,6 +6312,13 @@
           </a:solidFill>
           <a:ln/>
         </p:spPr>
+        <p:txBody>
+          <a:bodyPr/>
+          <a:lstStyle/>
+          <a:p>
+            <a:endParaRPr lang="it-IT"/>
+          </a:p>
+        </p:txBody>
       </p:sp>
       <p:sp>
         <p:nvSpPr>
@@ -6322,7 +6341,7 @@
           <a:bodyPr wrap="square" lIns="0" tIns="0" rIns="0" bIns="0" rtlCol="0" anchor="ctr"/>
           <a:lstStyle/>
           <a:p>
-            <a:pPr indent="0" marL="0">
+            <a:pPr marL="0" indent="0">
               <a:buNone/>
             </a:pPr>
             <a:r>
@@ -6359,182 +6378,17 @@
           </a:solidFill>
           <a:ln/>
         </p:spPr>
+        <p:txBody>
+          <a:bodyPr/>
+          <a:lstStyle/>
+          <a:p>
+            <a:endParaRPr lang="it-IT"/>
+          </a:p>
+        </p:txBody>
       </p:sp>
       <p:pic>
         <p:nvPicPr>
-          <p:cNvPr id="12" name="Image 1" descr="/private/tmp/claude-501/-Users-gianmarcovellotti-Desktop-LM-1-anno-IoT-PomodorIA/d58fc5f1-3fb5-4f2f-a56b-ba8bb07e0c51/scratchpad/pptx/icons/therm_white.png">    </p:cNvPr>
-          <p:cNvPicPr>
-            <a:picLocks noChangeAspect="1"/>
-          </p:cNvPicPr>
-          <p:nvPr/>
-        </p:nvPicPr>
-        <p:blipFill>
-          <a:blip r:embed="rId2"/>
-          <a:stretch>
-            <a:fillRect/>
-          </a:stretch>
-        </p:blipFill>
-        <p:spPr>
-          <a:xfrm>
-            <a:off x="6729984" y="2615184"/>
-            <a:ext cx="347472" cy="347472"/>
-          </a:xfrm>
-          <a:prstGeom prst="rect">
-            <a:avLst/>
-          </a:prstGeom>
-        </p:spPr>
-      </p:pic>
-      <p:sp>
-        <p:nvSpPr>
-          <p:cNvPr id="13" name="Text 9"/>
-          <p:cNvSpPr/>
-          <p:nvPr/>
-        </p:nvSpPr>
-        <p:spPr>
-          <a:xfrm>
-            <a:off x="6355080" y="3035808"/>
-            <a:ext cx="1097280" cy="457200"/>
-          </a:xfrm>
-          <a:prstGeom prst="rect">
-            <a:avLst/>
-          </a:prstGeom>
-          <a:noFill/>
-          <a:ln/>
-        </p:spPr>
-        <p:txBody>
-          <a:bodyPr wrap="square" lIns="0" tIns="0" rIns="0" bIns="0" rtlCol="0" anchor="ctr"/>
-          <a:lstStyle/>
-          <a:p>
-            <a:pPr algn="ctr" indent="0" marL="0">
-              <a:lnSpc>
-                <a:spcPct val="105000"/>
-              </a:lnSpc>
-              <a:buNone/>
-            </a:pPr>
-            <a:r>
-              <a:rPr lang="en-US" sz="950" dirty="0">
-                <a:solidFill>
-                  <a:srgbClr val="1F2A1F"/>
-                </a:solidFill>
-                <a:latin typeface="Calibri" pitchFamily="34" charset="0"/>
-                <a:ea typeface="Calibri" pitchFamily="34" charset="-122"/>
-                <a:cs typeface="Calibri" pitchFamily="34" charset="-120"/>
-              </a:rPr>
-              <a:t>Temperatura</a:t>
-            </a:r>
-            <a:endParaRPr lang="en-US" sz="950" dirty="0"/>
-          </a:p>
-        </p:txBody>
-      </p:sp>
-      <p:sp>
-        <p:nvSpPr>
-          <p:cNvPr id="14" name="Shape 10"/>
-          <p:cNvSpPr/>
-          <p:nvPr/>
-        </p:nvSpPr>
-        <p:spPr>
-          <a:xfrm>
-            <a:off x="7863840" y="2560320"/>
-            <a:ext cx="457200" cy="457200"/>
-          </a:xfrm>
-          <a:prstGeom prst="ellipse">
-            <a:avLst/>
-          </a:prstGeom>
-          <a:solidFill>
-            <a:srgbClr val="6E9B57"/>
-          </a:solidFill>
-          <a:ln/>
-        </p:spPr>
-      </p:sp>
-      <p:pic>
-        <p:nvPicPr>
-          <p:cNvPr id="15" name="Image 2" descr="/private/tmp/claude-501/-Users-gianmarcovellotti-Desktop-LM-1-anno-IoT-PomodorIA/d58fc5f1-3fb5-4f2f-a56b-ba8bb07e0c51/scratchpad/pptx/icons/tint_white.png">    </p:cNvPr>
-          <p:cNvPicPr>
-            <a:picLocks noChangeAspect="1"/>
-          </p:cNvPicPr>
-          <p:nvPr/>
-        </p:nvPicPr>
-        <p:blipFill>
-          <a:blip r:embed="rId3"/>
-          <a:stretch>
-            <a:fillRect/>
-          </a:stretch>
-        </p:blipFill>
-        <p:spPr>
-          <a:xfrm>
-            <a:off x="7918704" y="2615184"/>
-            <a:ext cx="347472" cy="347472"/>
-          </a:xfrm>
-          <a:prstGeom prst="rect">
-            <a:avLst/>
-          </a:prstGeom>
-        </p:spPr>
-      </p:pic>
-      <p:sp>
-        <p:nvSpPr>
-          <p:cNvPr id="16" name="Text 11"/>
-          <p:cNvSpPr/>
-          <p:nvPr/>
-        </p:nvSpPr>
-        <p:spPr>
-          <a:xfrm>
-            <a:off x="7543800" y="3035808"/>
-            <a:ext cx="1097280" cy="457200"/>
-          </a:xfrm>
-          <a:prstGeom prst="rect">
-            <a:avLst/>
-          </a:prstGeom>
-          <a:noFill/>
-          <a:ln/>
-        </p:spPr>
-        <p:txBody>
-          <a:bodyPr wrap="square" lIns="0" tIns="0" rIns="0" bIns="0" rtlCol="0" anchor="ctr"/>
-          <a:lstStyle/>
-          <a:p>
-            <a:pPr algn="ctr" indent="0" marL="0">
-              <a:lnSpc>
-                <a:spcPct val="105000"/>
-              </a:lnSpc>
-              <a:buNone/>
-            </a:pPr>
-            <a:r>
-              <a:rPr lang="en-US" sz="950" dirty="0">
-                <a:solidFill>
-                  <a:srgbClr val="1F2A1F"/>
-                </a:solidFill>
-                <a:latin typeface="Calibri" pitchFamily="34" charset="0"/>
-                <a:ea typeface="Calibri" pitchFamily="34" charset="-122"/>
-                <a:cs typeface="Calibri" pitchFamily="34" charset="-120"/>
-              </a:rPr>
-              <a:t>Umidità aria &amp; suolo</a:t>
-            </a:r>
-            <a:endParaRPr lang="en-US" sz="950" dirty="0"/>
-          </a:p>
-        </p:txBody>
-      </p:sp>
-      <p:sp>
-        <p:nvSpPr>
-          <p:cNvPr id="17" name="Shape 12"/>
-          <p:cNvSpPr/>
-          <p:nvPr/>
-        </p:nvSpPr>
-        <p:spPr>
-          <a:xfrm>
-            <a:off x="9052560" y="2560320"/>
-            <a:ext cx="457200" cy="457200"/>
-          </a:xfrm>
-          <a:prstGeom prst="ellipse">
-            <a:avLst/>
-          </a:prstGeom>
-          <a:solidFill>
-            <a:srgbClr val="6E9B57"/>
-          </a:solidFill>
-          <a:ln/>
-        </p:spPr>
-      </p:sp>
-      <p:pic>
-        <p:nvPicPr>
-          <p:cNvPr id="18" name="Image 3" descr="/private/tmp/claude-501/-Users-gianmarcovellotti-Desktop-LM-1-anno-IoT-PomodorIA/d58fc5f1-3fb5-4f2f-a56b-ba8bb07e0c51/scratchpad/pptx/icons/sun_white.png">    </p:cNvPr>
+          <p:cNvPr id="12" name="Image 1" descr="/private/tmp/claude-501/-Users-gianmarcovellotti-Desktop-LM-1-anno-IoT-PomodorIA/d58fc5f1-3fb5-4f2f-a56b-ba8bb07e0c51/scratchpad/pptx/icons/therm_white.png"/>
           <p:cNvPicPr>
             <a:picLocks noChangeAspect="1"/>
           </p:cNvPicPr>
@@ -6548,7 +6402,7 @@
         </p:blipFill>
         <p:spPr>
           <a:xfrm>
-            <a:off x="9107424" y="2615184"/>
+            <a:off x="6729984" y="2615184"/>
             <a:ext cx="347472" cy="347472"/>
           </a:xfrm>
           <a:prstGeom prst="rect">
@@ -6558,13 +6412,13 @@
       </p:pic>
       <p:sp>
         <p:nvSpPr>
-          <p:cNvPr id="19" name="Text 13"/>
-          <p:cNvSpPr/>
-          <p:nvPr/>
-        </p:nvSpPr>
-        <p:spPr>
-          <a:xfrm>
-            <a:off x="8732520" y="3035808"/>
+          <p:cNvPr id="13" name="Text 9"/>
+          <p:cNvSpPr/>
+          <p:nvPr/>
+        </p:nvSpPr>
+        <p:spPr>
+          <a:xfrm>
+            <a:off x="6355080" y="3035808"/>
             <a:ext cx="1097280" cy="457200"/>
           </a:xfrm>
           <a:prstGeom prst="rect">
@@ -6577,7 +6431,7 @@
           <a:bodyPr wrap="square" lIns="0" tIns="0" rIns="0" bIns="0" rtlCol="0" anchor="ctr"/>
           <a:lstStyle/>
           <a:p>
-            <a:pPr algn="ctr" indent="0" marL="0">
+            <a:pPr marL="0" indent="0" algn="ctr">
               <a:lnSpc>
                 <a:spcPct val="105000"/>
               </a:lnSpc>
@@ -6592,7 +6446,7 @@
                 <a:ea typeface="Calibri" pitchFamily="34" charset="-122"/>
                 <a:cs typeface="Calibri" pitchFamily="34" charset="-120"/>
               </a:rPr>
-              <a:t>Luminosità</a:t>
+              <a:t>Temperatura</a:t>
             </a:r>
             <a:endParaRPr lang="en-US" sz="950" dirty="0"/>
           </a:p>
@@ -6600,13 +6454,13 @@
       </p:sp>
       <p:sp>
         <p:nvSpPr>
-          <p:cNvPr id="20" name="Shape 14"/>
-          <p:cNvSpPr/>
-          <p:nvPr/>
-        </p:nvSpPr>
-        <p:spPr>
-          <a:xfrm>
-            <a:off x="10241280" y="2560320"/>
+          <p:cNvPr id="14" name="Shape 10"/>
+          <p:cNvSpPr/>
+          <p:nvPr/>
+        </p:nvSpPr>
+        <p:spPr>
+          <a:xfrm>
+            <a:off x="7863840" y="2560320"/>
             <a:ext cx="457200" cy="457200"/>
           </a:xfrm>
           <a:prstGeom prst="ellipse">
@@ -6617,10 +6471,17 @@
           </a:solidFill>
           <a:ln/>
         </p:spPr>
+        <p:txBody>
+          <a:bodyPr/>
+          <a:lstStyle/>
+          <a:p>
+            <a:endParaRPr lang="it-IT"/>
+          </a:p>
+        </p:txBody>
       </p:sp>
       <p:pic>
         <p:nvPicPr>
-          <p:cNvPr id="21" name="Image 4" descr="/private/tmp/claude-501/-Users-gianmarcovellotti-Desktop-LM-1-anno-IoT-PomodorIA/d58fc5f1-3fb5-4f2f-a56b-ba8bb07e0c51/scratchpad/pptx/icons/wind_white.png">    </p:cNvPr>
+          <p:cNvPr id="15" name="Image 2" descr="/private/tmp/claude-501/-Users-gianmarcovellotti-Desktop-LM-1-anno-IoT-PomodorIA/d58fc5f1-3fb5-4f2f-a56b-ba8bb07e0c51/scratchpad/pptx/icons/tint_white.png"/>
           <p:cNvPicPr>
             <a:picLocks noChangeAspect="1"/>
           </p:cNvPicPr>
@@ -6634,6 +6495,192 @@
         </p:blipFill>
         <p:spPr>
           <a:xfrm>
+            <a:off x="7918704" y="2615184"/>
+            <a:ext cx="347472" cy="347472"/>
+          </a:xfrm>
+          <a:prstGeom prst="rect">
+            <a:avLst/>
+          </a:prstGeom>
+        </p:spPr>
+      </p:pic>
+      <p:sp>
+        <p:nvSpPr>
+          <p:cNvPr id="16" name="Text 11"/>
+          <p:cNvSpPr/>
+          <p:nvPr/>
+        </p:nvSpPr>
+        <p:spPr>
+          <a:xfrm>
+            <a:off x="7543800" y="3035808"/>
+            <a:ext cx="1097280" cy="457200"/>
+          </a:xfrm>
+          <a:prstGeom prst="rect">
+            <a:avLst/>
+          </a:prstGeom>
+          <a:noFill/>
+          <a:ln/>
+        </p:spPr>
+        <p:txBody>
+          <a:bodyPr wrap="square" lIns="0" tIns="0" rIns="0" bIns="0" rtlCol="0" anchor="ctr"/>
+          <a:lstStyle/>
+          <a:p>
+            <a:pPr marL="0" indent="0" algn="ctr">
+              <a:lnSpc>
+                <a:spcPct val="105000"/>
+              </a:lnSpc>
+              <a:buNone/>
+            </a:pPr>
+            <a:r>
+              <a:rPr lang="en-US" sz="950" dirty="0">
+                <a:solidFill>
+                  <a:srgbClr val="1F2A1F"/>
+                </a:solidFill>
+                <a:latin typeface="Calibri" pitchFamily="34" charset="0"/>
+                <a:ea typeface="Calibri" pitchFamily="34" charset="-122"/>
+                <a:cs typeface="Calibri" pitchFamily="34" charset="-120"/>
+              </a:rPr>
+              <a:t>Umidità aria &amp; suolo</a:t>
+            </a:r>
+            <a:endParaRPr lang="en-US" sz="950" dirty="0"/>
+          </a:p>
+        </p:txBody>
+      </p:sp>
+      <p:sp>
+        <p:nvSpPr>
+          <p:cNvPr id="17" name="Shape 12"/>
+          <p:cNvSpPr/>
+          <p:nvPr/>
+        </p:nvSpPr>
+        <p:spPr>
+          <a:xfrm>
+            <a:off x="9052560" y="2560320"/>
+            <a:ext cx="457200" cy="457200"/>
+          </a:xfrm>
+          <a:prstGeom prst="ellipse">
+            <a:avLst/>
+          </a:prstGeom>
+          <a:solidFill>
+            <a:srgbClr val="6E9B57"/>
+          </a:solidFill>
+          <a:ln/>
+        </p:spPr>
+        <p:txBody>
+          <a:bodyPr/>
+          <a:lstStyle/>
+          <a:p>
+            <a:endParaRPr lang="it-IT"/>
+          </a:p>
+        </p:txBody>
+      </p:sp>
+      <p:pic>
+        <p:nvPicPr>
+          <p:cNvPr id="18" name="Image 3" descr="/private/tmp/claude-501/-Users-gianmarcovellotti-Desktop-LM-1-anno-IoT-PomodorIA/d58fc5f1-3fb5-4f2f-a56b-ba8bb07e0c51/scratchpad/pptx/icons/sun_white.png"/>
+          <p:cNvPicPr>
+            <a:picLocks noChangeAspect="1"/>
+          </p:cNvPicPr>
+          <p:nvPr/>
+        </p:nvPicPr>
+        <p:blipFill>
+          <a:blip r:embed="rId6"/>
+          <a:stretch>
+            <a:fillRect/>
+          </a:stretch>
+        </p:blipFill>
+        <p:spPr>
+          <a:xfrm>
+            <a:off x="9107424" y="2615184"/>
+            <a:ext cx="347472" cy="347472"/>
+          </a:xfrm>
+          <a:prstGeom prst="rect">
+            <a:avLst/>
+          </a:prstGeom>
+        </p:spPr>
+      </p:pic>
+      <p:sp>
+        <p:nvSpPr>
+          <p:cNvPr id="19" name="Text 13"/>
+          <p:cNvSpPr/>
+          <p:nvPr/>
+        </p:nvSpPr>
+        <p:spPr>
+          <a:xfrm>
+            <a:off x="8732520" y="3035808"/>
+            <a:ext cx="1097280" cy="457200"/>
+          </a:xfrm>
+          <a:prstGeom prst="rect">
+            <a:avLst/>
+          </a:prstGeom>
+          <a:noFill/>
+          <a:ln/>
+        </p:spPr>
+        <p:txBody>
+          <a:bodyPr wrap="square" lIns="0" tIns="0" rIns="0" bIns="0" rtlCol="0" anchor="ctr"/>
+          <a:lstStyle/>
+          <a:p>
+            <a:pPr marL="0" indent="0" algn="ctr">
+              <a:lnSpc>
+                <a:spcPct val="105000"/>
+              </a:lnSpc>
+              <a:buNone/>
+            </a:pPr>
+            <a:r>
+              <a:rPr lang="en-US" sz="950" dirty="0">
+                <a:solidFill>
+                  <a:srgbClr val="1F2A1F"/>
+                </a:solidFill>
+                <a:latin typeface="Calibri" pitchFamily="34" charset="0"/>
+                <a:ea typeface="Calibri" pitchFamily="34" charset="-122"/>
+                <a:cs typeface="Calibri" pitchFamily="34" charset="-120"/>
+              </a:rPr>
+              <a:t>Luminosità</a:t>
+            </a:r>
+            <a:endParaRPr lang="en-US" sz="950" dirty="0"/>
+          </a:p>
+        </p:txBody>
+      </p:sp>
+      <p:sp>
+        <p:nvSpPr>
+          <p:cNvPr id="20" name="Shape 14"/>
+          <p:cNvSpPr/>
+          <p:nvPr/>
+        </p:nvSpPr>
+        <p:spPr>
+          <a:xfrm>
+            <a:off x="10241280" y="2560320"/>
+            <a:ext cx="457200" cy="457200"/>
+          </a:xfrm>
+          <a:prstGeom prst="ellipse">
+            <a:avLst/>
+          </a:prstGeom>
+          <a:solidFill>
+            <a:srgbClr val="6E9B57"/>
+          </a:solidFill>
+          <a:ln/>
+        </p:spPr>
+        <p:txBody>
+          <a:bodyPr/>
+          <a:lstStyle/>
+          <a:p>
+            <a:endParaRPr lang="it-IT"/>
+          </a:p>
+        </p:txBody>
+      </p:sp>
+      <p:pic>
+        <p:nvPicPr>
+          <p:cNvPr id="21" name="Image 4" descr="/private/tmp/claude-501/-Users-gianmarcovellotti-Desktop-LM-1-anno-IoT-PomodorIA/d58fc5f1-3fb5-4f2f-a56b-ba8bb07e0c51/scratchpad/pptx/icons/wind_white.png"/>
+          <p:cNvPicPr>
+            <a:picLocks noChangeAspect="1"/>
+          </p:cNvPicPr>
+          <p:nvPr/>
+        </p:nvPicPr>
+        <p:blipFill>
+          <a:blip r:embed="rId7"/>
+          <a:stretch>
+            <a:fillRect/>
+          </a:stretch>
+        </p:blipFill>
+        <p:spPr>
+          <a:xfrm>
             <a:off x="10296144" y="2615184"/>
             <a:ext cx="347472" cy="347472"/>
           </a:xfrm>
@@ -6663,7 +6710,7 @@
           <a:bodyPr wrap="square" lIns="0" tIns="0" rIns="0" bIns="0" rtlCol="0" anchor="ctr"/>
           <a:lstStyle/>
           <a:p>
-            <a:pPr algn="ctr" indent="0" marL="0">
+            <a:pPr marL="0" indent="0" algn="ctr">
               <a:lnSpc>
                 <a:spcPct val="105000"/>
               </a:lnSpc>
@@ -6710,6 +6757,13 @@
             <a:prstDash val="solid"/>
           </a:ln>
         </p:spPr>
+        <p:txBody>
+          <a:bodyPr/>
+          <a:lstStyle/>
+          <a:p>
+            <a:endParaRPr lang="it-IT"/>
+          </a:p>
+        </p:txBody>
       </p:sp>
       <p:sp>
         <p:nvSpPr>
@@ -6732,7 +6786,7 @@
           <a:bodyPr wrap="square" lIns="0" tIns="0" rIns="0" bIns="0" rtlCol="0" anchor="ctr"/>
           <a:lstStyle/>
           <a:p>
-            <a:pPr indent="0" marL="0">
+            <a:pPr marL="0" indent="0">
               <a:buNone/>
             </a:pPr>
             <a:r>
@@ -6771,7 +6825,7 @@
           <a:bodyPr wrap="square" lIns="0" tIns="0" rIns="0" bIns="0" rtlCol="0" anchor="ctr"/>
           <a:lstStyle/>
           <a:p>
-            <a:pPr indent="0" marL="0">
+            <a:pPr marL="0" indent="0">
               <a:lnSpc>
                 <a:spcPct val="128000"/>
               </a:lnSpc>
@@ -6813,7 +6867,7 @@
           <a:bodyPr wrap="square" lIns="0" tIns="0" rIns="0" bIns="0" rtlCol="0" anchor="ctr"/>
           <a:lstStyle/>
           <a:p>
-            <a:pPr algn="r" indent="0" marL="0">
+            <a:pPr marL="0" indent="0" algn="r">
               <a:buNone/>
             </a:pPr>
             <a:r>
@@ -6847,6 +6901,7 @@
         <a:solidFill>
           <a:srgbClr val="FFFFFF"/>
         </a:solidFill>
+        <a:effectLst/>
       </p:bgPr>
     </p:bg>
     <p:spTree>
@@ -6884,11 +6939,11 @@
           <a:bodyPr wrap="square" lIns="0" tIns="0" rIns="0" bIns="0" rtlCol="0" anchor="ctr"/>
           <a:lstStyle/>
           <a:p>
-            <a:pPr indent="0" marL="0">
-              <a:buNone/>
-            </a:pPr>
-            <a:r>
-              <a:rPr lang="en-US" sz="1300" b="1" spc="200" kern="0" dirty="0">
+            <a:pPr marL="0" indent="0">
+              <a:buNone/>
+            </a:pPr>
+            <a:r>
+              <a:rPr lang="en-US" sz="1300" b="1" kern="0" spc="200" dirty="0">
                 <a:solidFill>
                   <a:srgbClr val="C0392B"/>
                 </a:solidFill>
@@ -6923,7 +6978,7 @@
           <a:bodyPr wrap="square" lIns="0" tIns="0" rIns="0" bIns="0" rtlCol="0" anchor="ctr"/>
           <a:lstStyle/>
           <a:p>
-            <a:pPr indent="0" marL="0">
+            <a:pPr marL="0" indent="0">
               <a:buNone/>
             </a:pPr>
             <a:r>
@@ -6960,6 +7015,13 @@
           </a:solidFill>
           <a:ln/>
         </p:spPr>
+        <p:txBody>
+          <a:bodyPr/>
+          <a:lstStyle/>
+          <a:p>
+            <a:endParaRPr lang="it-IT"/>
+          </a:p>
+        </p:txBody>
       </p:sp>
       <p:sp>
         <p:nvSpPr>
@@ -6982,7 +7044,7 @@
           <a:bodyPr wrap="square" lIns="0" tIns="0" rIns="0" bIns="0" rtlCol="0" anchor="ctr"/>
           <a:lstStyle/>
           <a:p>
-            <a:pPr indent="0" marL="0">
+            <a:pPr marL="0" indent="0">
               <a:buNone/>
             </a:pPr>
             <a:r>
@@ -7021,7 +7083,7 @@
           <a:bodyPr wrap="square" lIns="0" tIns="0" rIns="0" bIns="0" rtlCol="0" anchor="ctr"/>
           <a:lstStyle/>
           <a:p>
-            <a:pPr indent="0" marL="0">
+            <a:pPr marL="0" indent="0">
               <a:lnSpc>
                 <a:spcPct val="122000"/>
               </a:lnSpc>
@@ -7061,6 +7123,13 @@
           </a:solidFill>
           <a:ln/>
         </p:spPr>
+        <p:txBody>
+          <a:bodyPr/>
+          <a:lstStyle/>
+          <a:p>
+            <a:endParaRPr lang="it-IT"/>
+          </a:p>
+        </p:txBody>
       </p:sp>
       <p:sp>
         <p:nvSpPr>
@@ -7083,7 +7152,7 @@
           <a:bodyPr wrap="square" lIns="0" tIns="0" rIns="0" bIns="0" rtlCol="0" anchor="ctr"/>
           <a:lstStyle/>
           <a:p>
-            <a:pPr indent="0" marL="0">
+            <a:pPr marL="0" indent="0">
               <a:buNone/>
             </a:pPr>
             <a:r>
@@ -7122,7 +7191,7 @@
           <a:bodyPr wrap="square" lIns="0" tIns="0" rIns="0" bIns="0" rtlCol="0" anchor="ctr"/>
           <a:lstStyle/>
           <a:p>
-            <a:pPr indent="0" marL="0">
+            <a:pPr marL="0" indent="0">
               <a:lnSpc>
                 <a:spcPct val="122000"/>
               </a:lnSpc>
@@ -7162,6 +7231,13 @@
           </a:solidFill>
           <a:ln/>
         </p:spPr>
+        <p:txBody>
+          <a:bodyPr/>
+          <a:lstStyle/>
+          <a:p>
+            <a:endParaRPr lang="it-IT"/>
+          </a:p>
+        </p:txBody>
       </p:sp>
       <p:sp>
         <p:nvSpPr>
@@ -7184,7 +7260,7 @@
           <a:bodyPr wrap="square" lIns="0" tIns="0" rIns="0" bIns="0" rtlCol="0" anchor="ctr"/>
           <a:lstStyle/>
           <a:p>
-            <a:pPr indent="0" marL="0">
+            <a:pPr marL="0" indent="0">
               <a:buNone/>
             </a:pPr>
             <a:r>
@@ -7223,7 +7299,7 @@
           <a:bodyPr wrap="square" lIns="0" tIns="0" rIns="0" bIns="0" rtlCol="0" anchor="ctr"/>
           <a:lstStyle/>
           <a:p>
-            <a:pPr indent="0" marL="0">
+            <a:pPr marL="0" indent="0">
               <a:lnSpc>
                 <a:spcPct val="122000"/>
               </a:lnSpc>
@@ -7263,6 +7339,13 @@
           </a:solidFill>
           <a:ln/>
         </p:spPr>
+        <p:txBody>
+          <a:bodyPr/>
+          <a:lstStyle/>
+          <a:p>
+            <a:endParaRPr lang="it-IT"/>
+          </a:p>
+        </p:txBody>
       </p:sp>
       <p:sp>
         <p:nvSpPr>
@@ -7285,7 +7368,7 @@
           <a:bodyPr wrap="square" lIns="0" tIns="0" rIns="0" bIns="0" rtlCol="0" anchor="ctr"/>
           <a:lstStyle/>
           <a:p>
-            <a:pPr indent="0" marL="0">
+            <a:pPr marL="0" indent="0">
               <a:buNone/>
             </a:pPr>
             <a:r>
@@ -7324,7 +7407,7 @@
           <a:bodyPr wrap="square" lIns="0" tIns="0" rIns="0" bIns="0" rtlCol="0" anchor="ctr"/>
           <a:lstStyle/>
           <a:p>
-            <a:pPr indent="0" marL="0">
+            <a:pPr marL="0" indent="0">
               <a:lnSpc>
                 <a:spcPct val="122000"/>
               </a:lnSpc>
@@ -7366,6 +7449,13 @@
           </a:solidFill>
           <a:ln/>
         </p:spPr>
+        <p:txBody>
+          <a:bodyPr/>
+          <a:lstStyle/>
+          <a:p>
+            <a:endParaRPr lang="it-IT"/>
+          </a:p>
+        </p:txBody>
       </p:sp>
       <p:sp>
         <p:nvSpPr>
@@ -7386,17 +7476,24 @@
           </a:solidFill>
           <a:ln/>
         </p:spPr>
+        <p:txBody>
+          <a:bodyPr/>
+          <a:lstStyle/>
+          <a:p>
+            <a:endParaRPr lang="it-IT"/>
+          </a:p>
+        </p:txBody>
       </p:sp>
       <p:pic>
         <p:nvPicPr>
-          <p:cNvPr id="18" name="Image 0" descr="/private/tmp/claude-501/-Users-gianmarcovellotti-Desktop-LM-1-anno-IoT-PomodorIA/d58fc5f1-3fb5-4f2f-a56b-ba8bb07e0c51/scratchpad/pptx/icons/cpu_white.png">    </p:cNvPr>
+          <p:cNvPr id="18" name="Image 0" descr="/private/tmp/claude-501/-Users-gianmarcovellotti-Desktop-LM-1-anno-IoT-PomodorIA/d58fc5f1-3fb5-4f2f-a56b-ba8bb07e0c51/scratchpad/pptx/icons/cpu_white.png"/>
           <p:cNvPicPr>
             <a:picLocks noChangeAspect="1"/>
           </p:cNvPicPr>
           <p:nvPr/>
         </p:nvPicPr>
         <p:blipFill>
-          <a:blip r:embed="rId1"/>
+          <a:blip r:embed="rId3"/>
           <a:stretch>
             <a:fillRect/>
           </a:stretch>
@@ -7432,7 +7529,7 @@
           <a:bodyPr wrap="square" lIns="0" tIns="0" rIns="0" bIns="0" rtlCol="0" anchor="ctr"/>
           <a:lstStyle/>
           <a:p>
-            <a:pPr algn="ctr" indent="0" marL="0">
+            <a:pPr marL="0" indent="0" algn="ctr">
               <a:buNone/>
             </a:pPr>
             <a:r>
@@ -7471,6 +7568,13 @@
           </a:solidFill>
           <a:ln/>
         </p:spPr>
+        <p:txBody>
+          <a:bodyPr/>
+          <a:lstStyle/>
+          <a:p>
+            <a:endParaRPr lang="it-IT"/>
+          </a:p>
+        </p:txBody>
       </p:sp>
       <p:sp>
         <p:nvSpPr>
@@ -7493,7 +7597,7 @@
           <a:bodyPr wrap="square" lIns="0" tIns="0" rIns="0" bIns="0" rtlCol="0" anchor="ctr"/>
           <a:lstStyle/>
           <a:p>
-            <a:pPr algn="ctr" indent="0" marL="0">
+            <a:pPr marL="0" indent="0" algn="ctr">
               <a:buNone/>
             </a:pPr>
             <a:r>
@@ -7532,7 +7636,7 @@
           <a:bodyPr wrap="square" lIns="0" tIns="0" rIns="0" bIns="0" rtlCol="0" anchor="ctr"/>
           <a:lstStyle/>
           <a:p>
-            <a:pPr algn="ctr" indent="0" marL="0">
+            <a:pPr marL="0" indent="0" algn="ctr">
               <a:buNone/>
             </a:pPr>
             <a:r>
@@ -7571,6 +7675,13 @@
           </a:solidFill>
           <a:ln/>
         </p:spPr>
+        <p:txBody>
+          <a:bodyPr/>
+          <a:lstStyle/>
+          <a:p>
+            <a:endParaRPr lang="it-IT"/>
+          </a:p>
+        </p:txBody>
       </p:sp>
       <p:sp>
         <p:nvSpPr>
@@ -7593,7 +7704,7 @@
           <a:bodyPr wrap="square" lIns="0" tIns="0" rIns="0" bIns="0" rtlCol="0" anchor="ctr"/>
           <a:lstStyle/>
           <a:p>
-            <a:pPr algn="ctr" indent="0" marL="0">
+            <a:pPr marL="0" indent="0" algn="ctr">
               <a:buNone/>
             </a:pPr>
             <a:r>
@@ -7632,7 +7743,7 @@
           <a:bodyPr wrap="square" lIns="0" tIns="0" rIns="0" bIns="0" rtlCol="0" anchor="ctr"/>
           <a:lstStyle/>
           <a:p>
-            <a:pPr algn="ctr" indent="0" marL="0">
+            <a:pPr marL="0" indent="0" algn="ctr">
               <a:buNone/>
             </a:pPr>
             <a:r>
@@ -7671,6 +7782,13 @@
           </a:solidFill>
           <a:ln/>
         </p:spPr>
+        <p:txBody>
+          <a:bodyPr/>
+          <a:lstStyle/>
+          <a:p>
+            <a:endParaRPr lang="it-IT"/>
+          </a:p>
+        </p:txBody>
       </p:sp>
       <p:sp>
         <p:nvSpPr>
@@ -7693,7 +7811,7 @@
           <a:bodyPr wrap="square" lIns="0" tIns="0" rIns="0" bIns="0" rtlCol="0" anchor="ctr"/>
           <a:lstStyle/>
           <a:p>
-            <a:pPr algn="ctr" indent="0" marL="0">
+            <a:pPr marL="0" indent="0" algn="ctr">
               <a:buNone/>
             </a:pPr>
             <a:r>
@@ -7732,7 +7850,7 @@
           <a:bodyPr wrap="square" lIns="0" tIns="0" rIns="0" bIns="0" rtlCol="0" anchor="ctr"/>
           <a:lstStyle/>
           <a:p>
-            <a:pPr algn="ctr" indent="0" marL="0">
+            <a:pPr marL="0" indent="0" algn="ctr">
               <a:buNone/>
             </a:pPr>
             <a:r>
@@ -7771,6 +7889,13 @@
           </a:solidFill>
           <a:ln/>
         </p:spPr>
+        <p:txBody>
+          <a:bodyPr/>
+          <a:lstStyle/>
+          <a:p>
+            <a:endParaRPr lang="it-IT"/>
+          </a:p>
+        </p:txBody>
       </p:sp>
       <p:sp>
         <p:nvSpPr>
@@ -7793,7 +7918,7 @@
           <a:bodyPr wrap="square" lIns="0" tIns="0" rIns="0" bIns="0" rtlCol="0" anchor="ctr"/>
           <a:lstStyle/>
           <a:p>
-            <a:pPr algn="ctr" indent="0" marL="0">
+            <a:pPr marL="0" indent="0" algn="ctr">
               <a:buNone/>
             </a:pPr>
             <a:r>
@@ -7832,7 +7957,7 @@
           <a:bodyPr wrap="square" lIns="0" tIns="0" rIns="0" bIns="0" rtlCol="0" anchor="ctr"/>
           <a:lstStyle/>
           <a:p>
-            <a:pPr algn="ctr" indent="0" marL="0">
+            <a:pPr marL="0" indent="0" algn="ctr">
               <a:buNone/>
             </a:pPr>
             <a:r>
@@ -7871,6 +7996,13 @@
           </a:solidFill>
           <a:ln/>
         </p:spPr>
+        <p:txBody>
+          <a:bodyPr/>
+          <a:lstStyle/>
+          <a:p>
+            <a:endParaRPr lang="it-IT"/>
+          </a:p>
+        </p:txBody>
       </p:sp>
       <p:sp>
         <p:nvSpPr>
@@ -7893,7 +8025,7 @@
           <a:bodyPr wrap="square" lIns="0" tIns="0" rIns="0" bIns="0" rtlCol="0" anchor="ctr"/>
           <a:lstStyle/>
           <a:p>
-            <a:pPr algn="ctr" indent="0" marL="0">
+            <a:pPr marL="0" indent="0" algn="ctr">
               <a:buNone/>
             </a:pPr>
             <a:r>
@@ -7932,7 +8064,7 @@
           <a:bodyPr wrap="square" lIns="0" tIns="0" rIns="0" bIns="0" rtlCol="0" anchor="ctr"/>
           <a:lstStyle/>
           <a:p>
-            <a:pPr algn="r" indent="0" marL="0">
+            <a:pPr marL="0" indent="0" algn="r">
               <a:buNone/>
             </a:pPr>
             <a:r>
@@ -7966,6 +8098,7 @@
         <a:solidFill>
           <a:srgbClr val="FFFFFF"/>
         </a:solidFill>
+        <a:effectLst/>
       </p:bgPr>
     </p:bg>
     <p:spTree>
@@ -8003,11 +8136,11 @@
           <a:bodyPr wrap="square" lIns="0" tIns="0" rIns="0" bIns="0" rtlCol="0" anchor="ctr"/>
           <a:lstStyle/>
           <a:p>
-            <a:pPr indent="0" marL="0">
-              <a:buNone/>
-            </a:pPr>
-            <a:r>
-              <a:rPr lang="en-US" sz="1300" b="1" spc="200" kern="0" dirty="0">
+            <a:pPr marL="0" indent="0">
+              <a:buNone/>
+            </a:pPr>
+            <a:r>
+              <a:rPr lang="en-US" sz="1300" b="1" kern="0" spc="200" dirty="0">
                 <a:solidFill>
                   <a:srgbClr val="C0392B"/>
                 </a:solidFill>
@@ -8042,7 +8175,7 @@
           <a:bodyPr wrap="square" lIns="0" tIns="0" rIns="0" bIns="0" rtlCol="0" anchor="ctr"/>
           <a:lstStyle/>
           <a:p>
-            <a:pPr indent="0" marL="0">
+            <a:pPr marL="0" indent="0">
               <a:buNone/>
             </a:pPr>
             <a:r>
@@ -8081,6 +8214,13 @@
           </a:solidFill>
           <a:ln/>
         </p:spPr>
+        <p:txBody>
+          <a:bodyPr/>
+          <a:lstStyle/>
+          <a:p>
+            <a:endParaRPr lang="it-IT"/>
+          </a:p>
+        </p:txBody>
       </p:sp>
       <p:sp>
         <p:nvSpPr>
@@ -8101,6 +8241,13 @@
           </a:solidFill>
           <a:ln/>
         </p:spPr>
+        <p:txBody>
+          <a:bodyPr/>
+          <a:lstStyle/>
+          <a:p>
+            <a:endParaRPr lang="it-IT"/>
+          </a:p>
+        </p:txBody>
       </p:sp>
       <p:sp>
         <p:nvSpPr>
@@ -8123,7 +8270,7 @@
           <a:bodyPr wrap="square" lIns="0" tIns="0" rIns="0" bIns="0" rtlCol="0" anchor="ctr"/>
           <a:lstStyle/>
           <a:p>
-            <a:pPr algn="ctr" indent="0" marL="0">
+            <a:pPr marL="0" indent="0" algn="ctr">
               <a:buNone/>
             </a:pPr>
             <a:r>
@@ -8162,7 +8309,7 @@
           <a:bodyPr wrap="square" lIns="0" tIns="0" rIns="0" bIns="0" rtlCol="0" anchor="ctr"/>
           <a:lstStyle/>
           <a:p>
-            <a:pPr indent="0" marL="0">
+            <a:pPr marL="0" indent="0">
               <a:buNone/>
             </a:pPr>
             <a:r>
@@ -8201,6 +8348,13 @@
           </a:solidFill>
           <a:ln/>
         </p:spPr>
+        <p:txBody>
+          <a:bodyPr/>
+          <a:lstStyle/>
+          <a:p>
+            <a:endParaRPr lang="it-IT"/>
+          </a:p>
+        </p:txBody>
       </p:sp>
       <p:sp>
         <p:nvSpPr>
@@ -8221,6 +8375,13 @@
           </a:solidFill>
           <a:ln/>
         </p:spPr>
+        <p:txBody>
+          <a:bodyPr/>
+          <a:lstStyle/>
+          <a:p>
+            <a:endParaRPr lang="it-IT"/>
+          </a:p>
+        </p:txBody>
       </p:sp>
       <p:sp>
         <p:nvSpPr>
@@ -8243,7 +8404,7 @@
           <a:bodyPr wrap="square" lIns="0" tIns="0" rIns="0" bIns="0" rtlCol="0" anchor="ctr"/>
           <a:lstStyle/>
           <a:p>
-            <a:pPr algn="ctr" indent="0" marL="0">
+            <a:pPr marL="0" indent="0" algn="ctr">
               <a:buNone/>
             </a:pPr>
             <a:r>
@@ -8282,7 +8443,7 @@
           <a:bodyPr wrap="square" lIns="0" tIns="0" rIns="0" bIns="0" rtlCol="0" anchor="ctr"/>
           <a:lstStyle/>
           <a:p>
-            <a:pPr indent="0" marL="0">
+            <a:pPr marL="0" indent="0">
               <a:buNone/>
             </a:pPr>
             <a:r>
@@ -8321,6 +8482,13 @@
           </a:solidFill>
           <a:ln/>
         </p:spPr>
+        <p:txBody>
+          <a:bodyPr/>
+          <a:lstStyle/>
+          <a:p>
+            <a:endParaRPr lang="it-IT"/>
+          </a:p>
+        </p:txBody>
       </p:sp>
       <p:sp>
         <p:nvSpPr>
@@ -8341,6 +8509,13 @@
           </a:solidFill>
           <a:ln/>
         </p:spPr>
+        <p:txBody>
+          <a:bodyPr/>
+          <a:lstStyle/>
+          <a:p>
+            <a:endParaRPr lang="it-IT"/>
+          </a:p>
+        </p:txBody>
       </p:sp>
       <p:sp>
         <p:nvSpPr>
@@ -8363,7 +8538,7 @@
           <a:bodyPr wrap="square" lIns="0" tIns="0" rIns="0" bIns="0" rtlCol="0" anchor="ctr"/>
           <a:lstStyle/>
           <a:p>
-            <a:pPr algn="ctr" indent="0" marL="0">
+            <a:pPr marL="0" indent="0" algn="ctr">
               <a:buNone/>
             </a:pPr>
             <a:r>
@@ -8402,7 +8577,7 @@
           <a:bodyPr wrap="square" lIns="0" tIns="0" rIns="0" bIns="0" rtlCol="0" anchor="ctr"/>
           <a:lstStyle/>
           <a:p>
-            <a:pPr indent="0" marL="0">
+            <a:pPr marL="0" indent="0">
               <a:buNone/>
             </a:pPr>
             <a:r>
@@ -8441,6 +8616,13 @@
           </a:solidFill>
           <a:ln/>
         </p:spPr>
+        <p:txBody>
+          <a:bodyPr/>
+          <a:lstStyle/>
+          <a:p>
+            <a:endParaRPr lang="it-IT"/>
+          </a:p>
+        </p:txBody>
       </p:sp>
       <p:sp>
         <p:nvSpPr>
@@ -8461,6 +8643,13 @@
           </a:solidFill>
           <a:ln/>
         </p:spPr>
+        <p:txBody>
+          <a:bodyPr/>
+          <a:lstStyle/>
+          <a:p>
+            <a:endParaRPr lang="it-IT"/>
+          </a:p>
+        </p:txBody>
       </p:sp>
       <p:sp>
         <p:nvSpPr>
@@ -8483,7 +8672,7 @@
           <a:bodyPr wrap="square" lIns="0" tIns="0" rIns="0" bIns="0" rtlCol="0" anchor="ctr"/>
           <a:lstStyle/>
           <a:p>
-            <a:pPr algn="ctr" indent="0" marL="0">
+            <a:pPr marL="0" indent="0" algn="ctr">
               <a:buNone/>
             </a:pPr>
             <a:r>
@@ -8522,7 +8711,7 @@
           <a:bodyPr wrap="square" lIns="0" tIns="0" rIns="0" bIns="0" rtlCol="0" anchor="ctr"/>
           <a:lstStyle/>
           <a:p>
-            <a:pPr indent="0" marL="0">
+            <a:pPr marL="0" indent="0">
               <a:buNone/>
             </a:pPr>
             <a:r>
@@ -8561,7 +8750,7 @@
           <a:bodyPr wrap="square" lIns="0" tIns="0" rIns="0" bIns="0" rtlCol="0" anchor="ctr"/>
           <a:lstStyle/>
           <a:p>
-            <a:pPr indent="0" marL="0">
+            <a:pPr marL="0" indent="0">
               <a:buNone/>
             </a:pPr>
             <a:r>
@@ -8598,6 +8787,13 @@
           </a:solidFill>
           <a:ln/>
         </p:spPr>
+        <p:txBody>
+          <a:bodyPr/>
+          <a:lstStyle/>
+          <a:p>
+            <a:endParaRPr lang="it-IT"/>
+          </a:p>
+        </p:txBody>
       </p:sp>
       <p:sp>
         <p:nvSpPr>
@@ -8620,7 +8816,7 @@
           <a:bodyPr wrap="square" lIns="0" tIns="0" rIns="0" bIns="0" rtlCol="0" anchor="ctr"/>
           <a:lstStyle/>
           <a:p>
-            <a:pPr algn="ctr" indent="0" marL="0">
+            <a:pPr marL="0" indent="0" algn="ctr">
               <a:buNone/>
             </a:pPr>
             <a:r>
@@ -8659,7 +8855,7 @@
           <a:bodyPr wrap="square" lIns="0" tIns="0" rIns="0" bIns="0" rtlCol="0" anchor="ctr"/>
           <a:lstStyle/>
           <a:p>
-            <a:pPr indent="0" marL="0">
+            <a:pPr marL="0" indent="0">
               <a:buNone/>
             </a:pPr>
             <a:r>
@@ -8696,6 +8892,13 @@
           </a:solidFill>
           <a:ln/>
         </p:spPr>
+        <p:txBody>
+          <a:bodyPr/>
+          <a:lstStyle/>
+          <a:p>
+            <a:endParaRPr lang="it-IT"/>
+          </a:p>
+        </p:txBody>
       </p:sp>
       <p:sp>
         <p:nvSpPr>
@@ -8718,7 +8921,7 @@
           <a:bodyPr wrap="square" lIns="0" tIns="0" rIns="0" bIns="0" rtlCol="0" anchor="ctr"/>
           <a:lstStyle/>
           <a:p>
-            <a:pPr algn="ctr" indent="0" marL="0">
+            <a:pPr marL="0" indent="0" algn="ctr">
               <a:buNone/>
             </a:pPr>
             <a:r>
@@ -8757,7 +8960,7 @@
           <a:bodyPr wrap="square" lIns="0" tIns="0" rIns="0" bIns="0" rtlCol="0" anchor="ctr"/>
           <a:lstStyle/>
           <a:p>
-            <a:pPr indent="0" marL="0">
+            <a:pPr marL="0" indent="0">
               <a:buNone/>
             </a:pPr>
             <a:r>
@@ -8794,6 +8997,13 @@
           </a:solidFill>
           <a:ln/>
         </p:spPr>
+        <p:txBody>
+          <a:bodyPr/>
+          <a:lstStyle/>
+          <a:p>
+            <a:endParaRPr lang="it-IT"/>
+          </a:p>
+        </p:txBody>
       </p:sp>
       <p:sp>
         <p:nvSpPr>
@@ -8816,7 +9026,7 @@
           <a:bodyPr wrap="square" lIns="0" tIns="0" rIns="0" bIns="0" rtlCol="0" anchor="ctr"/>
           <a:lstStyle/>
           <a:p>
-            <a:pPr algn="ctr" indent="0" marL="0">
+            <a:pPr marL="0" indent="0" algn="ctr">
               <a:buNone/>
             </a:pPr>
             <a:r>
@@ -8855,7 +9065,7 @@
           <a:bodyPr wrap="square" lIns="0" tIns="0" rIns="0" bIns="0" rtlCol="0" anchor="ctr"/>
           <a:lstStyle/>
           <a:p>
-            <a:pPr indent="0" marL="0">
+            <a:pPr marL="0" indent="0">
               <a:buNone/>
             </a:pPr>
             <a:r>
@@ -8892,6 +9102,13 @@
           </a:solidFill>
           <a:ln/>
         </p:spPr>
+        <p:txBody>
+          <a:bodyPr/>
+          <a:lstStyle/>
+          <a:p>
+            <a:endParaRPr lang="it-IT"/>
+          </a:p>
+        </p:txBody>
       </p:sp>
       <p:sp>
         <p:nvSpPr>
@@ -8914,7 +9131,7 @@
           <a:bodyPr wrap="square" lIns="0" tIns="0" rIns="0" bIns="0" rtlCol="0" anchor="ctr"/>
           <a:lstStyle/>
           <a:p>
-            <a:pPr algn="ctr" indent="0" marL="0">
+            <a:pPr marL="0" indent="0" algn="ctr">
               <a:buNone/>
             </a:pPr>
             <a:r>
@@ -8953,7 +9170,7 @@
           <a:bodyPr wrap="square" lIns="0" tIns="0" rIns="0" bIns="0" rtlCol="0" anchor="ctr"/>
           <a:lstStyle/>
           <a:p>
-            <a:pPr indent="0" marL="0">
+            <a:pPr marL="0" indent="0">
               <a:buNone/>
             </a:pPr>
             <a:r>
@@ -8990,6 +9207,13 @@
           </a:solidFill>
           <a:ln/>
         </p:spPr>
+        <p:txBody>
+          <a:bodyPr/>
+          <a:lstStyle/>
+          <a:p>
+            <a:endParaRPr lang="it-IT"/>
+          </a:p>
+        </p:txBody>
       </p:sp>
       <p:sp>
         <p:nvSpPr>
@@ -9012,7 +9236,7 @@
           <a:bodyPr wrap="square" lIns="0" tIns="0" rIns="0" bIns="0" rtlCol="0" anchor="ctr"/>
           <a:lstStyle/>
           <a:p>
-            <a:pPr algn="ctr" indent="0" marL="0">
+            <a:pPr marL="0" indent="0" algn="ctr">
               <a:buNone/>
             </a:pPr>
             <a:r>
@@ -9051,7 +9275,7 @@
           <a:bodyPr wrap="square" lIns="0" tIns="0" rIns="0" bIns="0" rtlCol="0" anchor="ctr"/>
           <a:lstStyle/>
           <a:p>
-            <a:pPr indent="0" marL="0">
+            <a:pPr marL="0" indent="0">
               <a:buNone/>
             </a:pPr>
             <a:r>
@@ -9088,6 +9312,13 @@
           </a:solidFill>
           <a:ln/>
         </p:spPr>
+        <p:txBody>
+          <a:bodyPr/>
+          <a:lstStyle/>
+          <a:p>
+            <a:endParaRPr lang="it-IT"/>
+          </a:p>
+        </p:txBody>
       </p:sp>
       <p:sp>
         <p:nvSpPr>
@@ -9110,7 +9341,7 @@
           <a:bodyPr wrap="square" lIns="0" tIns="0" rIns="0" bIns="0" rtlCol="0" anchor="ctr"/>
           <a:lstStyle/>
           <a:p>
-            <a:pPr algn="ctr" indent="0" marL="0">
+            <a:pPr marL="0" indent="0" algn="ctr">
               <a:buNone/>
             </a:pPr>
             <a:r>
@@ -9149,7 +9380,7 @@
           <a:bodyPr wrap="square" lIns="0" tIns="0" rIns="0" bIns="0" rtlCol="0" anchor="ctr"/>
           <a:lstStyle/>
           <a:p>
-            <a:pPr indent="0" marL="0">
+            <a:pPr marL="0" indent="0">
               <a:buNone/>
             </a:pPr>
             <a:r>
@@ -9186,6 +9417,13 @@
           </a:solidFill>
           <a:ln/>
         </p:spPr>
+        <p:txBody>
+          <a:bodyPr/>
+          <a:lstStyle/>
+          <a:p>
+            <a:endParaRPr lang="it-IT"/>
+          </a:p>
+        </p:txBody>
       </p:sp>
       <p:sp>
         <p:nvSpPr>
@@ -9208,7 +9446,7 @@
           <a:bodyPr wrap="square" lIns="0" tIns="0" rIns="0" bIns="0" rtlCol="0" anchor="ctr"/>
           <a:lstStyle/>
           <a:p>
-            <a:pPr algn="ctr" indent="0" marL="0">
+            <a:pPr marL="0" indent="0" algn="ctr">
               <a:buNone/>
             </a:pPr>
             <a:r>
@@ -9247,7 +9485,7 @@
           <a:bodyPr wrap="square" lIns="0" tIns="0" rIns="0" bIns="0" rtlCol="0" anchor="ctr"/>
           <a:lstStyle/>
           <a:p>
-            <a:pPr indent="0" marL="0">
+            <a:pPr marL="0" indent="0">
               <a:buNone/>
             </a:pPr>
             <a:r>
@@ -9284,6 +9522,13 @@
           </a:solidFill>
           <a:ln/>
         </p:spPr>
+        <p:txBody>
+          <a:bodyPr/>
+          <a:lstStyle/>
+          <a:p>
+            <a:endParaRPr lang="it-IT"/>
+          </a:p>
+        </p:txBody>
       </p:sp>
       <p:sp>
         <p:nvSpPr>
@@ -9306,7 +9551,7 @@
           <a:bodyPr wrap="square" lIns="0" tIns="0" rIns="0" bIns="0" rtlCol="0" anchor="ctr"/>
           <a:lstStyle/>
           <a:p>
-            <a:pPr algn="ctr" indent="0" marL="0">
+            <a:pPr marL="0" indent="0" algn="ctr">
               <a:buNone/>
             </a:pPr>
             <a:r>
@@ -9345,7 +9590,7 @@
           <a:bodyPr wrap="square" lIns="0" tIns="0" rIns="0" bIns="0" rtlCol="0" anchor="ctr"/>
           <a:lstStyle/>
           <a:p>
-            <a:pPr indent="0" marL="0">
+            <a:pPr marL="0" indent="0">
               <a:buNone/>
             </a:pPr>
             <a:r>
@@ -9384,6 +9629,13 @@
           </a:solidFill>
           <a:ln/>
         </p:spPr>
+        <p:txBody>
+          <a:bodyPr/>
+          <a:lstStyle/>
+          <a:p>
+            <a:endParaRPr lang="it-IT"/>
+          </a:p>
+        </p:txBody>
       </p:sp>
       <p:sp>
         <p:nvSpPr>
@@ -9406,7 +9658,7 @@
           <a:bodyPr wrap="square" lIns="0" tIns="0" rIns="0" bIns="0" rtlCol="0" anchor="ctr"/>
           <a:lstStyle/>
           <a:p>
-            <a:pPr indent="0" marL="0">
+            <a:pPr marL="0" indent="0">
               <a:lnSpc>
                 <a:spcPct val="130000"/>
               </a:lnSpc>
@@ -9426,7 +9678,7 @@
             <a:endParaRPr lang="en-US" sz="1250" dirty="0"/>
           </a:p>
           <a:p>
-            <a:pPr indent="0" marL="0">
+            <a:pPr marL="0" indent="0">
               <a:lnSpc>
                 <a:spcPct val="130000"/>
               </a:lnSpc>
@@ -9468,7 +9720,7 @@
           <a:bodyPr wrap="square" lIns="0" tIns="0" rIns="0" bIns="0" rtlCol="0" anchor="ctr"/>
           <a:lstStyle/>
           <a:p>
-            <a:pPr algn="r" indent="0" marL="0">
+            <a:pPr marL="0" indent="0" algn="r">
               <a:buNone/>
             </a:pPr>
             <a:r>
@@ -9502,6 +9754,7 @@
         <a:solidFill>
           <a:srgbClr val="FFFFFF"/>
         </a:solidFill>
+        <a:effectLst/>
       </p:bgPr>
     </p:bg>
     <p:spTree>
@@ -9539,11 +9792,11 @@
           <a:bodyPr wrap="square" lIns="0" tIns="0" rIns="0" bIns="0" rtlCol="0" anchor="ctr"/>
           <a:lstStyle/>
           <a:p>
-            <a:pPr indent="0" marL="0">
-              <a:buNone/>
-            </a:pPr>
-            <a:r>
-              <a:rPr lang="en-US" sz="1300" b="1" spc="200" kern="0" dirty="0">
+            <a:pPr marL="0" indent="0">
+              <a:buNone/>
+            </a:pPr>
+            <a:r>
+              <a:rPr lang="en-US" sz="1300" b="1" kern="0" spc="200" dirty="0">
                 <a:solidFill>
                   <a:srgbClr val="C0392B"/>
                 </a:solidFill>
@@ -9551,7 +9804,7 @@
                 <a:ea typeface="Calibri" pitchFamily="34" charset="-122"/>
                 <a:cs typeface="Calibri" pitchFamily="34" charset="-120"/>
               </a:rPr>
-              <a:t>LIVELLO 1 &amp; 7 — ATTUATORI E COLLABORATION</a:t>
+              <a:t>LIVELLO 7 — COLLABORATION &amp; PROCESSES</a:t>
             </a:r>
             <a:endParaRPr lang="en-US" sz="1300" dirty="0"/>
           </a:p>
@@ -9578,7 +9831,7 @@
           <a:bodyPr wrap="square" lIns="0" tIns="0" rIns="0" bIns="0" rtlCol="0" anchor="ctr"/>
           <a:lstStyle/>
           <a:p>
-            <a:pPr indent="0" marL="0">
+            <a:pPr marL="0" indent="0">
               <a:buNone/>
             </a:pPr>
             <a:r>
@@ -9590,7 +9843,7 @@
                 <a:ea typeface="Cambria" pitchFamily="34" charset="-122"/>
                 <a:cs typeface="Cambria" pitchFamily="34" charset="-120"/>
               </a:rPr>
-              <a:t>Dalla decisione all'azione sul campo</a:t>
+              <a:t>Dalla decisione automatica alla persona</a:t>
             </a:r>
             <a:endParaRPr lang="en-US" sz="3200" dirty="0"/>
           </a:p>
@@ -9598,18 +9851,60 @@
       </p:sp>
       <p:sp>
         <p:nvSpPr>
-          <p:cNvPr id="4" name="Shape 2"/>
-          <p:cNvSpPr/>
-          <p:nvPr/>
-        </p:nvSpPr>
-        <p:spPr>
-          <a:xfrm>
-            <a:off x="548640" y="1874520"/>
-            <a:ext cx="2606040" cy="2743200"/>
+          <p:cNvPr id="4" name="Text 2"/>
+          <p:cNvSpPr/>
+          <p:nvPr/>
+        </p:nvSpPr>
+        <p:spPr>
+          <a:xfrm>
+            <a:off x="548640" y="1691640"/>
+            <a:ext cx="10881360" cy="594360"/>
+          </a:xfrm>
+          <a:prstGeom prst="rect">
+            <a:avLst/>
+          </a:prstGeom>
+          <a:noFill/>
+          <a:ln/>
+        </p:spPr>
+        <p:txBody>
+          <a:bodyPr wrap="square" lIns="0" tIns="0" rIns="0" bIns="0" rtlCol="0" anchor="ctr"/>
+          <a:lstStyle/>
+          <a:p>
+            <a:pPr marL="0" indent="0">
+              <a:lnSpc>
+                <a:spcPct val="125000"/>
+              </a:lnSpc>
+              <a:buNone/>
+            </a:pPr>
+            <a:r>
+              <a:rPr lang="en-US" sz="1450" dirty="0">
+                <a:solidFill>
+                  <a:srgbClr val="1F2A1F"/>
+                </a:solidFill>
+                <a:latin typeface="Calibri" pitchFamily="34" charset="0"/>
+                <a:ea typeface="Calibri" pitchFamily="34" charset="-122"/>
+                <a:cs typeface="Calibri" pitchFamily="34" charset="-120"/>
+              </a:rPr>
+              <a:t>Il Livello 7 dello stack IoTWF non aziona hardware: porta la decisione del sistema fino all'agricoltore, chiudendo il ciclo automazione↔persona quando serve un giudizio umano.</a:t>
+            </a:r>
+            <a:endParaRPr lang="en-US" sz="1450" dirty="0"/>
+          </a:p>
+        </p:txBody>
+      </p:sp>
+      <p:sp>
+        <p:nvSpPr>
+          <p:cNvPr id="5" name="Shape 3"/>
+          <p:cNvSpPr/>
+          <p:nvPr/>
+        </p:nvSpPr>
+        <p:spPr>
+          <a:xfrm>
+            <a:off x="548640" y="2514600"/>
+            <a:ext cx="5212080" cy="3566160"/>
           </a:xfrm>
           <a:prstGeom prst="roundRect">
             <a:avLst>
-              <a:gd name="adj" fmla="val 3509"/>
+              <a:gd name="adj" fmla="val 3077"/>
             </a:avLst>
           </a:prstGeom>
           <a:solidFill>
@@ -9617,324 +9912,44 @@
           </a:solidFill>
           <a:ln/>
         </p:spPr>
-      </p:sp>
-      <p:sp>
-        <p:nvSpPr>
-          <p:cNvPr id="5" name="Shape 3"/>
-          <p:cNvSpPr/>
-          <p:nvPr/>
-        </p:nvSpPr>
-        <p:spPr>
-          <a:xfrm>
-            <a:off x="1531620" y="2167128"/>
-            <a:ext cx="640080" cy="640080"/>
+        <p:txBody>
+          <a:bodyPr/>
+          <a:lstStyle/>
+          <a:p>
+            <a:endParaRPr lang="it-IT"/>
+          </a:p>
+        </p:txBody>
+      </p:sp>
+      <p:sp>
+        <p:nvSpPr>
+          <p:cNvPr id="6" name="Shape 4"/>
+          <p:cNvSpPr/>
+          <p:nvPr/>
+        </p:nvSpPr>
+        <p:spPr>
+          <a:xfrm>
+            <a:off x="868680" y="2788920"/>
+            <a:ext cx="594360" cy="594360"/>
           </a:xfrm>
           <a:prstGeom prst="ellipse">
             <a:avLst/>
           </a:prstGeom>
           <a:solidFill>
-            <a:srgbClr val="C0392B"/>
+            <a:srgbClr val="2C5F2D"/>
           </a:solidFill>
           <a:ln/>
         </p:spPr>
+        <p:txBody>
+          <a:bodyPr/>
+          <a:lstStyle/>
+          <a:p>
+            <a:endParaRPr lang="it-IT"/>
+          </a:p>
+        </p:txBody>
       </p:sp>
       <p:pic>
         <p:nvPicPr>
-          <p:cNvPr id="6" name="Image 0" descr="/private/tmp/claude-501/-Users-gianmarcovellotti-Desktop-LM-1-anno-IoT-PomodorIA/d58fc5f1-3fb5-4f2f-a56b-ba8bb07e0c51/scratchpad/pptx/icons/tint_white.png">    </p:cNvPr>
-          <p:cNvPicPr>
-            <a:picLocks noChangeAspect="1"/>
-          </p:cNvPicPr>
-          <p:nvPr/>
-        </p:nvPicPr>
-        <p:blipFill>
-          <a:blip r:embed="rId1"/>
-          <a:stretch>
-            <a:fillRect/>
-          </a:stretch>
-        </p:blipFill>
-        <p:spPr>
-          <a:xfrm>
-            <a:off x="1608430" y="2243938"/>
-            <a:ext cx="486461" cy="486461"/>
-          </a:xfrm>
-          <a:prstGeom prst="rect">
-            <a:avLst/>
-          </a:prstGeom>
-        </p:spPr>
-      </p:pic>
-      <p:sp>
-        <p:nvSpPr>
-          <p:cNvPr id="7" name="Text 4"/>
-          <p:cNvSpPr/>
-          <p:nvPr/>
-        </p:nvSpPr>
-        <p:spPr>
-          <a:xfrm>
-            <a:off x="685800" y="2971800"/>
-            <a:ext cx="2331720" cy="320040"/>
-          </a:xfrm>
-          <a:prstGeom prst="rect">
-            <a:avLst/>
-          </a:prstGeom>
-          <a:noFill/>
-          <a:ln/>
-        </p:spPr>
-        <p:txBody>
-          <a:bodyPr wrap="square" lIns="0" tIns="0" rIns="0" bIns="0" rtlCol="0" anchor="ctr"/>
-          <a:lstStyle/>
-          <a:p>
-            <a:pPr algn="ctr" indent="0" marL="0">
-              <a:buNone/>
-            </a:pPr>
-            <a:r>
-              <a:rPr lang="en-US" sz="1400" b="1" dirty="0">
-                <a:solidFill>
-                  <a:srgbClr val="2C5F2D"/>
-                </a:solidFill>
-                <a:latin typeface="Calibri" pitchFamily="34" charset="0"/>
-                <a:ea typeface="Calibri" pitchFamily="34" charset="-122"/>
-                <a:cs typeface="Calibri" pitchFamily="34" charset="-120"/>
-              </a:rPr>
-              <a:t>Irrigazione</a:t>
-            </a:r>
-            <a:endParaRPr lang="en-US" sz="1400" dirty="0"/>
-          </a:p>
-        </p:txBody>
-      </p:sp>
-      <p:sp>
-        <p:nvSpPr>
-          <p:cNvPr id="8" name="Text 5"/>
-          <p:cNvSpPr/>
-          <p:nvPr/>
-        </p:nvSpPr>
-        <p:spPr>
-          <a:xfrm>
-            <a:off x="731520" y="3319272"/>
-            <a:ext cx="2240280" cy="1188720"/>
-          </a:xfrm>
-          <a:prstGeom prst="rect">
-            <a:avLst/>
-          </a:prstGeom>
-          <a:noFill/>
-          <a:ln/>
-        </p:spPr>
-        <p:txBody>
-          <a:bodyPr wrap="square" lIns="0" tIns="0" rIns="0" bIns="0" rtlCol="0" anchor="ctr"/>
-          <a:lstStyle/>
-          <a:p>
-            <a:pPr algn="ctr" indent="0" marL="0">
-              <a:lnSpc>
-                <a:spcPct val="125000"/>
-              </a:lnSpc>
-              <a:buNone/>
-            </a:pPr>
-            <a:r>
-              <a:rPr lang="en-US" sz="1100" dirty="0">
-                <a:solidFill>
-                  <a:srgbClr val="5B6B5B"/>
-                </a:solidFill>
-                <a:latin typeface="Calibri" pitchFamily="34" charset="0"/>
-                <a:ea typeface="Calibri" pitchFamily="34" charset="-122"/>
-                <a:cs typeface="Calibri" pitchFamily="34" charset="-120"/>
-              </a:rPr>
-              <a:t>si attiva quando l'umidità del suolo scende sotto soglia</a:t>
-            </a:r>
-            <a:endParaRPr lang="en-US" sz="1100" dirty="0"/>
-          </a:p>
-        </p:txBody>
-      </p:sp>
-      <p:sp>
-        <p:nvSpPr>
-          <p:cNvPr id="9" name="Shape 6"/>
-          <p:cNvSpPr/>
-          <p:nvPr/>
-        </p:nvSpPr>
-        <p:spPr>
-          <a:xfrm>
-            <a:off x="3355848" y="1874520"/>
-            <a:ext cx="2606040" cy="2743200"/>
-          </a:xfrm>
-          <a:prstGeom prst="roundRect">
-            <a:avLst>
-              <a:gd name="adj" fmla="val 3509"/>
-            </a:avLst>
-          </a:prstGeom>
-          <a:solidFill>
-            <a:srgbClr val="E7F0E1"/>
-          </a:solidFill>
-          <a:ln/>
-        </p:spPr>
-      </p:sp>
-      <p:sp>
-        <p:nvSpPr>
-          <p:cNvPr id="10" name="Shape 7"/>
-          <p:cNvSpPr/>
-          <p:nvPr/>
-        </p:nvSpPr>
-        <p:spPr>
-          <a:xfrm>
-            <a:off x="4338828" y="2167128"/>
-            <a:ext cx="640080" cy="640080"/>
-          </a:xfrm>
-          <a:prstGeom prst="ellipse">
-            <a:avLst/>
-          </a:prstGeom>
-          <a:solidFill>
-            <a:srgbClr val="C0392B"/>
-          </a:solidFill>
-          <a:ln/>
-        </p:spPr>
-      </p:sp>
-      <p:pic>
-        <p:nvPicPr>
-          <p:cNvPr id="11" name="Image 1" descr="/private/tmp/claude-501/-Users-gianmarcovellotti-Desktop-LM-1-anno-IoT-PomodorIA/d58fc5f1-3fb5-4f2f-a56b-ba8bb07e0c51/scratchpad/pptx/icons/wind_white.png">    </p:cNvPr>
-          <p:cNvPicPr>
-            <a:picLocks noChangeAspect="1"/>
-          </p:cNvPicPr>
-          <p:nvPr/>
-        </p:nvPicPr>
-        <p:blipFill>
-          <a:blip r:embed="rId2"/>
-          <a:stretch>
-            <a:fillRect/>
-          </a:stretch>
-        </p:blipFill>
-        <p:spPr>
-          <a:xfrm>
-            <a:off x="4415638" y="2243938"/>
-            <a:ext cx="486461" cy="486461"/>
-          </a:xfrm>
-          <a:prstGeom prst="rect">
-            <a:avLst/>
-          </a:prstGeom>
-        </p:spPr>
-      </p:pic>
-      <p:sp>
-        <p:nvSpPr>
-          <p:cNvPr id="12" name="Text 8"/>
-          <p:cNvSpPr/>
-          <p:nvPr/>
-        </p:nvSpPr>
-        <p:spPr>
-          <a:xfrm>
-            <a:off x="3493008" y="2971800"/>
-            <a:ext cx="2331720" cy="320040"/>
-          </a:xfrm>
-          <a:prstGeom prst="rect">
-            <a:avLst/>
-          </a:prstGeom>
-          <a:noFill/>
-          <a:ln/>
-        </p:spPr>
-        <p:txBody>
-          <a:bodyPr wrap="square" lIns="0" tIns="0" rIns="0" bIns="0" rtlCol="0" anchor="ctr"/>
-          <a:lstStyle/>
-          <a:p>
-            <a:pPr algn="ctr" indent="0" marL="0">
-              <a:buNone/>
-            </a:pPr>
-            <a:r>
-              <a:rPr lang="en-US" sz="1400" b="1" dirty="0">
-                <a:solidFill>
-                  <a:srgbClr val="2C5F2D"/>
-                </a:solidFill>
-                <a:latin typeface="Calibri" pitchFamily="34" charset="0"/>
-                <a:ea typeface="Calibri" pitchFamily="34" charset="-122"/>
-                <a:cs typeface="Calibri" pitchFamily="34" charset="-120"/>
-              </a:rPr>
-              <a:t>Ventilazione</a:t>
-            </a:r>
-            <a:endParaRPr lang="en-US" sz="1400" dirty="0"/>
-          </a:p>
-        </p:txBody>
-      </p:sp>
-      <p:sp>
-        <p:nvSpPr>
-          <p:cNvPr id="13" name="Text 9"/>
-          <p:cNvSpPr/>
-          <p:nvPr/>
-        </p:nvSpPr>
-        <p:spPr>
-          <a:xfrm>
-            <a:off x="3538728" y="3319272"/>
-            <a:ext cx="2240280" cy="1188720"/>
-          </a:xfrm>
-          <a:prstGeom prst="rect">
-            <a:avLst/>
-          </a:prstGeom>
-          <a:noFill/>
-          <a:ln/>
-        </p:spPr>
-        <p:txBody>
-          <a:bodyPr wrap="square" lIns="0" tIns="0" rIns="0" bIns="0" rtlCol="0" anchor="ctr"/>
-          <a:lstStyle/>
-          <a:p>
-            <a:pPr algn="ctr" indent="0" marL="0">
-              <a:lnSpc>
-                <a:spcPct val="125000"/>
-              </a:lnSpc>
-              <a:buNone/>
-            </a:pPr>
-            <a:r>
-              <a:rPr lang="en-US" sz="1100" dirty="0">
-                <a:solidFill>
-                  <a:srgbClr val="5B6B5B"/>
-                </a:solidFill>
-                <a:latin typeface="Calibri" pitchFamily="34" charset="0"/>
-                <a:ea typeface="Calibri" pitchFamily="34" charset="-122"/>
-                <a:cs typeface="Calibri" pitchFamily="34" charset="-120"/>
-              </a:rPr>
-              <a:t>riduce l'umidità in presenza di malattie fungine o temperature alte</a:t>
-            </a:r>
-            <a:endParaRPr lang="en-US" sz="1100" dirty="0"/>
-          </a:p>
-        </p:txBody>
-      </p:sp>
-      <p:sp>
-        <p:nvSpPr>
-          <p:cNvPr id="14" name="Shape 10"/>
-          <p:cNvSpPr/>
-          <p:nvPr/>
-        </p:nvSpPr>
-        <p:spPr>
-          <a:xfrm>
-            <a:off x="6163056" y="1874520"/>
-            <a:ext cx="2606040" cy="2743200"/>
-          </a:xfrm>
-          <a:prstGeom prst="roundRect">
-            <a:avLst>
-              <a:gd name="adj" fmla="val 3509"/>
-            </a:avLst>
-          </a:prstGeom>
-          <a:solidFill>
-            <a:srgbClr val="E7F0E1"/>
-          </a:solidFill>
-          <a:ln/>
-        </p:spPr>
-      </p:sp>
-      <p:sp>
-        <p:nvSpPr>
-          <p:cNvPr id="15" name="Shape 11"/>
-          <p:cNvSpPr/>
-          <p:nvPr/>
-        </p:nvSpPr>
-        <p:spPr>
-          <a:xfrm>
-            <a:off x="7146036" y="2167128"/>
-            <a:ext cx="640080" cy="640080"/>
-          </a:xfrm>
-          <a:prstGeom prst="ellipse">
-            <a:avLst/>
-          </a:prstGeom>
-          <a:solidFill>
-            <a:srgbClr val="C0392B"/>
-          </a:solidFill>
-          <a:ln/>
-        </p:spPr>
-      </p:sp>
-      <p:pic>
-        <p:nvPicPr>
-          <p:cNvPr id="16" name="Image 2" descr="/private/tmp/claude-501/-Users-gianmarcovellotti-Desktop-LM-1-anno-IoT-PomodorIA/d58fc5f1-3fb5-4f2f-a56b-ba8bb07e0c51/scratchpad/pptx/icons/bell_white.png">    </p:cNvPr>
+          <p:cNvPr id="7" name="Image 0" descr="/private/tmp/claude-501/-Users-gianmarcovellotti-Desktop-LM-1-anno-IoT-PomodorIA/d58fc5f1-3fb5-4f2f-a56b-ba8bb07e0c51/scratchpad/pptx/icons/wifi_white.png"/>
           <p:cNvPicPr>
             <a:picLocks noChangeAspect="1"/>
           </p:cNvPicPr>
@@ -9948,8 +9963,8 @@
         </p:blipFill>
         <p:spPr>
           <a:xfrm>
-            <a:off x="7222846" y="2243938"/>
-            <a:ext cx="486461" cy="486461"/>
+            <a:off x="940003" y="2860243"/>
+            <a:ext cx="451714" cy="451714"/>
           </a:xfrm>
           <a:prstGeom prst="rect">
             <a:avLst/>
@@ -9958,30 +9973,30 @@
       </p:pic>
       <p:sp>
         <p:nvSpPr>
-          <p:cNvPr id="17" name="Text 12"/>
-          <p:cNvSpPr/>
-          <p:nvPr/>
-        </p:nvSpPr>
-        <p:spPr>
-          <a:xfrm>
-            <a:off x="6300216" y="2971800"/>
-            <a:ext cx="2331720" cy="320040"/>
-          </a:xfrm>
-          <a:prstGeom prst="rect">
-            <a:avLst/>
-          </a:prstGeom>
-          <a:noFill/>
-          <a:ln/>
-        </p:spPr>
-        <p:txBody>
-          <a:bodyPr wrap="square" lIns="0" tIns="0" rIns="0" bIns="0" rtlCol="0" anchor="ctr"/>
-          <a:lstStyle/>
-          <a:p>
-            <a:pPr algn="ctr" indent="0" marL="0">
-              <a:buNone/>
-            </a:pPr>
-            <a:r>
-              <a:rPr lang="en-US" sz="1400" b="1" dirty="0">
+          <p:cNvPr id="8" name="Text 5"/>
+          <p:cNvSpPr/>
+          <p:nvPr/>
+        </p:nvSpPr>
+        <p:spPr>
+          <a:xfrm>
+            <a:off x="1600200" y="2834640"/>
+            <a:ext cx="3840480" cy="502920"/>
+          </a:xfrm>
+          <a:prstGeom prst="rect">
+            <a:avLst/>
+          </a:prstGeom>
+          <a:noFill/>
+          <a:ln/>
+        </p:spPr>
+        <p:txBody>
+          <a:bodyPr wrap="square" lIns="0" tIns="0" rIns="0" bIns="0" rtlCol="0" anchor="ctr"/>
+          <a:lstStyle/>
+          <a:p>
+            <a:pPr marL="0" indent="0">
+              <a:buNone/>
+            </a:pPr>
+            <a:r>
+              <a:rPr lang="en-US" sz="1600" b="1" dirty="0">
                 <a:solidFill>
                   <a:srgbClr val="2C5F2D"/>
                 </a:solidFill>
@@ -9989,41 +10004,287 @@
                 <a:ea typeface="Calibri" pitchFamily="34" charset="-122"/>
                 <a:cs typeface="Calibri" pitchFamily="34" charset="-120"/>
               </a:rPr>
-              <a:t>Allarme</a:t>
-            </a:r>
-            <a:endParaRPr lang="en-US" sz="1400" dirty="0"/>
-          </a:p>
-        </p:txBody>
-      </p:sp>
-      <p:sp>
-        <p:nvSpPr>
-          <p:cNvPr id="18" name="Text 13"/>
-          <p:cNvSpPr/>
-          <p:nvPr/>
-        </p:nvSpPr>
-        <p:spPr>
-          <a:xfrm>
-            <a:off x="6345936" y="3319272"/>
-            <a:ext cx="2240280" cy="1188720"/>
-          </a:xfrm>
-          <a:prstGeom prst="rect">
-            <a:avLst/>
-          </a:prstGeom>
-          <a:noFill/>
-          <a:ln/>
-        </p:spPr>
-        <p:txBody>
-          <a:bodyPr wrap="square" lIns="0" tIns="0" rIns="0" bIns="0" rtlCol="0" anchor="ctr"/>
-          <a:lstStyle/>
-          <a:p>
-            <a:pPr algn="ctr" indent="0" marL="0">
+              <a:t>NotificationActuator</a:t>
+            </a:r>
+            <a:endParaRPr lang="en-US" sz="1600" dirty="0"/>
+          </a:p>
+        </p:txBody>
+      </p:sp>
+      <p:sp>
+        <p:nvSpPr>
+          <p:cNvPr id="9" name="Text 6"/>
+          <p:cNvSpPr/>
+          <p:nvPr/>
+        </p:nvSpPr>
+        <p:spPr>
+          <a:xfrm>
+            <a:off x="868680" y="3566160"/>
+            <a:ext cx="4572000" cy="777240"/>
+          </a:xfrm>
+          <a:prstGeom prst="rect">
+            <a:avLst/>
+          </a:prstGeom>
+          <a:noFill/>
+          <a:ln/>
+        </p:spPr>
+        <p:txBody>
+          <a:bodyPr wrap="square" lIns="0" tIns="0" rIns="0" bIns="0" rtlCol="0" anchor="ctr"/>
+          <a:lstStyle/>
+          <a:p>
+            <a:pPr marL="0" indent="0">
+              <a:lnSpc>
+                <a:spcPct val="128000"/>
+              </a:lnSpc>
+              <a:buNone/>
+            </a:pPr>
+            <a:r>
+              <a:rPr lang="en-US" sz="1250" dirty="0">
+                <a:solidFill>
+                  <a:srgbClr val="1F2A1F"/>
+                </a:solidFill>
+                <a:latin typeface="Calibri" pitchFamily="34" charset="0"/>
+                <a:ea typeface="Calibri" pitchFamily="34" charset="-122"/>
+                <a:cs typeface="Calibri" pitchFamily="34" charset="-120"/>
+              </a:rPr>
+              <a:t>Non ha pin GPIO: è un'azione puramente software che simula l'invio di una notifica push/SMS/email all'agricoltore.</a:t>
+            </a:r>
+            <a:endParaRPr lang="en-US" sz="1250" dirty="0"/>
+          </a:p>
+        </p:txBody>
+      </p:sp>
+      <p:sp>
+        <p:nvSpPr>
+          <p:cNvPr id="10" name="Shape 7"/>
+          <p:cNvSpPr/>
+          <p:nvPr/>
+        </p:nvSpPr>
+        <p:spPr>
+          <a:xfrm>
+            <a:off x="868680" y="4480560"/>
+            <a:ext cx="1417320" cy="457200"/>
+          </a:xfrm>
+          <a:prstGeom prst="roundRect">
+            <a:avLst>
+              <a:gd name="adj" fmla="val 50000"/>
+            </a:avLst>
+          </a:prstGeom>
+          <a:solidFill>
+            <a:srgbClr val="6E9B57"/>
+          </a:solidFill>
+          <a:ln/>
+        </p:spPr>
+        <p:txBody>
+          <a:bodyPr/>
+          <a:lstStyle/>
+          <a:p>
+            <a:endParaRPr lang="it-IT"/>
+          </a:p>
+        </p:txBody>
+      </p:sp>
+      <p:sp>
+        <p:nvSpPr>
+          <p:cNvPr id="11" name="Text 8"/>
+          <p:cNvSpPr/>
+          <p:nvPr/>
+        </p:nvSpPr>
+        <p:spPr>
+          <a:xfrm>
+            <a:off x="868680" y="4480560"/>
+            <a:ext cx="1417320" cy="457200"/>
+          </a:xfrm>
+          <a:prstGeom prst="rect">
+            <a:avLst/>
+          </a:prstGeom>
+          <a:noFill/>
+          <a:ln/>
+        </p:spPr>
+        <p:txBody>
+          <a:bodyPr wrap="square" lIns="0" tIns="0" rIns="0" bIns="0" rtlCol="0" anchor="ctr"/>
+          <a:lstStyle/>
+          <a:p>
+            <a:pPr marL="0" indent="0" algn="ctr">
+              <a:buNone/>
+            </a:pPr>
+            <a:r>
+              <a:rPr lang="en-US" sz="1150" b="1" dirty="0">
+                <a:solidFill>
+                  <a:srgbClr val="FFFFFF"/>
+                </a:solidFill>
+                <a:latin typeface="Calibri" pitchFamily="34" charset="0"/>
+                <a:ea typeface="Calibri" pitchFamily="34" charset="-122"/>
+                <a:cs typeface="Calibri" pitchFamily="34" charset="-120"/>
+              </a:rPr>
+              <a:t>INFO</a:t>
+            </a:r>
+            <a:endParaRPr lang="en-US" sz="1150" dirty="0"/>
+          </a:p>
+        </p:txBody>
+      </p:sp>
+      <p:sp>
+        <p:nvSpPr>
+          <p:cNvPr id="12" name="Shape 9"/>
+          <p:cNvSpPr/>
+          <p:nvPr/>
+        </p:nvSpPr>
+        <p:spPr>
+          <a:xfrm>
+            <a:off x="2468880" y="4480560"/>
+            <a:ext cx="1417320" cy="457200"/>
+          </a:xfrm>
+          <a:prstGeom prst="roundRect">
+            <a:avLst>
+              <a:gd name="adj" fmla="val 50000"/>
+            </a:avLst>
+          </a:prstGeom>
+          <a:solidFill>
+            <a:srgbClr val="D68A1A"/>
+          </a:solidFill>
+          <a:ln/>
+        </p:spPr>
+        <p:txBody>
+          <a:bodyPr/>
+          <a:lstStyle/>
+          <a:p>
+            <a:endParaRPr lang="it-IT"/>
+          </a:p>
+        </p:txBody>
+      </p:sp>
+      <p:sp>
+        <p:nvSpPr>
+          <p:cNvPr id="13" name="Text 10"/>
+          <p:cNvSpPr/>
+          <p:nvPr/>
+        </p:nvSpPr>
+        <p:spPr>
+          <a:xfrm>
+            <a:off x="2468880" y="4480560"/>
+            <a:ext cx="1417320" cy="457200"/>
+          </a:xfrm>
+          <a:prstGeom prst="rect">
+            <a:avLst/>
+          </a:prstGeom>
+          <a:noFill/>
+          <a:ln/>
+        </p:spPr>
+        <p:txBody>
+          <a:bodyPr wrap="square" lIns="0" tIns="0" rIns="0" bIns="0" rtlCol="0" anchor="ctr"/>
+          <a:lstStyle/>
+          <a:p>
+            <a:pPr marL="0" indent="0" algn="ctr">
+              <a:buNone/>
+            </a:pPr>
+            <a:r>
+              <a:rPr lang="en-US" sz="1150" b="1" dirty="0">
+                <a:solidFill>
+                  <a:srgbClr val="FFFFFF"/>
+                </a:solidFill>
+                <a:latin typeface="Calibri" pitchFamily="34" charset="0"/>
+                <a:ea typeface="Calibri" pitchFamily="34" charset="-122"/>
+                <a:cs typeface="Calibri" pitchFamily="34" charset="-120"/>
+              </a:rPr>
+              <a:t>WARNING</a:t>
+            </a:r>
+            <a:endParaRPr lang="en-US" sz="1150" dirty="0"/>
+          </a:p>
+        </p:txBody>
+      </p:sp>
+      <p:sp>
+        <p:nvSpPr>
+          <p:cNvPr id="14" name="Shape 11"/>
+          <p:cNvSpPr/>
+          <p:nvPr/>
+        </p:nvSpPr>
+        <p:spPr>
+          <a:xfrm>
+            <a:off x="4069080" y="4480560"/>
+            <a:ext cx="1417320" cy="457200"/>
+          </a:xfrm>
+          <a:prstGeom prst="roundRect">
+            <a:avLst>
+              <a:gd name="adj" fmla="val 50000"/>
+            </a:avLst>
+          </a:prstGeom>
+          <a:solidFill>
+            <a:srgbClr val="C0392B"/>
+          </a:solidFill>
+          <a:ln/>
+        </p:spPr>
+        <p:txBody>
+          <a:bodyPr/>
+          <a:lstStyle/>
+          <a:p>
+            <a:endParaRPr lang="it-IT"/>
+          </a:p>
+        </p:txBody>
+      </p:sp>
+      <p:sp>
+        <p:nvSpPr>
+          <p:cNvPr id="15" name="Text 12"/>
+          <p:cNvSpPr/>
+          <p:nvPr/>
+        </p:nvSpPr>
+        <p:spPr>
+          <a:xfrm>
+            <a:off x="4069080" y="4480560"/>
+            <a:ext cx="1417320" cy="457200"/>
+          </a:xfrm>
+          <a:prstGeom prst="rect">
+            <a:avLst/>
+          </a:prstGeom>
+          <a:noFill/>
+          <a:ln/>
+        </p:spPr>
+        <p:txBody>
+          <a:bodyPr wrap="square" lIns="0" tIns="0" rIns="0" bIns="0" rtlCol="0" anchor="ctr"/>
+          <a:lstStyle/>
+          <a:p>
+            <a:pPr marL="0" indent="0" algn="ctr">
+              <a:buNone/>
+            </a:pPr>
+            <a:r>
+              <a:rPr lang="en-US" sz="1150" b="1" dirty="0">
+                <a:solidFill>
+                  <a:srgbClr val="FFFFFF"/>
+                </a:solidFill>
+                <a:latin typeface="Calibri" pitchFamily="34" charset="0"/>
+                <a:ea typeface="Calibri" pitchFamily="34" charset="-122"/>
+                <a:cs typeface="Calibri" pitchFamily="34" charset="-120"/>
+              </a:rPr>
+              <a:t>CRITICAL</a:t>
+            </a:r>
+            <a:endParaRPr lang="en-US" sz="1150" dirty="0"/>
+          </a:p>
+        </p:txBody>
+      </p:sp>
+      <p:sp>
+        <p:nvSpPr>
+          <p:cNvPr id="16" name="Text 13"/>
+          <p:cNvSpPr/>
+          <p:nvPr/>
+        </p:nvSpPr>
+        <p:spPr>
+          <a:xfrm>
+            <a:off x="868680" y="5120640"/>
+            <a:ext cx="4572000" cy="822960"/>
+          </a:xfrm>
+          <a:prstGeom prst="rect">
+            <a:avLst/>
+          </a:prstGeom>
+          <a:noFill/>
+          <a:ln/>
+        </p:spPr>
+        <p:txBody>
+          <a:bodyPr wrap="square" lIns="0" tIns="0" rIns="0" bIns="0" rtlCol="0" anchor="ctr"/>
+          <a:lstStyle/>
+          <a:p>
+            <a:pPr marL="0" indent="0">
               <a:lnSpc>
                 <a:spcPct val="125000"/>
               </a:lnSpc>
               <a:buNone/>
             </a:pPr>
             <a:r>
-              <a:rPr lang="en-US" sz="1100" dirty="0">
+              <a:rPr lang="en-US" sz="1150" dirty="0">
                 <a:solidFill>
                   <a:srgbClr val="5B6B5B"/>
                 </a:solidFill>
@@ -10031,44 +10292,51 @@
                 <a:ea typeface="Calibri" pitchFamily="34" charset="-122"/>
                 <a:cs typeface="Calibri" pitchFamily="34" charset="-120"/>
               </a:rPr>
-              <a:t>segnala epidemie, malattie virali o bassa confidenza del modello</a:t>
-            </a:r>
-            <a:endParaRPr lang="en-US" sz="1100" dirty="0"/>
-          </a:p>
-        </p:txBody>
-      </p:sp>
-      <p:sp>
-        <p:nvSpPr>
-          <p:cNvPr id="19" name="Shape 14"/>
-          <p:cNvSpPr/>
-          <p:nvPr/>
-        </p:nvSpPr>
-        <p:spPr>
-          <a:xfrm>
-            <a:off x="8970264" y="1874520"/>
-            <a:ext cx="2606040" cy="2743200"/>
+              <a:t>Tre livelli di severità: dalla semplice informazione (pianta tornata sana) all'urgenza massima (epidemia, malattia virale).</a:t>
+            </a:r>
+            <a:endParaRPr lang="en-US" sz="1150" dirty="0"/>
+          </a:p>
+        </p:txBody>
+      </p:sp>
+      <p:sp>
+        <p:nvSpPr>
+          <p:cNvPr id="17" name="Shape 14"/>
+          <p:cNvSpPr/>
+          <p:nvPr/>
+        </p:nvSpPr>
+        <p:spPr>
+          <a:xfrm>
+            <a:off x="6080760" y="2514600"/>
+            <a:ext cx="5559552" cy="3566160"/>
           </a:xfrm>
           <a:prstGeom prst="roundRect">
             <a:avLst>
-              <a:gd name="adj" fmla="val 3509"/>
+              <a:gd name="adj" fmla="val 3077"/>
             </a:avLst>
           </a:prstGeom>
           <a:solidFill>
-            <a:srgbClr val="E7F0E1"/>
+            <a:srgbClr val="2C5F2D"/>
           </a:solidFill>
           <a:ln/>
         </p:spPr>
-      </p:sp>
-      <p:sp>
-        <p:nvSpPr>
-          <p:cNvPr id="20" name="Shape 15"/>
-          <p:cNvSpPr/>
-          <p:nvPr/>
-        </p:nvSpPr>
-        <p:spPr>
-          <a:xfrm>
-            <a:off x="9953244" y="2167128"/>
-            <a:ext cx="640080" cy="640080"/>
+        <p:txBody>
+          <a:bodyPr/>
+          <a:lstStyle/>
+          <a:p>
+            <a:endParaRPr lang="it-IT"/>
+          </a:p>
+        </p:txBody>
+      </p:sp>
+      <p:sp>
+        <p:nvSpPr>
+          <p:cNvPr id="18" name="Shape 15"/>
+          <p:cNvSpPr/>
+          <p:nvPr/>
+        </p:nvSpPr>
+        <p:spPr>
+          <a:xfrm>
+            <a:off x="6400800" y="2788920"/>
+            <a:ext cx="594360" cy="594360"/>
           </a:xfrm>
           <a:prstGeom prst="ellipse">
             <a:avLst/>
@@ -10078,10 +10346,17 @@
           </a:solidFill>
           <a:ln/>
         </p:spPr>
+        <p:txBody>
+          <a:bodyPr/>
+          <a:lstStyle/>
+          <a:p>
+            <a:endParaRPr lang="it-IT"/>
+          </a:p>
+        </p:txBody>
       </p:sp>
       <p:pic>
         <p:nvPicPr>
-          <p:cNvPr id="21" name="Image 3" descr="/private/tmp/claude-501/-Users-gianmarcovellotti-Desktop-LM-1-anno-IoT-PomodorIA/d58fc5f1-3fb5-4f2f-a56b-ba8bb07e0c51/scratchpad/pptx/icons/wifi_white.png">    </p:cNvPr>
+          <p:cNvPr id="19" name="Image 1" descr="/private/tmp/claude-501/-Users-gianmarcovellotti-Desktop-LM-1-anno-IoT-PomodorIA/d58fc5f1-3fb5-4f2f-a56b-ba8bb07e0c51/scratchpad/pptx/icons/bell_white.png"/>
           <p:cNvPicPr>
             <a:picLocks noChangeAspect="1"/>
           </p:cNvPicPr>
@@ -10095,8 +10370,8 @@
         </p:blipFill>
         <p:spPr>
           <a:xfrm>
-            <a:off x="10030054" y="2243938"/>
-            <a:ext cx="486461" cy="486461"/>
+            <a:off x="6472123" y="2860243"/>
+            <a:ext cx="451714" cy="451714"/>
           </a:xfrm>
           <a:prstGeom prst="rect">
             <a:avLst/>
@@ -10105,122 +10380,170 @@
       </p:pic>
       <p:sp>
         <p:nvSpPr>
-          <p:cNvPr id="22" name="Text 16"/>
-          <p:cNvSpPr/>
-          <p:nvPr/>
-        </p:nvSpPr>
-        <p:spPr>
-          <a:xfrm>
-            <a:off x="9107424" y="2971800"/>
-            <a:ext cx="2331720" cy="320040"/>
-          </a:xfrm>
-          <a:prstGeom prst="rect">
-            <a:avLst/>
-          </a:prstGeom>
-          <a:noFill/>
-          <a:ln/>
-        </p:spPr>
-        <p:txBody>
-          <a:bodyPr wrap="square" lIns="0" tIns="0" rIns="0" bIns="0" rtlCol="0" anchor="ctr"/>
-          <a:lstStyle/>
-          <a:p>
-            <a:pPr algn="ctr" indent="0" marL="0">
-              <a:buNone/>
-            </a:pPr>
-            <a:r>
-              <a:rPr lang="en-US" sz="1400" b="1" dirty="0">
-                <a:solidFill>
-                  <a:srgbClr val="2C5F2D"/>
-                </a:solidFill>
-                <a:latin typeface="Calibri" pitchFamily="34" charset="0"/>
-                <a:ea typeface="Calibri" pitchFamily="34" charset="-122"/>
-                <a:cs typeface="Calibri" pitchFamily="34" charset="-120"/>
-              </a:rPr>
-              <a:t>Notifica</a:t>
-            </a:r>
-            <a:endParaRPr lang="en-US" sz="1400" dirty="0"/>
-          </a:p>
-        </p:txBody>
-      </p:sp>
-      <p:sp>
-        <p:nvSpPr>
-          <p:cNvPr id="23" name="Text 17"/>
-          <p:cNvSpPr/>
-          <p:nvPr/>
-        </p:nvSpPr>
-        <p:spPr>
-          <a:xfrm>
-            <a:off x="9153144" y="3319272"/>
-            <a:ext cx="2240280" cy="1188720"/>
-          </a:xfrm>
-          <a:prstGeom prst="rect">
-            <a:avLst/>
-          </a:prstGeom>
-          <a:noFill/>
-          <a:ln/>
-        </p:spPr>
-        <p:txBody>
-          <a:bodyPr wrap="square" lIns="0" tIns="0" rIns="0" bIns="0" rtlCol="0" anchor="ctr"/>
-          <a:lstStyle/>
-          <a:p>
-            <a:pPr algn="ctr" indent="0" marL="0">
+          <p:cNvPr id="20" name="Text 16"/>
+          <p:cNvSpPr/>
+          <p:nvPr/>
+        </p:nvSpPr>
+        <p:spPr>
+          <a:xfrm>
+            <a:off x="7132320" y="2834640"/>
+            <a:ext cx="4023360" cy="502920"/>
+          </a:xfrm>
+          <a:prstGeom prst="rect">
+            <a:avLst/>
+          </a:prstGeom>
+          <a:noFill/>
+          <a:ln/>
+        </p:spPr>
+        <p:txBody>
+          <a:bodyPr wrap="square" lIns="0" tIns="0" rIns="0" bIns="0" rtlCol="0" anchor="ctr"/>
+          <a:lstStyle/>
+          <a:p>
+            <a:pPr marL="0" indent="0">
+              <a:buNone/>
+            </a:pPr>
+            <a:r>
+              <a:rPr lang="en-US" sz="1600" b="1" dirty="0">
+                <a:solidFill>
+                  <a:srgbClr val="FFFFFF"/>
+                </a:solidFill>
+                <a:latin typeface="Calibri" pitchFamily="34" charset="0"/>
+                <a:ea typeface="Calibri" pitchFamily="34" charset="-122"/>
+                <a:cs typeface="Calibri" pitchFamily="34" charset="-120"/>
+              </a:rPr>
+              <a:t>Esempio: human-in-the-loop</a:t>
+            </a:r>
+            <a:endParaRPr lang="en-US" sz="1600" dirty="0"/>
+          </a:p>
+        </p:txBody>
+      </p:sp>
+      <p:sp>
+        <p:nvSpPr>
+          <p:cNvPr id="21" name="Shape 17"/>
+          <p:cNvSpPr/>
+          <p:nvPr/>
+        </p:nvSpPr>
+        <p:spPr>
+          <a:xfrm>
+            <a:off x="6400800" y="3520440"/>
+            <a:ext cx="4937760" cy="777240"/>
+          </a:xfrm>
+          <a:prstGeom prst="roundRect">
+            <a:avLst>
+              <a:gd name="adj" fmla="val 9412"/>
+            </a:avLst>
+          </a:prstGeom>
+          <a:solidFill>
+            <a:srgbClr val="24512A"/>
+          </a:solidFill>
+          <a:ln/>
+        </p:spPr>
+        <p:txBody>
+          <a:bodyPr/>
+          <a:lstStyle/>
+          <a:p>
+            <a:endParaRPr lang="it-IT"/>
+          </a:p>
+        </p:txBody>
+      </p:sp>
+      <p:sp>
+        <p:nvSpPr>
+          <p:cNvPr id="22" name="Text 18"/>
+          <p:cNvSpPr/>
+          <p:nvPr/>
+        </p:nvSpPr>
+        <p:spPr>
+          <a:xfrm>
+            <a:off x="6583680" y="3520440"/>
+            <a:ext cx="4572000" cy="777240"/>
+          </a:xfrm>
+          <a:prstGeom prst="rect">
+            <a:avLst/>
+          </a:prstGeom>
+          <a:noFill/>
+          <a:ln/>
+        </p:spPr>
+        <p:txBody>
+          <a:bodyPr wrap="square" lIns="0" tIns="0" rIns="0" bIns="0" rtlCol="0" anchor="ctr"/>
+          <a:lstStyle/>
+          <a:p>
+            <a:pPr marL="0" indent="0">
+              <a:buNone/>
+            </a:pPr>
+            <a:r>
+              <a:rPr lang="en-US" sz="1300" dirty="0">
+                <a:solidFill>
+                  <a:srgbClr val="9FC98A"/>
+                </a:solidFill>
+                <a:latin typeface="Calibri" pitchFamily="34" charset="0"/>
+                <a:ea typeface="Calibri" pitchFamily="34" charset="-122"/>
+                <a:cs typeface="Calibri" pitchFamily="34" charset="-120"/>
+              </a:rPr>
+              <a:t>Confidenza modello bassa  </a:t>
+            </a:r>
+            <a:r>
+              <a:rPr lang="en-US" sz="1300" b="1" dirty="0">
+                <a:solidFill>
+                  <a:srgbClr val="C0392B"/>
+                </a:solidFill>
+                <a:latin typeface="Calibri" pitchFamily="34" charset="0"/>
+                <a:ea typeface="Calibri" pitchFamily="34" charset="-122"/>
+                <a:cs typeface="Calibri" pitchFamily="34" charset="-120"/>
+              </a:rPr>
+              <a:t>→  </a:t>
+            </a:r>
+            <a:r>
+              <a:rPr lang="en-US" sz="1300" b="1" dirty="0">
+                <a:solidFill>
+                  <a:srgbClr val="FFFFFF"/>
+                </a:solidFill>
+                <a:latin typeface="Calibri" pitchFamily="34" charset="0"/>
+                <a:ea typeface="Calibri" pitchFamily="34" charset="-122"/>
+                <a:cs typeface="Calibri" pitchFamily="34" charset="-120"/>
+              </a:rPr>
+              <a:t>richiesta ispezione umana</a:t>
+            </a:r>
+            <a:endParaRPr lang="en-US" sz="1300" dirty="0"/>
+          </a:p>
+        </p:txBody>
+      </p:sp>
+      <p:sp>
+        <p:nvSpPr>
+          <p:cNvPr id="23" name="Text 19"/>
+          <p:cNvSpPr/>
+          <p:nvPr/>
+        </p:nvSpPr>
+        <p:spPr>
+          <a:xfrm>
+            <a:off x="6400800" y="4480560"/>
+            <a:ext cx="4937760" cy="1005840"/>
+          </a:xfrm>
+          <a:prstGeom prst="rect">
+            <a:avLst/>
+          </a:prstGeom>
+          <a:noFill/>
+          <a:ln/>
+        </p:spPr>
+        <p:txBody>
+          <a:bodyPr wrap="square" lIns="0" tIns="0" rIns="0" bIns="0" rtlCol="0" anchor="ctr"/>
+          <a:lstStyle/>
+          <a:p>
+            <a:pPr marL="0" indent="0">
               <a:lnSpc>
-                <a:spcPct val="125000"/>
+                <a:spcPct val="130000"/>
               </a:lnSpc>
               <a:buNone/>
             </a:pPr>
             <a:r>
-              <a:rPr lang="en-US" sz="1100" dirty="0">
-                <a:solidFill>
-                  <a:srgbClr val="5B6B5B"/>
-                </a:solidFill>
-                <a:latin typeface="Calibri" pitchFamily="34" charset="0"/>
-                <a:ea typeface="Calibri" pitchFamily="34" charset="-122"/>
-                <a:cs typeface="Calibri" pitchFamily="34" charset="-120"/>
-              </a:rPr>
-              <a:t>avvisa l'agricoltore — livello "Collaboration" dello stack IoT</a:t>
-            </a:r>
-            <a:endParaRPr lang="en-US" sz="1100" dirty="0"/>
-          </a:p>
-        </p:txBody>
-      </p:sp>
-      <p:sp>
-        <p:nvSpPr>
-          <p:cNvPr id="24" name="Text 18"/>
-          <p:cNvSpPr/>
-          <p:nvPr/>
-        </p:nvSpPr>
-        <p:spPr>
-          <a:xfrm>
-            <a:off x="548640" y="4892040"/>
-            <a:ext cx="10881360" cy="548640"/>
-          </a:xfrm>
-          <a:prstGeom prst="rect">
-            <a:avLst/>
-          </a:prstGeom>
-          <a:noFill/>
-          <a:ln/>
-        </p:spPr>
-        <p:txBody>
-          <a:bodyPr wrap="square" lIns="0" tIns="0" rIns="0" bIns="0" rtlCol="0" anchor="ctr"/>
-          <a:lstStyle/>
-          <a:p>
-            <a:pPr indent="0" marL="0">
-              <a:lnSpc>
-                <a:spcPct val="125000"/>
-              </a:lnSpc>
-              <a:buNone/>
-            </a:pPr>
-            <a:r>
-              <a:rPr lang="en-US" sz="1250" i="1" dirty="0">
-                <a:solidFill>
-                  <a:srgbClr val="5B6B5B"/>
-                </a:solidFill>
-                <a:latin typeface="Calibri" pitchFamily="34" charset="0"/>
-                <a:ea typeface="Calibri" pitchFamily="34" charset="-122"/>
-                <a:cs typeface="Calibri" pitchFamily="34" charset="-120"/>
-              </a:rPr>
-              <a:t>Ogni attuatore ha un'interfaccia identica a quella dei pin GPIO reali: il codice è già pronto per essere spostato su un Raspberry Pi vero, senza riscritture.</a:t>
+              <a:rPr lang="en-US" sz="1250" dirty="0">
+                <a:solidFill>
+                  <a:srgbClr val="E7F0E1"/>
+                </a:solidFill>
+                <a:latin typeface="Calibri" pitchFamily="34" charset="0"/>
+                <a:ea typeface="Calibri" pitchFamily="34" charset="-122"/>
+                <a:cs typeface="Calibri" pitchFamily="34" charset="-120"/>
+              </a:rPr>
+              <a:t>Se la CNN non è sicura della diagnosi, il sistema non decide da solo: attiva l'allarme e notifica l'agricoltore, chiedendo una verifica diretta sulla pianta prima di agire.</a:t>
             </a:r>
             <a:endParaRPr lang="en-US" sz="1250" dirty="0"/>
           </a:p>
@@ -10228,7 +10551,46 @@
       </p:sp>
       <p:sp>
         <p:nvSpPr>
-          <p:cNvPr id="25" name="Text 19"/>
+          <p:cNvPr id="24" name="Text 20"/>
+          <p:cNvSpPr/>
+          <p:nvPr/>
+        </p:nvSpPr>
+        <p:spPr>
+          <a:xfrm>
+            <a:off x="548640" y="6263640"/>
+            <a:ext cx="11091672" cy="365760"/>
+          </a:xfrm>
+          <a:prstGeom prst="rect">
+            <a:avLst/>
+          </a:prstGeom>
+          <a:noFill/>
+          <a:ln/>
+        </p:spPr>
+        <p:txBody>
+          <a:bodyPr wrap="square" lIns="0" tIns="0" rIns="0" bIns="0" rtlCol="0" anchor="ctr"/>
+          <a:lstStyle/>
+          <a:p>
+            <a:pPr marL="0" indent="0">
+              <a:buNone/>
+            </a:pPr>
+            <a:r>
+              <a:rPr lang="en-US" sz="1150" i="1" dirty="0">
+                <a:solidFill>
+                  <a:srgbClr val="C0392B"/>
+                </a:solidFill>
+                <a:latin typeface="Calibri" pitchFamily="34" charset="0"/>
+                <a:ea typeface="Calibri" pitchFamily="34" charset="-122"/>
+                <a:cs typeface="Calibri" pitchFamily="34" charset="-120"/>
+              </a:rPr>
+              <a:t>A differenza degli attuatori fisici (Livello 1), che chiudono il ciclo in autonomia, il Livello 7 lascia la decisione finale a una persona quando l'incertezza è alta.</a:t>
+            </a:r>
+            <a:endParaRPr lang="en-US" sz="1150" dirty="0"/>
+          </a:p>
+        </p:txBody>
+      </p:sp>
+      <p:sp>
+        <p:nvSpPr>
+          <p:cNvPr id="25" name="Text 21"/>
           <p:cNvSpPr/>
           <p:nvPr/>
         </p:nvSpPr>
@@ -10247,7 +10609,7 @@
           <a:bodyPr wrap="square" lIns="0" tIns="0" rIns="0" bIns="0" rtlCol="0" anchor="ctr"/>
           <a:lstStyle/>
           <a:p>
-            <a:pPr algn="r" indent="0" marL="0">
+            <a:pPr marL="0" indent="0" algn="r">
               <a:buNone/>
             </a:pPr>
             <a:r>
@@ -10281,6 +10643,7 @@
         <a:solidFill>
           <a:srgbClr val="FFFFFF"/>
         </a:solidFill>
+        <a:effectLst/>
       </p:bgPr>
     </p:bg>
     <p:spTree>
@@ -10318,11 +10681,11 @@
           <a:bodyPr wrap="square" lIns="0" tIns="0" rIns="0" bIns="0" rtlCol="0" anchor="ctr"/>
           <a:lstStyle/>
           <a:p>
-            <a:pPr indent="0" marL="0">
-              <a:buNone/>
-            </a:pPr>
-            <a:r>
-              <a:rPr lang="en-US" sz="1300" b="1" spc="200" kern="0" dirty="0">
+            <a:pPr marL="0" indent="0">
+              <a:buNone/>
+            </a:pPr>
+            <a:r>
+              <a:rPr lang="en-US" sz="1300" b="1" kern="0" spc="200" dirty="0">
                 <a:solidFill>
                   <a:srgbClr val="C0392B"/>
                 </a:solidFill>
@@ -10357,7 +10720,7 @@
           <a:bodyPr wrap="square" lIns="0" tIns="0" rIns="0" bIns="0" rtlCol="0" anchor="ctr"/>
           <a:lstStyle/>
           <a:p>
-            <a:pPr indent="0" marL="0">
+            <a:pPr marL="0" indent="0">
               <a:buNone/>
             </a:pPr>
             <a:r>
@@ -10396,6 +10759,13 @@
           </a:solidFill>
           <a:ln/>
         </p:spPr>
+        <p:txBody>
+          <a:bodyPr/>
+          <a:lstStyle/>
+          <a:p>
+            <a:endParaRPr lang="it-IT"/>
+          </a:p>
+        </p:txBody>
       </p:sp>
       <p:sp>
         <p:nvSpPr>
@@ -10418,7 +10788,7 @@
           <a:bodyPr wrap="square" lIns="0" tIns="0" rIns="0" bIns="0" rtlCol="0" anchor="ctr"/>
           <a:lstStyle/>
           <a:p>
-            <a:pPr indent="0" marL="0">
+            <a:pPr marL="0" indent="0">
               <a:buNone/>
             </a:pPr>
             <a:r>
@@ -10457,7 +10827,7 @@
           <a:bodyPr wrap="square" lIns="0" tIns="0" rIns="0" bIns="0" rtlCol="0" anchor="ctr"/>
           <a:lstStyle/>
           <a:p>
-            <a:pPr indent="0" marL="0">
+            <a:pPr marL="0" indent="0">
               <a:lnSpc>
                 <a:spcPct val="118000"/>
               </a:lnSpc>
@@ -10499,6 +10869,13 @@
           </a:solidFill>
           <a:ln/>
         </p:spPr>
+        <p:txBody>
+          <a:bodyPr/>
+          <a:lstStyle/>
+          <a:p>
+            <a:endParaRPr lang="it-IT"/>
+          </a:p>
+        </p:txBody>
       </p:sp>
       <p:sp>
         <p:nvSpPr>
@@ -10521,7 +10898,7 @@
           <a:bodyPr wrap="square" lIns="0" tIns="0" rIns="0" bIns="0" rtlCol="0" anchor="ctr"/>
           <a:lstStyle/>
           <a:p>
-            <a:pPr indent="0" marL="0">
+            <a:pPr marL="0" indent="0">
               <a:buNone/>
             </a:pPr>
             <a:r>
@@ -10560,13 +10937,24 @@
           <a:bodyPr wrap="square" lIns="0" tIns="0" rIns="0" bIns="0" rtlCol="0" anchor="ctr"/>
           <a:lstStyle/>
           <a:p>
-            <a:pPr indent="0" marL="0">
+            <a:pPr marL="0" indent="0">
               <a:lnSpc>
                 <a:spcPct val="118000"/>
               </a:lnSpc>
               <a:buNone/>
             </a:pPr>
             <a:r>
+              <a:rPr lang="en-US" sz="1030" dirty="0" err="1">
+                <a:solidFill>
+                  <a:srgbClr val="5B6B5B"/>
+                </a:solidFill>
+                <a:latin typeface="Calibri" pitchFamily="34" charset="0"/>
+                <a:ea typeface="Calibri" pitchFamily="34" charset="-122"/>
+                <a:cs typeface="Calibri" pitchFamily="34" charset="-120"/>
+              </a:rPr>
+              <a:t>i</a:t>
+            </a:r>
+            <a:r>
               <a:rPr lang="en-US" sz="1030" dirty="0">
                 <a:solidFill>
                   <a:srgbClr val="5B6B5B"/>
@@ -10575,7 +10963,150 @@
                 <a:ea typeface="Calibri" pitchFamily="34" charset="-122"/>
                 <a:cs typeface="Calibri" pitchFamily="34" charset="-120"/>
               </a:rPr>
-              <a:t>i pesi vengono convertiti a 8 bit a compile-time; le attivazioni sono quantizzate a runtime, senza calibrazione</a:t>
+              <a:t> </a:t>
+            </a:r>
+            <a:r>
+              <a:rPr lang="en-US" sz="1030" dirty="0" err="1">
+                <a:solidFill>
+                  <a:srgbClr val="5B6B5B"/>
+                </a:solidFill>
+                <a:latin typeface="Calibri" pitchFamily="34" charset="0"/>
+                <a:ea typeface="Calibri" pitchFamily="34" charset="-122"/>
+                <a:cs typeface="Calibri" pitchFamily="34" charset="-120"/>
+              </a:rPr>
+              <a:t>pesi</a:t>
+            </a:r>
+            <a:r>
+              <a:rPr lang="en-US" sz="1030" dirty="0">
+                <a:solidFill>
+                  <a:srgbClr val="5B6B5B"/>
+                </a:solidFill>
+                <a:latin typeface="Calibri" pitchFamily="34" charset="0"/>
+                <a:ea typeface="Calibri" pitchFamily="34" charset="-122"/>
+                <a:cs typeface="Calibri" pitchFamily="34" charset="-120"/>
+              </a:rPr>
+              <a:t> </a:t>
+            </a:r>
+            <a:r>
+              <a:rPr lang="en-US" sz="1030" dirty="0" err="1">
+                <a:solidFill>
+                  <a:srgbClr val="5B6B5B"/>
+                </a:solidFill>
+                <a:latin typeface="Calibri" pitchFamily="34" charset="0"/>
+                <a:ea typeface="Calibri" pitchFamily="34" charset="-122"/>
+                <a:cs typeface="Calibri" pitchFamily="34" charset="-120"/>
+              </a:rPr>
+              <a:t>vengono</a:t>
+            </a:r>
+            <a:r>
+              <a:rPr lang="en-US" sz="1030" dirty="0">
+                <a:solidFill>
+                  <a:srgbClr val="5B6B5B"/>
+                </a:solidFill>
+                <a:latin typeface="Calibri" pitchFamily="34" charset="0"/>
+                <a:ea typeface="Calibri" pitchFamily="34" charset="-122"/>
+                <a:cs typeface="Calibri" pitchFamily="34" charset="-120"/>
+              </a:rPr>
+              <a:t> </a:t>
+            </a:r>
+            <a:r>
+              <a:rPr lang="en-US" sz="1030" dirty="0" err="1">
+                <a:solidFill>
+                  <a:srgbClr val="5B6B5B"/>
+                </a:solidFill>
+                <a:latin typeface="Calibri" pitchFamily="34" charset="0"/>
+                <a:ea typeface="Calibri" pitchFamily="34" charset="-122"/>
+                <a:cs typeface="Calibri" pitchFamily="34" charset="-120"/>
+              </a:rPr>
+              <a:t>convertiti</a:t>
+            </a:r>
+            <a:r>
+              <a:rPr lang="en-US" sz="1030" dirty="0">
+                <a:solidFill>
+                  <a:srgbClr val="5B6B5B"/>
+                </a:solidFill>
+                <a:latin typeface="Calibri" pitchFamily="34" charset="0"/>
+                <a:ea typeface="Calibri" pitchFamily="34" charset="-122"/>
+                <a:cs typeface="Calibri" pitchFamily="34" charset="-120"/>
+              </a:rPr>
+              <a:t> a 8 bit a compile-time; le </a:t>
+            </a:r>
+            <a:r>
+              <a:rPr lang="en-US" sz="1030" dirty="0" err="1">
+                <a:solidFill>
+                  <a:srgbClr val="5B6B5B"/>
+                </a:solidFill>
+                <a:latin typeface="Calibri" pitchFamily="34" charset="0"/>
+                <a:ea typeface="Calibri" pitchFamily="34" charset="-122"/>
+                <a:cs typeface="Calibri" pitchFamily="34" charset="-120"/>
+              </a:rPr>
+              <a:t>attivazioni</a:t>
+            </a:r>
+            <a:r>
+              <a:rPr lang="en-US" sz="1030" dirty="0">
+                <a:solidFill>
+                  <a:srgbClr val="5B6B5B"/>
+                </a:solidFill>
+                <a:latin typeface="Calibri" pitchFamily="34" charset="0"/>
+                <a:ea typeface="Calibri" pitchFamily="34" charset="-122"/>
+                <a:cs typeface="Calibri" pitchFamily="34" charset="-120"/>
+              </a:rPr>
+              <a:t> </a:t>
+            </a:r>
+            <a:r>
+              <a:rPr lang="en-US" sz="1030" dirty="0" err="1">
+                <a:solidFill>
+                  <a:srgbClr val="5B6B5B"/>
+                </a:solidFill>
+                <a:latin typeface="Calibri" pitchFamily="34" charset="0"/>
+                <a:ea typeface="Calibri" pitchFamily="34" charset="-122"/>
+                <a:cs typeface="Calibri" pitchFamily="34" charset="-120"/>
+              </a:rPr>
+              <a:t>sono</a:t>
+            </a:r>
+            <a:r>
+              <a:rPr lang="en-US" sz="1030" dirty="0">
+                <a:solidFill>
+                  <a:srgbClr val="5B6B5B"/>
+                </a:solidFill>
+                <a:latin typeface="Calibri" pitchFamily="34" charset="0"/>
+                <a:ea typeface="Calibri" pitchFamily="34" charset="-122"/>
+                <a:cs typeface="Calibri" pitchFamily="34" charset="-120"/>
+              </a:rPr>
+              <a:t> </a:t>
+            </a:r>
+            <a:r>
+              <a:rPr lang="en-US" sz="1030" dirty="0" err="1">
+                <a:solidFill>
+                  <a:srgbClr val="5B6B5B"/>
+                </a:solidFill>
+                <a:latin typeface="Calibri" pitchFamily="34" charset="0"/>
+                <a:ea typeface="Calibri" pitchFamily="34" charset="-122"/>
+                <a:cs typeface="Calibri" pitchFamily="34" charset="-120"/>
+              </a:rPr>
+              <a:t>quantizzate</a:t>
+            </a:r>
+            <a:r>
+              <a:rPr lang="en-US" sz="1030" dirty="0">
+                <a:solidFill>
+                  <a:srgbClr val="5B6B5B"/>
+                </a:solidFill>
+                <a:latin typeface="Calibri" pitchFamily="34" charset="0"/>
+                <a:ea typeface="Calibri" pitchFamily="34" charset="-122"/>
+                <a:cs typeface="Calibri" pitchFamily="34" charset="-120"/>
+              </a:rPr>
+              <a:t> a runtime, senza </a:t>
+            </a:r>
+            <a:r>
+              <a:rPr lang="en-US" sz="1030" dirty="0" err="1">
+                <a:solidFill>
+                  <a:srgbClr val="5B6B5B"/>
+                </a:solidFill>
+                <a:latin typeface="Calibri" pitchFamily="34" charset="0"/>
+                <a:ea typeface="Calibri" pitchFamily="34" charset="-122"/>
+                <a:cs typeface="Calibri" pitchFamily="34" charset="-120"/>
+              </a:rPr>
+              <a:t>calibrazione</a:t>
             </a:r>
             <a:endParaRPr lang="en-US" sz="1030" dirty="0"/>
           </a:p>
@@ -10583,7 +11114,7 @@
       </p:sp>
       <p:graphicFrame>
         <p:nvGraphicFramePr>
-          <p:cNvPr id="10" name="Chart 0" descr=""/>
+          <p:cNvPr id="10" name="Chart 0"/>
           <p:cNvGraphicFramePr/>
           <p:nvPr/>
         </p:nvGraphicFramePr>
@@ -10591,15 +11122,15 @@
           <a:off x="548640" y="2788920"/>
           <a:ext cx="5532120" cy="3063240"/>
         </p:xfrm>
-        <a:graphic xmlns:a="http://schemas.openxmlformats.org/drawingml/2006/main">
+        <a:graphic>
           <a:graphicData uri="http://schemas.openxmlformats.org/drawingml/2006/chart">
-            <c:chart xmlns:c="http://schemas.openxmlformats.org/drawingml/2006/chart" r:id="rId1"/>
+            <c:chart xmlns:c="http://schemas.openxmlformats.org/drawingml/2006/chart" xmlns:r="http://schemas.openxmlformats.org/officeDocument/2006/relationships" r:id="rId3"/>
           </a:graphicData>
         </a:graphic>
       </p:graphicFrame>
       <p:graphicFrame>
         <p:nvGraphicFramePr>
-          <p:cNvPr id="10" name="Table 0"/>
+          <p:cNvPr id="11" name="Table 0"/>
           <p:cNvGraphicFramePr>
             <a:graphicFrameLocks noGrp="1"/>
           </p:cNvGraphicFramePr>
@@ -10620,10 +11151,34 @@
             <a:tbl>
               <a:tblPr/>
               <a:tblGrid>
-                <a:gridCol w="2286000"/>
-                <a:gridCol w="1060704"/>
-                <a:gridCol w="1060704"/>
-                <a:gridCol w="1060704"/>
+                <a:gridCol w="2286000">
+                  <a:extLst>
+                    <a:ext uri="{9D8B030D-6E8A-4147-A177-3AD203B41FA5}">
+                      <a16:colId xmlns:a16="http://schemas.microsoft.com/office/drawing/2014/main" val="20000"/>
+                    </a:ext>
+                  </a:extLst>
+                </a:gridCol>
+                <a:gridCol w="1060704">
+                  <a:extLst>
+                    <a:ext uri="{9D8B030D-6E8A-4147-A177-3AD203B41FA5}">
+                      <a16:colId xmlns:a16="http://schemas.microsoft.com/office/drawing/2014/main" val="20001"/>
+                    </a:ext>
+                  </a:extLst>
+                </a:gridCol>
+                <a:gridCol w="1060704">
+                  <a:extLst>
+                    <a:ext uri="{9D8B030D-6E8A-4147-A177-3AD203B41FA5}">
+                      <a16:colId xmlns:a16="http://schemas.microsoft.com/office/drawing/2014/main" val="20002"/>
+                    </a:ext>
+                  </a:extLst>
+                </a:gridCol>
+                <a:gridCol w="1060704">
+                  <a:extLst>
+                    <a:ext uri="{9D8B030D-6E8A-4147-A177-3AD203B41FA5}">
+                      <a16:colId xmlns:a16="http://schemas.microsoft.com/office/drawing/2014/main" val="20003"/>
+                    </a:ext>
+                  </a:extLst>
+                </a:gridCol>
               </a:tblGrid>
               <a:tr h="374904">
                 <a:tc>
@@ -10631,7 +11186,7 @@
                     <a:bodyPr/>
                     <a:lstStyle/>
                     <a:p>
-                      <a:pPr indent="0" marL="0">
+                      <a:pPr marL="0" indent="0">
                         <a:buNone/>
                       </a:pPr>
                       <a:r>
@@ -10692,7 +11247,7 @@
                     <a:bodyPr/>
                     <a:lstStyle/>
                     <a:p>
-                      <a:pPr algn="ctr" indent="0" marL="0">
+                      <a:pPr marL="0" indent="0" algn="ctr">
                         <a:buNone/>
                       </a:pPr>
                       <a:r>
@@ -10753,7 +11308,7 @@
                     <a:bodyPr/>
                     <a:lstStyle/>
                     <a:p>
-                      <a:pPr algn="ctr" indent="0" marL="0">
+                      <a:pPr marL="0" indent="0" algn="ctr">
                         <a:buNone/>
                       </a:pPr>
                       <a:r>
@@ -10814,7 +11369,7 @@
                     <a:bodyPr/>
                     <a:lstStyle/>
                     <a:p>
-                      <a:pPr algn="ctr" indent="0" marL="0">
+                      <a:pPr marL="0" indent="0" algn="ctr">
                         <a:buNone/>
                       </a:pPr>
                       <a:r>
@@ -10870,6 +11425,11 @@
                     </a:solidFill>
                   </a:tcPr>
                 </a:tc>
+                <a:extLst>
+                  <a:ext uri="{0D108BD9-81ED-4DB2-BD59-A6C34878D82A}">
+                    <a16:rowId xmlns:a16="http://schemas.microsoft.com/office/drawing/2014/main" val="10000"/>
+                  </a:ext>
+                </a:extLst>
               </a:tr>
               <a:tr h="374904">
                 <a:tc>
@@ -10877,7 +11437,7 @@
                     <a:bodyPr/>
                     <a:lstStyle/>
                     <a:p>
-                      <a:pPr indent="0" marL="0">
+                      <a:pPr marL="0" indent="0">
                         <a:buNone/>
                       </a:pPr>
                       <a:r>
@@ -10935,7 +11495,7 @@
                     <a:bodyPr/>
                     <a:lstStyle/>
                     <a:p>
-                      <a:pPr algn="ctr" indent="0" marL="0">
+                      <a:pPr marL="0" indent="0" algn="ctr">
                         <a:buNone/>
                       </a:pPr>
                       <a:r>
@@ -10993,7 +11553,7 @@
                     <a:bodyPr/>
                     <a:lstStyle/>
                     <a:p>
-                      <a:pPr algn="ctr" indent="0" marL="0">
+                      <a:pPr marL="0" indent="0" algn="ctr">
                         <a:buNone/>
                       </a:pPr>
                       <a:r>
@@ -11051,7 +11611,7 @@
                     <a:bodyPr/>
                     <a:lstStyle/>
                     <a:p>
-                      <a:pPr algn="ctr" indent="0" marL="0">
+                      <a:pPr marL="0" indent="0" algn="ctr">
                         <a:buNone/>
                       </a:pPr>
                       <a:r>
@@ -11104,6 +11664,11 @@
                     </a:lnB>
                   </a:tcPr>
                 </a:tc>
+                <a:extLst>
+                  <a:ext uri="{0D108BD9-81ED-4DB2-BD59-A6C34878D82A}">
+                    <a16:rowId xmlns:a16="http://schemas.microsoft.com/office/drawing/2014/main" val="10001"/>
+                  </a:ext>
+                </a:extLst>
               </a:tr>
               <a:tr h="374904">
                 <a:tc>
@@ -11111,7 +11676,7 @@
                     <a:bodyPr/>
                     <a:lstStyle/>
                     <a:p>
-                      <a:pPr indent="0" marL="0">
+                      <a:pPr marL="0" indent="0">
                         <a:buNone/>
                       </a:pPr>
                       <a:r>
@@ -11169,7 +11734,7 @@
                     <a:bodyPr/>
                     <a:lstStyle/>
                     <a:p>
-                      <a:pPr algn="ctr" indent="0" marL="0">
+                      <a:pPr marL="0" indent="0" algn="ctr">
                         <a:buNone/>
                       </a:pPr>
                       <a:r>
@@ -11227,7 +11792,7 @@
                     <a:bodyPr/>
                     <a:lstStyle/>
                     <a:p>
-                      <a:pPr algn="ctr" indent="0" marL="0">
+                      <a:pPr marL="0" indent="0" algn="ctr">
                         <a:buNone/>
                       </a:pPr>
                       <a:r>
@@ -11285,7 +11850,7 @@
                     <a:bodyPr/>
                     <a:lstStyle/>
                     <a:p>
-                      <a:pPr algn="ctr" indent="0" marL="0">
+                      <a:pPr marL="0" indent="0" algn="ctr">
                         <a:buNone/>
                       </a:pPr>
                       <a:r>
@@ -11338,6 +11903,11 @@
                     </a:lnB>
                   </a:tcPr>
                 </a:tc>
+                <a:extLst>
+                  <a:ext uri="{0D108BD9-81ED-4DB2-BD59-A6C34878D82A}">
+                    <a16:rowId xmlns:a16="http://schemas.microsoft.com/office/drawing/2014/main" val="10002"/>
+                  </a:ext>
+                </a:extLst>
               </a:tr>
               <a:tr h="374904">
                 <a:tc>
@@ -11345,7 +11915,7 @@
                     <a:bodyPr/>
                     <a:lstStyle/>
                     <a:p>
-                      <a:pPr indent="0" marL="0">
+                      <a:pPr marL="0" indent="0">
                         <a:buNone/>
                       </a:pPr>
                       <a:r>
@@ -11403,7 +11973,7 @@
                     <a:bodyPr/>
                     <a:lstStyle/>
                     <a:p>
-                      <a:pPr algn="ctr" indent="0" marL="0">
+                      <a:pPr marL="0" indent="0" algn="ctr">
                         <a:buNone/>
                       </a:pPr>
                       <a:r>
@@ -11461,7 +12031,7 @@
                     <a:bodyPr/>
                     <a:lstStyle/>
                     <a:p>
-                      <a:pPr algn="ctr" indent="0" marL="0">
+                      <a:pPr marL="0" indent="0" algn="ctr">
                         <a:buNone/>
                       </a:pPr>
                       <a:r>
@@ -11519,7 +12089,7 @@
                     <a:bodyPr/>
                     <a:lstStyle/>
                     <a:p>
-                      <a:pPr algn="ctr" indent="0" marL="0">
+                      <a:pPr marL="0" indent="0" algn="ctr">
                         <a:buNone/>
                       </a:pPr>
                       <a:r>
@@ -11572,6 +12142,11 @@
                     </a:lnB>
                   </a:tcPr>
                 </a:tc>
+                <a:extLst>
+                  <a:ext uri="{0D108BD9-81ED-4DB2-BD59-A6C34878D82A}">
+                    <a16:rowId xmlns:a16="http://schemas.microsoft.com/office/drawing/2014/main" val="10003"/>
+                  </a:ext>
+                </a:extLst>
               </a:tr>
               <a:tr h="374904">
                 <a:tc>
@@ -11579,7 +12154,7 @@
                     <a:bodyPr/>
                     <a:lstStyle/>
                     <a:p>
-                      <a:pPr indent="0" marL="0">
+                      <a:pPr marL="0" indent="0">
                         <a:buNone/>
                       </a:pPr>
                       <a:r>
@@ -11640,7 +12215,7 @@
                     <a:bodyPr/>
                     <a:lstStyle/>
                     <a:p>
-                      <a:pPr algn="ctr" indent="0" marL="0">
+                      <a:pPr marL="0" indent="0" algn="ctr">
                         <a:buNone/>
                       </a:pPr>
                       <a:r>
@@ -11701,7 +12276,7 @@
                     <a:bodyPr/>
                     <a:lstStyle/>
                     <a:p>
-                      <a:pPr algn="ctr" indent="0" marL="0">
+                      <a:pPr marL="0" indent="0" algn="ctr">
                         <a:buNone/>
                       </a:pPr>
                       <a:r>
@@ -11762,7 +12337,7 @@
                     <a:bodyPr/>
                     <a:lstStyle/>
                     <a:p>
-                      <a:pPr algn="ctr" indent="0" marL="0">
+                      <a:pPr marL="0" indent="0" algn="ctr">
                         <a:buNone/>
                       </a:pPr>
                       <a:r>
@@ -11818,6 +12393,11 @@
                     </a:solidFill>
                   </a:tcPr>
                 </a:tc>
+                <a:extLst>
+                  <a:ext uri="{0D108BD9-81ED-4DB2-BD59-A6C34878D82A}">
+                    <a16:rowId xmlns:a16="http://schemas.microsoft.com/office/drawing/2014/main" val="10004"/>
+                  </a:ext>
+                </a:extLst>
               </a:tr>
             </a:tbl>
           </a:graphicData>
@@ -11844,6 +12424,13 @@
           </a:solidFill>
           <a:ln/>
         </p:spPr>
+        <p:txBody>
+          <a:bodyPr/>
+          <a:lstStyle/>
+          <a:p>
+            <a:endParaRPr lang="it-IT"/>
+          </a:p>
+        </p:txBody>
       </p:sp>
       <p:sp>
         <p:nvSpPr>
@@ -11866,7 +12453,7 @@
           <a:bodyPr wrap="square" lIns="0" tIns="0" rIns="0" bIns="0" rtlCol="0" anchor="ctr"/>
           <a:lstStyle/>
           <a:p>
-            <a:pPr indent="0" marL="0">
+            <a:pPr marL="0" indent="0">
               <a:lnSpc>
                 <a:spcPct val="125000"/>
               </a:lnSpc>
@@ -11908,7 +12495,7 @@
           <a:bodyPr wrap="square" lIns="0" tIns="0" rIns="0" bIns="0" rtlCol="0" anchor="ctr"/>
           <a:lstStyle/>
           <a:p>
-            <a:pPr algn="r" indent="0" marL="0">
+            <a:pPr marL="0" indent="0" algn="r">
               <a:buNone/>
             </a:pPr>
             <a:r>
@@ -12227,4 +12814,319 @@
     </a:ext>
   </a:extLst>
 </a:theme>
+</file>
+
+<file path=ppt/theme/theme2.xml><?xml version="1.0" encoding="utf-8"?>
+<a:theme xmlns:a="http://schemas.openxmlformats.org/drawingml/2006/main" name="Tema di Office">
+  <a:themeElements>
+    <a:clrScheme name="Office">
+      <a:dk1>
+        <a:sysClr val="windowText" lastClr="000000"/>
+      </a:dk1>
+      <a:lt1>
+        <a:sysClr val="window" lastClr="FFFFFF"/>
+      </a:lt1>
+      <a:dk2>
+        <a:srgbClr val="0E2841"/>
+      </a:dk2>
+      <a:lt2>
+        <a:srgbClr val="E8E8E8"/>
+      </a:lt2>
+      <a:accent1>
+        <a:srgbClr val="156082"/>
+      </a:accent1>
+      <a:accent2>
+        <a:srgbClr val="E97132"/>
+      </a:accent2>
+      <a:accent3>
+        <a:srgbClr val="196B24"/>
+      </a:accent3>
+      <a:accent4>
+        <a:srgbClr val="0F9ED5"/>
+      </a:accent4>
+      <a:accent5>
+        <a:srgbClr val="A02B93"/>
+      </a:accent5>
+      <a:accent6>
+        <a:srgbClr val="4EA72E"/>
+      </a:accent6>
+      <a:hlink>
+        <a:srgbClr val="467886"/>
+      </a:hlink>
+      <a:folHlink>
+        <a:srgbClr val="96607D"/>
+      </a:folHlink>
+    </a:clrScheme>
+    <a:fontScheme name="Office">
+      <a:majorFont>
+        <a:latin typeface="Aptos Display" panose="02110004020202020204"/>
+        <a:ea typeface=""/>
+        <a:cs typeface=""/>
+        <a:font script="Jpan" typeface="游ゴシック Light"/>
+        <a:font script="Hang" typeface="맑은 고딕"/>
+        <a:font script="Hans" typeface="等线 Light"/>
+        <a:font script="Hant" typeface="新細明體"/>
+        <a:font script="Arab" typeface="Times New Roman"/>
+        <a:font script="Hebr" typeface="Times New Roman"/>
+        <a:font script="Thai" typeface="Angsana New"/>
+        <a:font script="Ethi" typeface="Nyala"/>
+        <a:font script="Beng" typeface="Vrinda"/>
+        <a:font script="Gujr" typeface="Shruti"/>
+        <a:font script="Khmr" typeface="MoolBoran"/>
+        <a:font script="Knda" typeface="Tunga"/>
+        <a:font script="Guru" typeface="Raavi"/>
+        <a:font script="Cans" typeface="Euphemia"/>
+        <a:font script="Cher" typeface="Plantagenet Cherokee"/>
+        <a:font script="Yiii" typeface="Microsoft Yi Baiti"/>
+        <a:font script="Tibt" typeface="Microsoft Himalaya"/>
+        <a:font script="Thaa" typeface="MV Boli"/>
+        <a:font script="Deva" typeface="Mangal"/>
+        <a:font script="Telu" typeface="Gautami"/>
+        <a:font script="Taml" typeface="Latha"/>
+        <a:font script="Syrc" typeface="Estrangelo Edessa"/>
+        <a:font script="Orya" typeface="Kalinga"/>
+        <a:font script="Mlym" typeface="Kartika"/>
+        <a:font script="Laoo" typeface="DokChampa"/>
+        <a:font script="Sinh" typeface="Iskoola Pota"/>
+        <a:font script="Mong" typeface="Mongolian Baiti"/>
+        <a:font script="Viet" typeface="Times New Roman"/>
+        <a:font script="Uigh" typeface="Microsoft Uighur"/>
+        <a:font script="Geor" typeface="Sylfaen"/>
+        <a:font script="Armn" typeface="Arial"/>
+        <a:font script="Bugi" typeface="Leelawadee UI"/>
+        <a:font script="Bopo" typeface="Microsoft JhengHei"/>
+        <a:font script="Java" typeface="Javanese Text"/>
+        <a:font script="Lisu" typeface="Segoe UI"/>
+        <a:font script="Mymr" typeface="Myanmar Text"/>
+        <a:font script="Nkoo" typeface="Ebrima"/>
+        <a:font script="Olck" typeface="Nirmala UI"/>
+        <a:font script="Osma" typeface="Ebrima"/>
+        <a:font script="Phag" typeface="Phagspa"/>
+        <a:font script="Syrn" typeface="Estrangelo Edessa"/>
+        <a:font script="Syrj" typeface="Estrangelo Edessa"/>
+        <a:font script="Syre" typeface="Estrangelo Edessa"/>
+        <a:font script="Sora" typeface="Nirmala UI"/>
+        <a:font script="Tale" typeface="Microsoft Tai Le"/>
+        <a:font script="Talu" typeface="Microsoft New Tai Lue"/>
+        <a:font script="Tfng" typeface="Ebrima"/>
+      </a:majorFont>
+      <a:minorFont>
+        <a:latin typeface="Aptos" panose="02110004020202020204"/>
+        <a:ea typeface=""/>
+        <a:cs typeface=""/>
+        <a:font script="Jpan" typeface="游ゴシック"/>
+        <a:font script="Hang" typeface="맑은 고딕"/>
+        <a:font script="Hans" typeface="等线"/>
+        <a:font script="Hant" typeface="新細明體"/>
+        <a:font script="Arab" typeface="Arial"/>
+        <a:font script="Hebr" typeface="Arial"/>
+        <a:font script="Thai" typeface="Cordia New"/>
+        <a:font script="Ethi" typeface="Nyala"/>
+        <a:font script="Beng" typeface="Vrinda"/>
+        <a:font script="Gujr" typeface="Shruti"/>
+        <a:font script="Khmr" typeface="DaunPenh"/>
+        <a:font script="Knda" typeface="Tunga"/>
+        <a:font script="Guru" typeface="Raavi"/>
+        <a:font script="Cans" typeface="Euphemia"/>
+        <a:font script="Cher" typeface="Plantagenet Cherokee"/>
+        <a:font script="Yiii" typeface="Microsoft Yi Baiti"/>
+        <a:font script="Tibt" typeface="Microsoft Himalaya"/>
+        <a:font script="Thaa" typeface="MV Boli"/>
+        <a:font script="Deva" typeface="Mangal"/>
+        <a:font script="Telu" typeface="Gautami"/>
+        <a:font script="Taml" typeface="Latha"/>
+        <a:font script="Syrc" typeface="Estrangelo Edessa"/>
+        <a:font script="Orya" typeface="Kalinga"/>
+        <a:font script="Mlym" typeface="Kartika"/>
+        <a:font script="Laoo" typeface="DokChampa"/>
+        <a:font script="Sinh" typeface="Iskoola Pota"/>
+        <a:font script="Mong" typeface="Mongolian Baiti"/>
+        <a:font script="Viet" typeface="Arial"/>
+        <a:font script="Uigh" typeface="Microsoft Uighur"/>
+        <a:font script="Geor" typeface="Sylfaen"/>
+        <a:font script="Armn" typeface="Arial"/>
+        <a:font script="Bugi" typeface="Leelawadee UI"/>
+        <a:font script="Bopo" typeface="Microsoft JhengHei"/>
+        <a:font script="Java" typeface="Javanese Text"/>
+        <a:font script="Lisu" typeface="Segoe UI"/>
+        <a:font script="Mymr" typeface="Myanmar Text"/>
+        <a:font script="Nkoo" typeface="Ebrima"/>
+        <a:font script="Olck" typeface="Nirmala UI"/>
+        <a:font script="Osma" typeface="Ebrima"/>
+        <a:font script="Phag" typeface="Phagspa"/>
+        <a:font script="Syrn" typeface="Estrangelo Edessa"/>
+        <a:font script="Syrj" typeface="Estrangelo Edessa"/>
+        <a:font script="Syre" typeface="Estrangelo Edessa"/>
+        <a:font script="Sora" typeface="Nirmala UI"/>
+        <a:font script="Tale" typeface="Microsoft Tai Le"/>
+        <a:font script="Talu" typeface="Microsoft New Tai Lue"/>
+        <a:font script="Tfng" typeface="Ebrima"/>
+      </a:minorFont>
+    </a:fontScheme>
+    <a:fmtScheme name="Office">
+      <a:fillStyleLst>
+        <a:solidFill>
+          <a:schemeClr val="phClr"/>
+        </a:solidFill>
+        <a:gradFill rotWithShape="1">
+          <a:gsLst>
+            <a:gs pos="0">
+              <a:schemeClr val="phClr">
+                <a:lumMod val="110000"/>
+                <a:satMod val="105000"/>
+                <a:tint val="67000"/>
+              </a:schemeClr>
+            </a:gs>
+            <a:gs pos="50000">
+              <a:schemeClr val="phClr">
+                <a:lumMod val="105000"/>
+                <a:satMod val="103000"/>
+                <a:tint val="73000"/>
+              </a:schemeClr>
+            </a:gs>
+            <a:gs pos="100000">
+              <a:schemeClr val="phClr">
+                <a:lumMod val="105000"/>
+                <a:satMod val="109000"/>
+                <a:tint val="81000"/>
+              </a:schemeClr>
+            </a:gs>
+          </a:gsLst>
+          <a:lin ang="5400000" scaled="0"/>
+        </a:gradFill>
+        <a:gradFill rotWithShape="1">
+          <a:gsLst>
+            <a:gs pos="0">
+              <a:schemeClr val="phClr">
+                <a:satMod val="103000"/>
+                <a:lumMod val="102000"/>
+                <a:tint val="94000"/>
+              </a:schemeClr>
+            </a:gs>
+            <a:gs pos="50000">
+              <a:schemeClr val="phClr">
+                <a:satMod val="110000"/>
+                <a:lumMod val="100000"/>
+                <a:shade val="100000"/>
+              </a:schemeClr>
+            </a:gs>
+            <a:gs pos="100000">
+              <a:schemeClr val="phClr">
+                <a:lumMod val="99000"/>
+                <a:satMod val="120000"/>
+                <a:shade val="78000"/>
+              </a:schemeClr>
+            </a:gs>
+          </a:gsLst>
+          <a:lin ang="5400000" scaled="0"/>
+        </a:gradFill>
+      </a:fillStyleLst>
+      <a:lnStyleLst>
+        <a:ln w="12700" cap="flat" cmpd="sng" algn="ctr">
+          <a:solidFill>
+            <a:schemeClr val="phClr"/>
+          </a:solidFill>
+          <a:prstDash val="solid"/>
+          <a:miter lim="800000"/>
+        </a:ln>
+        <a:ln w="19050" cap="flat" cmpd="sng" algn="ctr">
+          <a:solidFill>
+            <a:schemeClr val="phClr"/>
+          </a:solidFill>
+          <a:prstDash val="solid"/>
+          <a:miter lim="800000"/>
+        </a:ln>
+        <a:ln w="25400" cap="flat" cmpd="sng" algn="ctr">
+          <a:solidFill>
+            <a:schemeClr val="phClr"/>
+          </a:solidFill>
+          <a:prstDash val="solid"/>
+          <a:miter lim="800000"/>
+        </a:ln>
+      </a:lnStyleLst>
+      <a:effectStyleLst>
+        <a:effectStyle>
+          <a:effectLst/>
+        </a:effectStyle>
+        <a:effectStyle>
+          <a:effectLst/>
+        </a:effectStyle>
+        <a:effectStyle>
+          <a:effectLst>
+            <a:outerShdw blurRad="57150" dist="19050" dir="5400000" algn="ctr" rotWithShape="0">
+              <a:srgbClr val="000000">
+                <a:alpha val="63000"/>
+              </a:srgbClr>
+            </a:outerShdw>
+          </a:effectLst>
+        </a:effectStyle>
+      </a:effectStyleLst>
+      <a:bgFillStyleLst>
+        <a:solidFill>
+          <a:schemeClr val="phClr"/>
+        </a:solidFill>
+        <a:solidFill>
+          <a:schemeClr val="phClr">
+            <a:tint val="95000"/>
+            <a:satMod val="170000"/>
+          </a:schemeClr>
+        </a:solidFill>
+        <a:gradFill rotWithShape="1">
+          <a:gsLst>
+            <a:gs pos="0">
+              <a:schemeClr val="phClr">
+                <a:tint val="93000"/>
+                <a:satMod val="150000"/>
+                <a:shade val="98000"/>
+                <a:lumMod val="102000"/>
+              </a:schemeClr>
+            </a:gs>
+            <a:gs pos="50000">
+              <a:schemeClr val="phClr">
+                <a:tint val="98000"/>
+                <a:satMod val="130000"/>
+                <a:shade val="90000"/>
+                <a:lumMod val="103000"/>
+              </a:schemeClr>
+            </a:gs>
+            <a:gs pos="100000">
+              <a:schemeClr val="phClr">
+                <a:shade val="63000"/>
+                <a:satMod val="120000"/>
+              </a:schemeClr>
+            </a:gs>
+          </a:gsLst>
+          <a:lin ang="5400000" scaled="0"/>
+        </a:gradFill>
+      </a:bgFillStyleLst>
+    </a:fmtScheme>
+  </a:themeElements>
+  <a:objectDefaults>
+    <a:lnDef>
+      <a:spPr/>
+      <a:bodyPr/>
+      <a:lstStyle/>
+      <a:style>
+        <a:lnRef idx="2">
+          <a:schemeClr val="accent1"/>
+        </a:lnRef>
+        <a:fillRef idx="0">
+          <a:schemeClr val="accent1"/>
+        </a:fillRef>
+        <a:effectRef idx="1">
+          <a:schemeClr val="accent1"/>
+        </a:effectRef>
+        <a:fontRef idx="minor">
+          <a:schemeClr val="tx1"/>
+        </a:fontRef>
+      </a:style>
+    </a:lnDef>
+  </a:objectDefaults>
+  <a:extraClrSchemeLst/>
+  <a:extLst>
+    <a:ext uri="{05A4C25C-085E-4340-85A3-A5531E510DB2}">
+      <thm15:themeFamily xmlns:thm15="http://schemas.microsoft.com/office/thememl/2012/main" name="Office Theme" id="{2E142A2C-CD16-42D6-873A-C26D2A0506FA}" vid="{1BDDFF52-6CD6-40A5-AB3C-68EB2F1E4D0A}"/>
+    </a:ext>
+  </a:extLst>
+</a:theme>
 </file>